--- a/Athanase_Investment_Trust_Pitch.pptx
+++ b/Athanase_Investment_Trust_Pitch.pptx
@@ -5215,7 +5215,7 @@
                 </a:solidFill>
                 <a:latin typeface="Times New Roman"/>
               </a:rPr>
-              <a:t>+6 pts</a:t>
+              <a:t>+10 pts</a:t>
             </a:r>
           </a:p>
         </p:txBody>

--- a/Athanase_Investment_Trust_Pitch.pptx
+++ b/Athanase_Investment_Trust_Pitch.pptx
@@ -6351,7 +6351,7 @@
                 </a:solidFill>
                 <a:latin typeface="Times New Roman"/>
               </a:rPr>
-              <a:t>Representative investments — the strategy in practice</a:t>
+              <a:t>Every investment in the current fund (AIP Fund II)</a:t>
             </a:r>
           </a:p>
         </p:txBody>
@@ -6393,7 +6393,7 @@
                 </a:solidFill>
                 <a:latin typeface="Arial"/>
               </a:rPr>
-              <a:t>A selection from the current strategy (AIP Fund II) — winners, and the discipline on the ones that disappoint.</a:t>
+              <a:t>The full book, not a selection — winners, and the discipline on the one that disappointed.</a:t>
             </a:r>
           </a:p>
         </p:txBody>
@@ -6449,7 +6449,7 @@
         <p:spPr>
           <a:xfrm>
             <a:off x="438922" y="2340864"/>
-            <a:ext cx="2487230" cy="331622"/>
+            <a:ext cx="2340922" cy="229209"/>
           </a:xfrm>
           <a:prstGeom prst="rect">
             <a:avLst/>
@@ -6493,7 +6493,7 @@
         <p:spPr>
           <a:xfrm>
             <a:off x="512076" y="2340864"/>
-            <a:ext cx="2370184" cy="331622"/>
+            <a:ext cx="2223876" cy="229209"/>
           </a:xfrm>
           <a:prstGeom prst="rect">
             <a:avLst/>
@@ -6515,7 +6515,7 @@
               </a:spcAft>
             </a:pPr>
             <a:r>
-              <a:rPr sz="800" b="1" i="0">
+              <a:rPr sz="760" b="1" i="0">
                 <a:solidFill>
                   <a:srgbClr val="FFFFFF"/>
                 </a:solidFill>
@@ -6534,8 +6534,8 @@
         </p:nvSpPr>
         <p:spPr>
           <a:xfrm>
-            <a:off x="2926153" y="2340864"/>
-            <a:ext cx="1901999" cy="331622"/>
+            <a:off x="2779845" y="2340864"/>
+            <a:ext cx="1755691" cy="229209"/>
           </a:xfrm>
           <a:prstGeom prst="rect">
             <a:avLst/>
@@ -6578,8 +6578,8 @@
         </p:nvSpPr>
         <p:spPr>
           <a:xfrm>
-            <a:off x="2999307" y="2340864"/>
-            <a:ext cx="1784953" cy="331622"/>
+            <a:off x="2852999" y="2340864"/>
+            <a:ext cx="1638645" cy="229209"/>
           </a:xfrm>
           <a:prstGeom prst="rect">
             <a:avLst/>
@@ -6601,7 +6601,7 @@
               </a:spcAft>
             </a:pPr>
             <a:r>
-              <a:rPr sz="800" b="1" i="0">
+              <a:rPr sz="760" b="1" i="0">
                 <a:solidFill>
                   <a:srgbClr val="FFFFFF"/>
                 </a:solidFill>
@@ -6620,8 +6620,8 @@
         </p:nvSpPr>
         <p:spPr>
           <a:xfrm>
-            <a:off x="4828152" y="2340864"/>
-            <a:ext cx="1463076" cy="331622"/>
+            <a:off x="4535537" y="2340864"/>
+            <a:ext cx="1536230" cy="229209"/>
           </a:xfrm>
           <a:prstGeom prst="rect">
             <a:avLst/>
@@ -6664,8 +6664,8 @@
         </p:nvSpPr>
         <p:spPr>
           <a:xfrm>
-            <a:off x="4901306" y="2340864"/>
-            <a:ext cx="1346030" cy="331622"/>
+            <a:off x="4608691" y="2340864"/>
+            <a:ext cx="1419184" cy="229209"/>
           </a:xfrm>
           <a:prstGeom prst="rect">
             <a:avLst/>
@@ -6687,7 +6687,7 @@
               </a:spcAft>
             </a:pPr>
             <a:r>
-              <a:rPr sz="800" b="1" i="0">
+              <a:rPr sz="760" b="1" i="0">
                 <a:solidFill>
                   <a:srgbClr val="FFFFFF"/>
                 </a:solidFill>
@@ -6706,8 +6706,8 @@
         </p:nvSpPr>
         <p:spPr>
           <a:xfrm>
-            <a:off x="6291229" y="2340864"/>
-            <a:ext cx="1463076" cy="331622"/>
+            <a:off x="6071767" y="2340864"/>
+            <a:ext cx="1463076" cy="229209"/>
           </a:xfrm>
           <a:prstGeom prst="rect">
             <a:avLst/>
@@ -6750,8 +6750,8 @@
         </p:nvSpPr>
         <p:spPr>
           <a:xfrm>
-            <a:off x="6364383" y="2340864"/>
-            <a:ext cx="1346030" cy="331622"/>
+            <a:off x="6144921" y="2340864"/>
+            <a:ext cx="1346030" cy="229209"/>
           </a:xfrm>
           <a:prstGeom prst="rect">
             <a:avLst/>
@@ -6773,7 +6773,7 @@
               </a:spcAft>
             </a:pPr>
             <a:r>
-              <a:rPr sz="800" b="1" i="0">
+              <a:rPr sz="760" b="1" i="0">
                 <a:solidFill>
                   <a:srgbClr val="FFFFFF"/>
                 </a:solidFill>
@@ -6792,8 +6792,8 @@
         </p:nvSpPr>
         <p:spPr>
           <a:xfrm>
-            <a:off x="7754305" y="2340864"/>
-            <a:ext cx="1558176" cy="331622"/>
+            <a:off x="7534844" y="2340864"/>
+            <a:ext cx="1777638" cy="229209"/>
           </a:xfrm>
           <a:prstGeom prst="rect">
             <a:avLst/>
@@ -6836,8 +6836,8 @@
         </p:nvSpPr>
         <p:spPr>
           <a:xfrm>
-            <a:off x="7827459" y="2340864"/>
-            <a:ext cx="1441130" cy="331622"/>
+            <a:off x="7607998" y="2340864"/>
+            <a:ext cx="1660591" cy="229209"/>
           </a:xfrm>
           <a:prstGeom prst="rect">
             <a:avLst/>
@@ -6859,7 +6859,7 @@
               </a:spcAft>
             </a:pPr>
             <a:r>
-              <a:rPr sz="800" b="1" i="0">
+              <a:rPr sz="760" b="1" i="0">
                 <a:solidFill>
                   <a:srgbClr val="FFFFFF"/>
                 </a:solidFill>
@@ -6878,8 +6878,8 @@
         </p:nvSpPr>
         <p:spPr>
           <a:xfrm>
-            <a:off x="438922" y="2672486"/>
-            <a:ext cx="2487230" cy="331622"/>
+            <a:off x="438922" y="2570073"/>
+            <a:ext cx="2340922" cy="229209"/>
           </a:xfrm>
           <a:prstGeom prst="rect">
             <a:avLst/>
@@ -6922,8 +6922,8 @@
         </p:nvSpPr>
         <p:spPr>
           <a:xfrm>
-            <a:off x="512076" y="2672486"/>
-            <a:ext cx="2370184" cy="331622"/>
+            <a:off x="512076" y="2570073"/>
+            <a:ext cx="2223876" cy="229209"/>
           </a:xfrm>
           <a:prstGeom prst="rect">
             <a:avLst/>
@@ -6945,13 +6945,13 @@
               </a:spcAft>
             </a:pPr>
             <a:r>
-              <a:rPr sz="760" b="1" i="0">
+              <a:rPr sz="720" b="1" i="0">
                 <a:solidFill>
                   <a:srgbClr val="314359"/>
                 </a:solidFill>
                 <a:latin typeface="Arial"/>
               </a:rPr>
-              <a:t>Bufab</a:t>
+              <a:t>Ngex</a:t>
             </a:r>
           </a:p>
         </p:txBody>
@@ -6964,8 +6964,8 @@
         </p:nvSpPr>
         <p:spPr>
           <a:xfrm>
-            <a:off x="2926153" y="2672486"/>
-            <a:ext cx="1901999" cy="331622"/>
+            <a:off x="2779845" y="2570073"/>
+            <a:ext cx="1755691" cy="229209"/>
           </a:xfrm>
           <a:prstGeom prst="rect">
             <a:avLst/>
@@ -7008,8 +7008,8 @@
         </p:nvSpPr>
         <p:spPr>
           <a:xfrm>
-            <a:off x="2999307" y="2672486"/>
-            <a:ext cx="1784953" cy="331622"/>
+            <a:off x="2852999" y="2570073"/>
+            <a:ext cx="1638645" cy="229209"/>
           </a:xfrm>
           <a:prstGeom prst="rect">
             <a:avLst/>
@@ -7031,13 +7031,13 @@
               </a:spcAft>
             </a:pPr>
             <a:r>
-              <a:rPr sz="760" b="0" i="0">
+              <a:rPr sz="720" b="0" i="0">
                 <a:solidFill>
                   <a:srgbClr val="0E1620"/>
                 </a:solidFill>
                 <a:latin typeface="Arial"/>
               </a:rPr>
-              <a:t>2015-2025</a:t>
+              <a:t>2016-2025</a:t>
             </a:r>
           </a:p>
         </p:txBody>
@@ -7050,8 +7050,8 @@
         </p:nvSpPr>
         <p:spPr>
           <a:xfrm>
-            <a:off x="4828152" y="2672486"/>
-            <a:ext cx="1463076" cy="331622"/>
+            <a:off x="4535537" y="2570073"/>
+            <a:ext cx="1536230" cy="229209"/>
           </a:xfrm>
           <a:prstGeom prst="rect">
             <a:avLst/>
@@ -7094,8 +7094,8 @@
         </p:nvSpPr>
         <p:spPr>
           <a:xfrm>
-            <a:off x="4901306" y="2672486"/>
-            <a:ext cx="1346030" cy="331622"/>
+            <a:off x="4608691" y="2570073"/>
+            <a:ext cx="1419184" cy="229209"/>
           </a:xfrm>
           <a:prstGeom prst="rect">
             <a:avLst/>
@@ -7117,13 +7117,13 @@
               </a:spcAft>
             </a:pPr>
             <a:r>
-              <a:rPr sz="760" b="0" i="0">
+              <a:rPr sz="720" b="0" i="0">
                 <a:solidFill>
                   <a:srgbClr val="0E1620"/>
                 </a:solidFill>
                 <a:latin typeface="Arial"/>
               </a:rPr>
-              <a:t>35%</a:t>
+              <a:t>69%</a:t>
             </a:r>
           </a:p>
         </p:txBody>
@@ -7136,8 +7136,8 @@
         </p:nvSpPr>
         <p:spPr>
           <a:xfrm>
-            <a:off x="6291229" y="2672486"/>
-            <a:ext cx="1463076" cy="331622"/>
+            <a:off x="6071767" y="2570073"/>
+            <a:ext cx="1463076" cy="229209"/>
           </a:xfrm>
           <a:prstGeom prst="rect">
             <a:avLst/>
@@ -7180,8 +7180,8 @@
         </p:nvSpPr>
         <p:spPr>
           <a:xfrm>
-            <a:off x="6364383" y="2672486"/>
-            <a:ext cx="1346030" cy="331622"/>
+            <a:off x="6144921" y="2570073"/>
+            <a:ext cx="1346030" cy="229209"/>
           </a:xfrm>
           <a:prstGeom prst="rect">
             <a:avLst/>
@@ -7203,13 +7203,13 @@
               </a:spcAft>
             </a:pPr>
             <a:r>
-              <a:rPr sz="760" b="0" i="0">
+              <a:rPr sz="720" b="0" i="0">
                 <a:solidFill>
                   <a:srgbClr val="0E1620"/>
                 </a:solidFill>
                 <a:latin typeface="Arial"/>
               </a:rPr>
-              <a:t>2.0×</a:t>
+              <a:t>6.2×</a:t>
             </a:r>
           </a:p>
         </p:txBody>
@@ -7222,8 +7222,8 @@
         </p:nvSpPr>
         <p:spPr>
           <a:xfrm>
-            <a:off x="7754305" y="2672486"/>
-            <a:ext cx="1558176" cy="331622"/>
+            <a:off x="7534844" y="2570073"/>
+            <a:ext cx="1777638" cy="229209"/>
           </a:xfrm>
           <a:prstGeom prst="rect">
             <a:avLst/>
@@ -7266,8 +7266,8 @@
         </p:nvSpPr>
         <p:spPr>
           <a:xfrm>
-            <a:off x="7827459" y="2672486"/>
-            <a:ext cx="1441130" cy="331622"/>
+            <a:off x="7607998" y="2570073"/>
+            <a:ext cx="1660591" cy="229209"/>
           </a:xfrm>
           <a:prstGeom prst="rect">
             <a:avLst/>
@@ -7289,13 +7289,13 @@
               </a:spcAft>
             </a:pPr>
             <a:r>
-              <a:rPr sz="760" b="0" i="0">
+              <a:rPr sz="720" b="0" i="0">
                 <a:solidFill>
                   <a:srgbClr val="0E1620"/>
                 </a:solidFill>
                 <a:latin typeface="Arial"/>
               </a:rPr>
-              <a:t>+27%</a:t>
+              <a:t>+59%</a:t>
             </a:r>
           </a:p>
         </p:txBody>
@@ -7308,8 +7308,8 @@
         </p:nvSpPr>
         <p:spPr>
           <a:xfrm>
-            <a:off x="438922" y="3004108"/>
-            <a:ext cx="2487230" cy="331622"/>
+            <a:off x="438922" y="2799283"/>
+            <a:ext cx="2340922" cy="229209"/>
           </a:xfrm>
           <a:prstGeom prst="rect">
             <a:avLst/>
@@ -7352,8 +7352,8 @@
         </p:nvSpPr>
         <p:spPr>
           <a:xfrm>
-            <a:off x="512076" y="3004108"/>
-            <a:ext cx="2370184" cy="331622"/>
+            <a:off x="512076" y="2799283"/>
+            <a:ext cx="2223876" cy="229209"/>
           </a:xfrm>
           <a:prstGeom prst="rect">
             <a:avLst/>
@@ -7375,13 +7375,13 @@
               </a:spcAft>
             </a:pPr>
             <a:r>
-              <a:rPr sz="760" b="1" i="0">
+              <a:rPr sz="720" b="1" i="0">
                 <a:solidFill>
                   <a:srgbClr val="314359"/>
                 </a:solidFill>
                 <a:latin typeface="Arial"/>
               </a:rPr>
-              <a:t>DistIt</a:t>
+              <a:t>AI</a:t>
             </a:r>
           </a:p>
         </p:txBody>
@@ -7394,8 +7394,8 @@
         </p:nvSpPr>
         <p:spPr>
           <a:xfrm>
-            <a:off x="2926153" y="3004108"/>
-            <a:ext cx="1901999" cy="331622"/>
+            <a:off x="2779845" y="2799283"/>
+            <a:ext cx="1755691" cy="229209"/>
           </a:xfrm>
           <a:prstGeom prst="rect">
             <a:avLst/>
@@ -7438,8 +7438,8 @@
         </p:nvSpPr>
         <p:spPr>
           <a:xfrm>
-            <a:off x="2999307" y="3004108"/>
-            <a:ext cx="1784953" cy="331622"/>
+            <a:off x="2852999" y="2799283"/>
+            <a:ext cx="1638645" cy="229209"/>
           </a:xfrm>
           <a:prstGeom prst="rect">
             <a:avLst/>
@@ -7461,13 +7461,13 @@
               </a:spcAft>
             </a:pPr>
             <a:r>
-              <a:rPr sz="760" b="0" i="0">
+              <a:rPr sz="720" b="0" i="0">
                 <a:solidFill>
                   <a:srgbClr val="0E1620"/>
                 </a:solidFill>
                 <a:latin typeface="Arial"/>
               </a:rPr>
-              <a:t>2015-2025</a:t>
+              <a:t>2020-2025</a:t>
             </a:r>
           </a:p>
         </p:txBody>
@@ -7480,8 +7480,8 @@
         </p:nvSpPr>
         <p:spPr>
           <a:xfrm>
-            <a:off x="4828152" y="3004108"/>
-            <a:ext cx="1463076" cy="331622"/>
+            <a:off x="4535537" y="2799283"/>
+            <a:ext cx="1536230" cy="229209"/>
           </a:xfrm>
           <a:prstGeom prst="rect">
             <a:avLst/>
@@ -7524,8 +7524,8 @@
         </p:nvSpPr>
         <p:spPr>
           <a:xfrm>
-            <a:off x="4901306" y="3004108"/>
-            <a:ext cx="1346030" cy="331622"/>
+            <a:off x="4608691" y="2799283"/>
+            <a:ext cx="1419184" cy="229209"/>
           </a:xfrm>
           <a:prstGeom prst="rect">
             <a:avLst/>
@@ -7547,13 +7547,13 @@
               </a:spcAft>
             </a:pPr>
             <a:r>
-              <a:rPr sz="760" b="0" i="0">
+              <a:rPr sz="720" b="0" i="0">
                 <a:solidFill>
                   <a:srgbClr val="0E1620"/>
                 </a:solidFill>
                 <a:latin typeface="Arial"/>
               </a:rPr>
-              <a:t>7%</a:t>
+              <a:t>n.m.</a:t>
             </a:r>
           </a:p>
         </p:txBody>
@@ -7566,8 +7566,8 @@
         </p:nvSpPr>
         <p:spPr>
           <a:xfrm>
-            <a:off x="6291229" y="3004108"/>
-            <a:ext cx="1463076" cy="331622"/>
+            <a:off x="6071767" y="2799283"/>
+            <a:ext cx="1463076" cy="229209"/>
           </a:xfrm>
           <a:prstGeom prst="rect">
             <a:avLst/>
@@ -7610,8 +7610,8 @@
         </p:nvSpPr>
         <p:spPr>
           <a:xfrm>
-            <a:off x="6364383" y="3004108"/>
-            <a:ext cx="1346030" cy="331622"/>
+            <a:off x="6144921" y="2799283"/>
+            <a:ext cx="1346030" cy="229209"/>
           </a:xfrm>
           <a:prstGeom prst="rect">
             <a:avLst/>
@@ -7633,13 +7633,13 @@
               </a:spcAft>
             </a:pPr>
             <a:r>
-              <a:rPr sz="760" b="0" i="0">
+              <a:rPr sz="720" b="0" i="0">
                 <a:solidFill>
                   <a:srgbClr val="0E1620"/>
                 </a:solidFill>
                 <a:latin typeface="Arial"/>
               </a:rPr>
-              <a:t>1.2×</a:t>
+              <a:t>5.4×</a:t>
             </a:r>
           </a:p>
         </p:txBody>
@@ -7652,8 +7652,8 @@
         </p:nvSpPr>
         <p:spPr>
           <a:xfrm>
-            <a:off x="7754305" y="3004108"/>
-            <a:ext cx="1558176" cy="331622"/>
+            <a:off x="7534844" y="2799283"/>
+            <a:ext cx="1777638" cy="229209"/>
           </a:xfrm>
           <a:prstGeom prst="rect">
             <a:avLst/>
@@ -7696,8 +7696,8 @@
         </p:nvSpPr>
         <p:spPr>
           <a:xfrm>
-            <a:off x="7827459" y="3004108"/>
-            <a:ext cx="1441130" cy="331622"/>
+            <a:off x="7607998" y="2799283"/>
+            <a:ext cx="1660591" cy="229209"/>
           </a:xfrm>
           <a:prstGeom prst="rect">
             <a:avLst/>
@@ -7719,13 +7719,13 @@
               </a:spcAft>
             </a:pPr>
             <a:r>
-              <a:rPr sz="760" b="0" i="0">
+              <a:rPr sz="720" b="0" i="0">
                 <a:solidFill>
                   <a:srgbClr val="0E1620"/>
                 </a:solidFill>
                 <a:latin typeface="Arial"/>
               </a:rPr>
-              <a:t>-1%</a:t>
+              <a:t>n.m.</a:t>
             </a:r>
           </a:p>
         </p:txBody>
@@ -7738,8 +7738,8 @@
         </p:nvSpPr>
         <p:spPr>
           <a:xfrm>
-            <a:off x="438922" y="3335731"/>
-            <a:ext cx="2487230" cy="331622"/>
+            <a:off x="438922" y="3028492"/>
+            <a:ext cx="2340922" cy="229209"/>
           </a:xfrm>
           <a:prstGeom prst="rect">
             <a:avLst/>
@@ -7782,8 +7782,8 @@
         </p:nvSpPr>
         <p:spPr>
           <a:xfrm>
-            <a:off x="512076" y="3335731"/>
-            <a:ext cx="2370184" cy="331622"/>
+            <a:off x="512076" y="3028492"/>
+            <a:ext cx="2223876" cy="229209"/>
           </a:xfrm>
           <a:prstGeom prst="rect">
             <a:avLst/>
@@ -7805,13 +7805,13 @@
               </a:spcAft>
             </a:pPr>
             <a:r>
-              <a:rPr sz="760" b="1" i="0">
+              <a:rPr sz="720" b="1" i="0">
                 <a:solidFill>
                   <a:srgbClr val="314359"/>
                 </a:solidFill>
                 <a:latin typeface="Arial"/>
               </a:rPr>
-              <a:t>Ngex</a:t>
+              <a:t>Roko</a:t>
             </a:r>
           </a:p>
         </p:txBody>
@@ -7824,8 +7824,8 @@
         </p:nvSpPr>
         <p:spPr>
           <a:xfrm>
-            <a:off x="2926153" y="3335731"/>
-            <a:ext cx="1901999" cy="331622"/>
+            <a:off x="2779845" y="3028492"/>
+            <a:ext cx="1755691" cy="229209"/>
           </a:xfrm>
           <a:prstGeom prst="rect">
             <a:avLst/>
@@ -7868,8 +7868,8 @@
         </p:nvSpPr>
         <p:spPr>
           <a:xfrm>
-            <a:off x="2999307" y="3335731"/>
-            <a:ext cx="1784953" cy="331622"/>
+            <a:off x="2852999" y="3028492"/>
+            <a:ext cx="1638645" cy="229209"/>
           </a:xfrm>
           <a:prstGeom prst="rect">
             <a:avLst/>
@@ -7891,13 +7891,13 @@
               </a:spcAft>
             </a:pPr>
             <a:r>
-              <a:rPr sz="760" b="0" i="0">
+              <a:rPr sz="720" b="0" i="0">
                 <a:solidFill>
                   <a:srgbClr val="0E1620"/>
                 </a:solidFill>
                 <a:latin typeface="Arial"/>
               </a:rPr>
-              <a:t>2016-2025</a:t>
+              <a:t>2019-2025</a:t>
             </a:r>
           </a:p>
         </p:txBody>
@@ -7910,8 +7910,8 @@
         </p:nvSpPr>
         <p:spPr>
           <a:xfrm>
-            <a:off x="4828152" y="3335731"/>
-            <a:ext cx="1463076" cy="331622"/>
+            <a:off x="4535537" y="3028492"/>
+            <a:ext cx="1536230" cy="229209"/>
           </a:xfrm>
           <a:prstGeom prst="rect">
             <a:avLst/>
@@ -7954,8 +7954,8 @@
         </p:nvSpPr>
         <p:spPr>
           <a:xfrm>
-            <a:off x="4901306" y="3335731"/>
-            <a:ext cx="1346030" cy="331622"/>
+            <a:off x="4608691" y="3028492"/>
+            <a:ext cx="1419184" cy="229209"/>
           </a:xfrm>
           <a:prstGeom prst="rect">
             <a:avLst/>
@@ -7977,13 +7977,13 @@
               </a:spcAft>
             </a:pPr>
             <a:r>
-              <a:rPr sz="760" b="0" i="0">
+              <a:rPr sz="720" b="0" i="0">
                 <a:solidFill>
                   <a:srgbClr val="0E1620"/>
                 </a:solidFill>
                 <a:latin typeface="Arial"/>
               </a:rPr>
-              <a:t>69%</a:t>
+              <a:t>28%</a:t>
             </a:r>
           </a:p>
         </p:txBody>
@@ -7996,8 +7996,8 @@
         </p:nvSpPr>
         <p:spPr>
           <a:xfrm>
-            <a:off x="6291229" y="3335731"/>
-            <a:ext cx="1463076" cy="331622"/>
+            <a:off x="6071767" y="3028492"/>
+            <a:ext cx="1463076" cy="229209"/>
           </a:xfrm>
           <a:prstGeom prst="rect">
             <a:avLst/>
@@ -8040,8 +8040,8 @@
         </p:nvSpPr>
         <p:spPr>
           <a:xfrm>
-            <a:off x="6364383" y="3335731"/>
-            <a:ext cx="1346030" cy="331622"/>
+            <a:off x="6144921" y="3028492"/>
+            <a:ext cx="1346030" cy="229209"/>
           </a:xfrm>
           <a:prstGeom prst="rect">
             <a:avLst/>
@@ -8063,13 +8063,13 @@
               </a:spcAft>
             </a:pPr>
             <a:r>
-              <a:rPr sz="760" b="0" i="0">
+              <a:rPr sz="720" b="0" i="0">
                 <a:solidFill>
                   <a:srgbClr val="0E1620"/>
                 </a:solidFill>
                 <a:latin typeface="Arial"/>
               </a:rPr>
-              <a:t>6.2×</a:t>
+              <a:t>5.1×</a:t>
             </a:r>
           </a:p>
         </p:txBody>
@@ -8082,8 +8082,8 @@
         </p:nvSpPr>
         <p:spPr>
           <a:xfrm>
-            <a:off x="7754305" y="3335731"/>
-            <a:ext cx="1558176" cy="331622"/>
+            <a:off x="7534844" y="3028492"/>
+            <a:ext cx="1777638" cy="229209"/>
           </a:xfrm>
           <a:prstGeom prst="rect">
             <a:avLst/>
@@ -8126,8 +8126,8 @@
         </p:nvSpPr>
         <p:spPr>
           <a:xfrm>
-            <a:off x="7827459" y="3335731"/>
-            <a:ext cx="1441130" cy="331622"/>
+            <a:off x="7607998" y="3028492"/>
+            <a:ext cx="1660591" cy="229209"/>
           </a:xfrm>
           <a:prstGeom prst="rect">
             <a:avLst/>
@@ -8149,13 +8149,13 @@
               </a:spcAft>
             </a:pPr>
             <a:r>
-              <a:rPr sz="760" b="0" i="0">
+              <a:rPr sz="720" b="0" i="0">
                 <a:solidFill>
                   <a:srgbClr val="0E1620"/>
                 </a:solidFill>
                 <a:latin typeface="Arial"/>
               </a:rPr>
-              <a:t>+59%</a:t>
+              <a:t>+18%</a:t>
             </a:r>
           </a:p>
         </p:txBody>
@@ -8168,8 +8168,8 @@
         </p:nvSpPr>
         <p:spPr>
           <a:xfrm>
-            <a:off x="438922" y="3667353"/>
-            <a:ext cx="2487230" cy="331622"/>
+            <a:off x="438922" y="3257702"/>
+            <a:ext cx="2340922" cy="229209"/>
           </a:xfrm>
           <a:prstGeom prst="rect">
             <a:avLst/>
@@ -8212,8 +8212,8 @@
         </p:nvSpPr>
         <p:spPr>
           <a:xfrm>
-            <a:off x="512076" y="3667353"/>
-            <a:ext cx="2370184" cy="331622"/>
+            <a:off x="512076" y="3257702"/>
+            <a:ext cx="2223876" cy="229209"/>
           </a:xfrm>
           <a:prstGeom prst="rect">
             <a:avLst/>
@@ -8235,13 +8235,13 @@
               </a:spcAft>
             </a:pPr>
             <a:r>
-              <a:rPr sz="760" b="1" i="0">
+              <a:rPr sz="720" b="1" i="0">
                 <a:solidFill>
                   <a:srgbClr val="314359"/>
                 </a:solidFill>
                 <a:latin typeface="Arial"/>
               </a:rPr>
-              <a:t>Alcadon</a:t>
+              <a:t>Zutec</a:t>
             </a:r>
           </a:p>
         </p:txBody>
@@ -8254,8 +8254,8 @@
         </p:nvSpPr>
         <p:spPr>
           <a:xfrm>
-            <a:off x="2926153" y="3667353"/>
-            <a:ext cx="1901999" cy="331622"/>
+            <a:off x="2779845" y="3257702"/>
+            <a:ext cx="1755691" cy="229209"/>
           </a:xfrm>
           <a:prstGeom prst="rect">
             <a:avLst/>
@@ -8298,8 +8298,8 @@
         </p:nvSpPr>
         <p:spPr>
           <a:xfrm>
-            <a:off x="2999307" y="3667353"/>
-            <a:ext cx="1784953" cy="331622"/>
+            <a:off x="2852999" y="3257702"/>
+            <a:ext cx="1638645" cy="229209"/>
           </a:xfrm>
           <a:prstGeom prst="rect">
             <a:avLst/>
@@ -8321,13 +8321,13 @@
               </a:spcAft>
             </a:pPr>
             <a:r>
-              <a:rPr sz="760" b="0" i="0">
+              <a:rPr sz="720" b="0" i="0">
                 <a:solidFill>
                   <a:srgbClr val="0E1620"/>
                 </a:solidFill>
                 <a:latin typeface="Arial"/>
               </a:rPr>
-              <a:t>2016-2025</a:t>
+              <a:t>2018-2025</a:t>
             </a:r>
           </a:p>
         </p:txBody>
@@ -8340,8 +8340,8 @@
         </p:nvSpPr>
         <p:spPr>
           <a:xfrm>
-            <a:off x="4828152" y="3667353"/>
-            <a:ext cx="1463076" cy="331622"/>
+            <a:off x="4535537" y="3257702"/>
+            <a:ext cx="1536230" cy="229209"/>
           </a:xfrm>
           <a:prstGeom prst="rect">
             <a:avLst/>
@@ -8384,8 +8384,8 @@
         </p:nvSpPr>
         <p:spPr>
           <a:xfrm>
-            <a:off x="4901306" y="3667353"/>
-            <a:ext cx="1346030" cy="331622"/>
+            <a:off x="4608691" y="3257702"/>
+            <a:ext cx="1419184" cy="229209"/>
           </a:xfrm>
           <a:prstGeom prst="rect">
             <a:avLst/>
@@ -8407,13 +8407,13 @@
               </a:spcAft>
             </a:pPr>
             <a:r>
-              <a:rPr sz="760" b="0" i="0">
+              <a:rPr sz="720" b="0" i="0">
                 <a:solidFill>
                   <a:srgbClr val="0E1620"/>
                 </a:solidFill>
                 <a:latin typeface="Arial"/>
               </a:rPr>
-              <a:t>74%</a:t>
+              <a:t>38%</a:t>
             </a:r>
           </a:p>
         </p:txBody>
@@ -8426,8 +8426,8 @@
         </p:nvSpPr>
         <p:spPr>
           <a:xfrm>
-            <a:off x="6291229" y="3667353"/>
-            <a:ext cx="1463076" cy="331622"/>
+            <a:off x="6071767" y="3257702"/>
+            <a:ext cx="1463076" cy="229209"/>
           </a:xfrm>
           <a:prstGeom prst="rect">
             <a:avLst/>
@@ -8470,8 +8470,8 @@
         </p:nvSpPr>
         <p:spPr>
           <a:xfrm>
-            <a:off x="6364383" y="3667353"/>
-            <a:ext cx="1346030" cy="331622"/>
+            <a:off x="6144921" y="3257702"/>
+            <a:ext cx="1346030" cy="229209"/>
           </a:xfrm>
           <a:prstGeom prst="rect">
             <a:avLst/>
@@ -8493,13 +8493,13 @@
               </a:spcAft>
             </a:pPr>
             <a:r>
-              <a:rPr sz="760" b="0" i="0">
+              <a:rPr sz="720" b="0" i="0">
                 <a:solidFill>
                   <a:srgbClr val="0E1620"/>
                 </a:solidFill>
                 <a:latin typeface="Arial"/>
               </a:rPr>
-              <a:t>1.7×</a:t>
+              <a:t>2.8×</a:t>
             </a:r>
           </a:p>
         </p:txBody>
@@ -8512,8 +8512,8 @@
         </p:nvSpPr>
         <p:spPr>
           <a:xfrm>
-            <a:off x="7754305" y="3667353"/>
-            <a:ext cx="1558176" cy="331622"/>
+            <a:off x="7534844" y="3257702"/>
+            <a:ext cx="1777638" cy="229209"/>
           </a:xfrm>
           <a:prstGeom prst="rect">
             <a:avLst/>
@@ -8556,8 +8556,8 @@
         </p:nvSpPr>
         <p:spPr>
           <a:xfrm>
-            <a:off x="7827459" y="3667353"/>
-            <a:ext cx="1441130" cy="331622"/>
+            <a:off x="7607998" y="3257702"/>
+            <a:ext cx="1660591" cy="229209"/>
           </a:xfrm>
           <a:prstGeom prst="rect">
             <a:avLst/>
@@ -8579,13 +8579,13 @@
               </a:spcAft>
             </a:pPr>
             <a:r>
-              <a:rPr sz="760" b="0" i="0">
+              <a:rPr sz="720" b="0" i="0">
                 <a:solidFill>
                   <a:srgbClr val="0E1620"/>
                 </a:solidFill>
                 <a:latin typeface="Arial"/>
               </a:rPr>
-              <a:t>+65%</a:t>
+              <a:t>+29%</a:t>
             </a:r>
           </a:p>
         </p:txBody>
@@ -8598,8 +8598,8 @@
         </p:nvSpPr>
         <p:spPr>
           <a:xfrm>
-            <a:off x="438922" y="3998976"/>
-            <a:ext cx="2487230" cy="331622"/>
+            <a:off x="438922" y="3486912"/>
+            <a:ext cx="2340922" cy="229209"/>
           </a:xfrm>
           <a:prstGeom prst="rect">
             <a:avLst/>
@@ -8642,8 +8642,8 @@
         </p:nvSpPr>
         <p:spPr>
           <a:xfrm>
-            <a:off x="512076" y="3998976"/>
-            <a:ext cx="2370184" cy="331622"/>
+            <a:off x="512076" y="3486912"/>
+            <a:ext cx="2223876" cy="229209"/>
           </a:xfrm>
           <a:prstGeom prst="rect">
             <a:avLst/>
@@ -8665,13 +8665,13 @@
               </a:spcAft>
             </a:pPr>
             <a:r>
-              <a:rPr sz="760" b="1" i="0">
+              <a:rPr sz="720" b="1" i="0">
                 <a:solidFill>
                   <a:srgbClr val="314359"/>
                 </a:solidFill>
                 <a:latin typeface="Arial"/>
               </a:rPr>
-              <a:t>Zalaris</a:t>
+              <a:t>Bufab</a:t>
             </a:r>
           </a:p>
         </p:txBody>
@@ -8684,8 +8684,8 @@
         </p:nvSpPr>
         <p:spPr>
           <a:xfrm>
-            <a:off x="2926153" y="3998976"/>
-            <a:ext cx="1901999" cy="331622"/>
+            <a:off x="2779845" y="3486912"/>
+            <a:ext cx="1755691" cy="229209"/>
           </a:xfrm>
           <a:prstGeom prst="rect">
             <a:avLst/>
@@ -8728,8 +8728,8 @@
         </p:nvSpPr>
         <p:spPr>
           <a:xfrm>
-            <a:off x="2999307" y="3998976"/>
-            <a:ext cx="1784953" cy="331622"/>
+            <a:off x="2852999" y="3486912"/>
+            <a:ext cx="1638645" cy="229209"/>
           </a:xfrm>
           <a:prstGeom prst="rect">
             <a:avLst/>
@@ -8751,13 +8751,13 @@
               </a:spcAft>
             </a:pPr>
             <a:r>
-              <a:rPr sz="760" b="0" i="0">
+              <a:rPr sz="720" b="0" i="0">
                 <a:solidFill>
                   <a:srgbClr val="0E1620"/>
                 </a:solidFill>
                 <a:latin typeface="Arial"/>
               </a:rPr>
-              <a:t>2018-2025</a:t>
+              <a:t>2015-2025</a:t>
             </a:r>
           </a:p>
         </p:txBody>
@@ -8770,8 +8770,8 @@
         </p:nvSpPr>
         <p:spPr>
           <a:xfrm>
-            <a:off x="4828152" y="3998976"/>
-            <a:ext cx="1463076" cy="331622"/>
+            <a:off x="4535537" y="3486912"/>
+            <a:ext cx="1536230" cy="229209"/>
           </a:xfrm>
           <a:prstGeom prst="rect">
             <a:avLst/>
@@ -8814,8 +8814,8 @@
         </p:nvSpPr>
         <p:spPr>
           <a:xfrm>
-            <a:off x="4901306" y="3998976"/>
-            <a:ext cx="1346030" cy="331622"/>
+            <a:off x="4608691" y="3486912"/>
+            <a:ext cx="1419184" cy="229209"/>
           </a:xfrm>
           <a:prstGeom prst="rect">
             <a:avLst/>
@@ -8837,13 +8837,13 @@
               </a:spcAft>
             </a:pPr>
             <a:r>
-              <a:rPr sz="760" b="0" i="0">
+              <a:rPr sz="720" b="0" i="0">
                 <a:solidFill>
                   <a:srgbClr val="0E1620"/>
                 </a:solidFill>
                 <a:latin typeface="Arial"/>
               </a:rPr>
-              <a:t>26%</a:t>
+              <a:t>35%</a:t>
             </a:r>
           </a:p>
         </p:txBody>
@@ -8856,8 +8856,8 @@
         </p:nvSpPr>
         <p:spPr>
           <a:xfrm>
-            <a:off x="6291229" y="3998976"/>
-            <a:ext cx="1463076" cy="331622"/>
+            <a:off x="6071767" y="3486912"/>
+            <a:ext cx="1463076" cy="229209"/>
           </a:xfrm>
           <a:prstGeom prst="rect">
             <a:avLst/>
@@ -8900,8 +8900,8 @@
         </p:nvSpPr>
         <p:spPr>
           <a:xfrm>
-            <a:off x="6364383" y="3998976"/>
-            <a:ext cx="1346030" cy="331622"/>
+            <a:off x="6144921" y="3486912"/>
+            <a:ext cx="1346030" cy="229209"/>
           </a:xfrm>
           <a:prstGeom prst="rect">
             <a:avLst/>
@@ -8923,13 +8923,13 @@
               </a:spcAft>
             </a:pPr>
             <a:r>
-              <a:rPr sz="760" b="0" i="0">
+              <a:rPr sz="720" b="0" i="0">
                 <a:solidFill>
                   <a:srgbClr val="0E1620"/>
                 </a:solidFill>
                 <a:latin typeface="Arial"/>
               </a:rPr>
-              <a:t>1.5×</a:t>
+              <a:t>2.0×</a:t>
             </a:r>
           </a:p>
         </p:txBody>
@@ -8942,8 +8942,8 @@
         </p:nvSpPr>
         <p:spPr>
           <a:xfrm>
-            <a:off x="7754305" y="3998976"/>
-            <a:ext cx="1558176" cy="331622"/>
+            <a:off x="7534844" y="3486912"/>
+            <a:ext cx="1777638" cy="229209"/>
           </a:xfrm>
           <a:prstGeom prst="rect">
             <a:avLst/>
@@ -8986,8 +8986,8 @@
         </p:nvSpPr>
         <p:spPr>
           <a:xfrm>
-            <a:off x="7827459" y="3998976"/>
-            <a:ext cx="1441130" cy="331622"/>
+            <a:off x="7607998" y="3486912"/>
+            <a:ext cx="1660591" cy="229209"/>
           </a:xfrm>
           <a:prstGeom prst="rect">
             <a:avLst/>
@@ -9009,13 +9009,13 @@
               </a:spcAft>
             </a:pPr>
             <a:r>
-              <a:rPr sz="760" b="0" i="0">
+              <a:rPr sz="720" b="0" i="0">
                 <a:solidFill>
                   <a:srgbClr val="0E1620"/>
                 </a:solidFill>
                 <a:latin typeface="Arial"/>
               </a:rPr>
-              <a:t>+16%</a:t>
+              <a:t>+27%</a:t>
             </a:r>
           </a:p>
         </p:txBody>
@@ -9028,8 +9028,8 @@
         </p:nvSpPr>
         <p:spPr>
           <a:xfrm>
-            <a:off x="438922" y="4330598"/>
-            <a:ext cx="2487230" cy="331622"/>
+            <a:off x="438922" y="3716121"/>
+            <a:ext cx="2340922" cy="229209"/>
           </a:xfrm>
           <a:prstGeom prst="rect">
             <a:avLst/>
@@ -9072,8 +9072,8 @@
         </p:nvSpPr>
         <p:spPr>
           <a:xfrm>
-            <a:off x="512076" y="4330598"/>
-            <a:ext cx="2370184" cy="331622"/>
+            <a:off x="512076" y="3716121"/>
+            <a:ext cx="2223876" cy="229209"/>
           </a:xfrm>
           <a:prstGeom prst="rect">
             <a:avLst/>
@@ -9095,13 +9095,13 @@
               </a:spcAft>
             </a:pPr>
             <a:r>
-              <a:rPr sz="760" b="1" i="0">
+              <a:rPr sz="720" b="1" i="0">
                 <a:solidFill>
                   <a:srgbClr val="314359"/>
                 </a:solidFill>
                 <a:latin typeface="Arial"/>
               </a:rPr>
-              <a:t>Zutec</a:t>
+              <a:t>Transcom</a:t>
             </a:r>
           </a:p>
         </p:txBody>
@@ -9114,8 +9114,8 @@
         </p:nvSpPr>
         <p:spPr>
           <a:xfrm>
-            <a:off x="2926153" y="4330598"/>
-            <a:ext cx="1901999" cy="331622"/>
+            <a:off x="2779845" y="3716121"/>
+            <a:ext cx="1755691" cy="229209"/>
           </a:xfrm>
           <a:prstGeom prst="rect">
             <a:avLst/>
@@ -9158,8 +9158,8 @@
         </p:nvSpPr>
         <p:spPr>
           <a:xfrm>
-            <a:off x="2999307" y="4330598"/>
-            <a:ext cx="1784953" cy="331622"/>
+            <a:off x="2852999" y="3716121"/>
+            <a:ext cx="1638645" cy="229209"/>
           </a:xfrm>
           <a:prstGeom prst="rect">
             <a:avLst/>
@@ -9181,13 +9181,13 @@
               </a:spcAft>
             </a:pPr>
             <a:r>
-              <a:rPr sz="760" b="0" i="0">
+              <a:rPr sz="720" b="0" i="0">
                 <a:solidFill>
                   <a:srgbClr val="0E1620"/>
                 </a:solidFill>
                 <a:latin typeface="Arial"/>
               </a:rPr>
-              <a:t>2018-2025</a:t>
+              <a:t>2015-2016</a:t>
             </a:r>
           </a:p>
         </p:txBody>
@@ -9200,8 +9200,8 @@
         </p:nvSpPr>
         <p:spPr>
           <a:xfrm>
-            <a:off x="4828152" y="4330598"/>
-            <a:ext cx="1463076" cy="331622"/>
+            <a:off x="4535537" y="3716121"/>
+            <a:ext cx="1536230" cy="229209"/>
           </a:xfrm>
           <a:prstGeom prst="rect">
             <a:avLst/>
@@ -9244,8 +9244,8 @@
         </p:nvSpPr>
         <p:spPr>
           <a:xfrm>
-            <a:off x="4901306" y="4330598"/>
-            <a:ext cx="1346030" cy="331622"/>
+            <a:off x="4608691" y="3716121"/>
+            <a:ext cx="1419184" cy="229209"/>
           </a:xfrm>
           <a:prstGeom prst="rect">
             <a:avLst/>
@@ -9267,13 +9267,13 @@
               </a:spcAft>
             </a:pPr>
             <a:r>
-              <a:rPr sz="760" b="0" i="0">
+              <a:rPr sz="720" b="0" i="0">
                 <a:solidFill>
                   <a:srgbClr val="0E1620"/>
                 </a:solidFill>
                 <a:latin typeface="Arial"/>
               </a:rPr>
-              <a:t>38%</a:t>
+              <a:t>80%</a:t>
             </a:r>
           </a:p>
         </p:txBody>
@@ -9286,8 +9286,8 @@
         </p:nvSpPr>
         <p:spPr>
           <a:xfrm>
-            <a:off x="6291229" y="4330598"/>
-            <a:ext cx="1463076" cy="331622"/>
+            <a:off x="6071767" y="3716121"/>
+            <a:ext cx="1463076" cy="229209"/>
           </a:xfrm>
           <a:prstGeom prst="rect">
             <a:avLst/>
@@ -9330,8 +9330,8 @@
         </p:nvSpPr>
         <p:spPr>
           <a:xfrm>
-            <a:off x="6364383" y="4330598"/>
-            <a:ext cx="1346030" cy="331622"/>
+            <a:off x="6144921" y="3716121"/>
+            <a:ext cx="1346030" cy="229209"/>
           </a:xfrm>
           <a:prstGeom prst="rect">
             <a:avLst/>
@@ -9353,13 +9353,13 @@
               </a:spcAft>
             </a:pPr>
             <a:r>
-              <a:rPr sz="760" b="0" i="0">
+              <a:rPr sz="720" b="0" i="0">
                 <a:solidFill>
                   <a:srgbClr val="0E1620"/>
                 </a:solidFill>
                 <a:latin typeface="Arial"/>
               </a:rPr>
-              <a:t>2.8×</a:t>
+              <a:t>1.7×</a:t>
             </a:r>
           </a:p>
         </p:txBody>
@@ -9372,8 +9372,8 @@
         </p:nvSpPr>
         <p:spPr>
           <a:xfrm>
-            <a:off x="7754305" y="4330598"/>
-            <a:ext cx="1558176" cy="331622"/>
+            <a:off x="7534844" y="3716121"/>
+            <a:ext cx="1777638" cy="229209"/>
           </a:xfrm>
           <a:prstGeom prst="rect">
             <a:avLst/>
@@ -9416,8 +9416,8 @@
         </p:nvSpPr>
         <p:spPr>
           <a:xfrm>
-            <a:off x="7827459" y="4330598"/>
-            <a:ext cx="1441130" cy="331622"/>
+            <a:off x="7607998" y="3716121"/>
+            <a:ext cx="1660591" cy="229209"/>
           </a:xfrm>
           <a:prstGeom prst="rect">
             <a:avLst/>
@@ -9439,13 +9439,13 @@
               </a:spcAft>
             </a:pPr>
             <a:r>
-              <a:rPr sz="760" b="0" i="0">
+              <a:rPr sz="720" b="0" i="0">
                 <a:solidFill>
                   <a:srgbClr val="0E1620"/>
                 </a:solidFill>
                 <a:latin typeface="Arial"/>
               </a:rPr>
-              <a:t>+29%</a:t>
+              <a:t>+80%</a:t>
             </a:r>
           </a:p>
         </p:txBody>
@@ -9458,8 +9458,8 @@
         </p:nvSpPr>
         <p:spPr>
           <a:xfrm>
-            <a:off x="438922" y="4662220"/>
-            <a:ext cx="2487230" cy="331622"/>
+            <a:off x="438922" y="3945331"/>
+            <a:ext cx="2340922" cy="229209"/>
           </a:xfrm>
           <a:prstGeom prst="rect">
             <a:avLst/>
@@ -9502,8 +9502,8 @@
         </p:nvSpPr>
         <p:spPr>
           <a:xfrm>
-            <a:off x="512076" y="4662220"/>
-            <a:ext cx="2370184" cy="331622"/>
+            <a:off x="512076" y="3945331"/>
+            <a:ext cx="2223876" cy="229209"/>
           </a:xfrm>
           <a:prstGeom prst="rect">
             <a:avLst/>
@@ -9525,13 +9525,13 @@
               </a:spcAft>
             </a:pPr>
             <a:r>
-              <a:rPr sz="760" b="1" i="0">
+              <a:rPr sz="720" b="1" i="0">
                 <a:solidFill>
                   <a:srgbClr val="314359"/>
                 </a:solidFill>
                 <a:latin typeface="Arial"/>
               </a:rPr>
-              <a:t>Roko</a:t>
+              <a:t>Alcadon</a:t>
             </a:r>
           </a:p>
         </p:txBody>
@@ -9544,8 +9544,8 @@
         </p:nvSpPr>
         <p:spPr>
           <a:xfrm>
-            <a:off x="2926153" y="4662220"/>
-            <a:ext cx="1901999" cy="331622"/>
+            <a:off x="2779845" y="3945331"/>
+            <a:ext cx="1755691" cy="229209"/>
           </a:xfrm>
           <a:prstGeom prst="rect">
             <a:avLst/>
@@ -9588,8 +9588,8 @@
         </p:nvSpPr>
         <p:spPr>
           <a:xfrm>
-            <a:off x="2999307" y="4662220"/>
-            <a:ext cx="1784953" cy="331622"/>
+            <a:off x="2852999" y="3945331"/>
+            <a:ext cx="1638645" cy="229209"/>
           </a:xfrm>
           <a:prstGeom prst="rect">
             <a:avLst/>
@@ -9611,13 +9611,13 @@
               </a:spcAft>
             </a:pPr>
             <a:r>
-              <a:rPr sz="760" b="0" i="0">
+              <a:rPr sz="720" b="0" i="0">
                 <a:solidFill>
                   <a:srgbClr val="0E1620"/>
                 </a:solidFill>
                 <a:latin typeface="Arial"/>
               </a:rPr>
-              <a:t>2019-2025</a:t>
+              <a:t>2016-2025</a:t>
             </a:r>
           </a:p>
         </p:txBody>
@@ -9630,8 +9630,8 @@
         </p:nvSpPr>
         <p:spPr>
           <a:xfrm>
-            <a:off x="4828152" y="4662220"/>
-            <a:ext cx="1463076" cy="331622"/>
+            <a:off x="4535537" y="3945331"/>
+            <a:ext cx="1536230" cy="229209"/>
           </a:xfrm>
           <a:prstGeom prst="rect">
             <a:avLst/>
@@ -9674,8 +9674,8 @@
         </p:nvSpPr>
         <p:spPr>
           <a:xfrm>
-            <a:off x="4901306" y="4662220"/>
-            <a:ext cx="1346030" cy="331622"/>
+            <a:off x="4608691" y="3945331"/>
+            <a:ext cx="1419184" cy="229209"/>
           </a:xfrm>
           <a:prstGeom prst="rect">
             <a:avLst/>
@@ -9697,13 +9697,13 @@
               </a:spcAft>
             </a:pPr>
             <a:r>
-              <a:rPr sz="760" b="0" i="0">
+              <a:rPr sz="720" b="0" i="0">
                 <a:solidFill>
                   <a:srgbClr val="0E1620"/>
                 </a:solidFill>
                 <a:latin typeface="Arial"/>
               </a:rPr>
-              <a:t>28%</a:t>
+              <a:t>74%</a:t>
             </a:r>
           </a:p>
         </p:txBody>
@@ -9716,8 +9716,8 @@
         </p:nvSpPr>
         <p:spPr>
           <a:xfrm>
-            <a:off x="6291229" y="4662220"/>
-            <a:ext cx="1463076" cy="331622"/>
+            <a:off x="6071767" y="3945331"/>
+            <a:ext cx="1463076" cy="229209"/>
           </a:xfrm>
           <a:prstGeom prst="rect">
             <a:avLst/>
@@ -9760,8 +9760,8 @@
         </p:nvSpPr>
         <p:spPr>
           <a:xfrm>
-            <a:off x="6364383" y="4662220"/>
-            <a:ext cx="1346030" cy="331622"/>
+            <a:off x="6144921" y="3945331"/>
+            <a:ext cx="1346030" cy="229209"/>
           </a:xfrm>
           <a:prstGeom prst="rect">
             <a:avLst/>
@@ -9783,13 +9783,13 @@
               </a:spcAft>
             </a:pPr>
             <a:r>
-              <a:rPr sz="760" b="0" i="0">
+              <a:rPr sz="720" b="0" i="0">
                 <a:solidFill>
                   <a:srgbClr val="0E1620"/>
                 </a:solidFill>
                 <a:latin typeface="Arial"/>
               </a:rPr>
-              <a:t>5.1×</a:t>
+              <a:t>1.7×</a:t>
             </a:r>
           </a:p>
         </p:txBody>
@@ -9802,8 +9802,8 @@
         </p:nvSpPr>
         <p:spPr>
           <a:xfrm>
-            <a:off x="7754305" y="4662220"/>
-            <a:ext cx="1558176" cy="331622"/>
+            <a:off x="7534844" y="3945331"/>
+            <a:ext cx="1777638" cy="229209"/>
           </a:xfrm>
           <a:prstGeom prst="rect">
             <a:avLst/>
@@ -9846,8 +9846,8 @@
         </p:nvSpPr>
         <p:spPr>
           <a:xfrm>
-            <a:off x="7827459" y="4662220"/>
-            <a:ext cx="1441130" cy="331622"/>
+            <a:off x="7607998" y="3945331"/>
+            <a:ext cx="1660591" cy="229209"/>
           </a:xfrm>
           <a:prstGeom prst="rect">
             <a:avLst/>
@@ -9869,13 +9869,13 @@
               </a:spcAft>
             </a:pPr>
             <a:r>
-              <a:rPr sz="760" b="0" i="0">
+              <a:rPr sz="720" b="0" i="0">
                 <a:solidFill>
                   <a:srgbClr val="0E1620"/>
                 </a:solidFill>
                 <a:latin typeface="Arial"/>
               </a:rPr>
-              <a:t>+18%</a:t>
+              <a:t>+65%</a:t>
             </a:r>
           </a:p>
         </p:txBody>
@@ -9888,8 +9888,8 @@
         </p:nvSpPr>
         <p:spPr>
           <a:xfrm>
-            <a:off x="438922" y="4993843"/>
-            <a:ext cx="2487230" cy="331622"/>
+            <a:off x="438922" y="4174540"/>
+            <a:ext cx="2340922" cy="229209"/>
           </a:xfrm>
           <a:prstGeom prst="rect">
             <a:avLst/>
@@ -9932,8 +9932,8 @@
         </p:nvSpPr>
         <p:spPr>
           <a:xfrm>
-            <a:off x="512076" y="4993843"/>
-            <a:ext cx="2370184" cy="331622"/>
+            <a:off x="512076" y="4174540"/>
+            <a:ext cx="2223876" cy="229209"/>
           </a:xfrm>
           <a:prstGeom prst="rect">
             <a:avLst/>
@@ -9955,13 +9955,13 @@
               </a:spcAft>
             </a:pPr>
             <a:r>
-              <a:rPr sz="760" b="1" i="0">
+              <a:rPr sz="720" b="1" i="0">
                 <a:solidFill>
                   <a:srgbClr val="314359"/>
                 </a:solidFill>
                 <a:latin typeface="Arial"/>
               </a:rPr>
-              <a:t>Catella</a:t>
+              <a:t>Haldex</a:t>
             </a:r>
           </a:p>
         </p:txBody>
@@ -9974,8 +9974,8 @@
         </p:nvSpPr>
         <p:spPr>
           <a:xfrm>
-            <a:off x="2926153" y="4993843"/>
-            <a:ext cx="1901999" cy="331622"/>
+            <a:off x="2779845" y="4174540"/>
+            <a:ext cx="1755691" cy="229209"/>
           </a:xfrm>
           <a:prstGeom prst="rect">
             <a:avLst/>
@@ -10018,8 +10018,8 @@
         </p:nvSpPr>
         <p:spPr>
           <a:xfrm>
-            <a:off x="2999307" y="4993843"/>
-            <a:ext cx="1784953" cy="331622"/>
+            <a:off x="2852999" y="4174540"/>
+            <a:ext cx="1638645" cy="229209"/>
           </a:xfrm>
           <a:prstGeom prst="rect">
             <a:avLst/>
@@ -10041,13 +10041,13 @@
               </a:spcAft>
             </a:pPr>
             <a:r>
-              <a:rPr sz="760" b="0" i="0">
+              <a:rPr sz="720" b="0" i="0">
                 <a:solidFill>
                   <a:srgbClr val="0E1620"/>
                 </a:solidFill>
                 <a:latin typeface="Arial"/>
               </a:rPr>
-              <a:t>2020-2025</a:t>
+              <a:t>2019-2022</a:t>
             </a:r>
           </a:p>
         </p:txBody>
@@ -10060,8 +10060,8 @@
         </p:nvSpPr>
         <p:spPr>
           <a:xfrm>
-            <a:off x="4828152" y="4993843"/>
-            <a:ext cx="1463076" cy="331622"/>
+            <a:off x="4535537" y="4174540"/>
+            <a:ext cx="1536230" cy="229209"/>
           </a:xfrm>
           <a:prstGeom prst="rect">
             <a:avLst/>
@@ -10104,8 +10104,8 @@
         </p:nvSpPr>
         <p:spPr>
           <a:xfrm>
-            <a:off x="4901306" y="4993843"/>
-            <a:ext cx="1346030" cy="331622"/>
+            <a:off x="4608691" y="4174540"/>
+            <a:ext cx="1419184" cy="229209"/>
           </a:xfrm>
           <a:prstGeom prst="rect">
             <a:avLst/>
@@ -10127,13 +10127,13 @@
               </a:spcAft>
             </a:pPr>
             <a:r>
-              <a:rPr sz="760" b="0" i="0">
+              <a:rPr sz="720" b="0" i="0">
                 <a:solidFill>
                   <a:srgbClr val="0E1620"/>
                 </a:solidFill>
                 <a:latin typeface="Arial"/>
               </a:rPr>
-              <a:t>12%</a:t>
+              <a:t>36%</a:t>
             </a:r>
           </a:p>
         </p:txBody>
@@ -10146,8 +10146,8 @@
         </p:nvSpPr>
         <p:spPr>
           <a:xfrm>
-            <a:off x="6291229" y="4993843"/>
-            <a:ext cx="1463076" cy="331622"/>
+            <a:off x="6071767" y="4174540"/>
+            <a:ext cx="1463076" cy="229209"/>
           </a:xfrm>
           <a:prstGeom prst="rect">
             <a:avLst/>
@@ -10190,8 +10190,8 @@
         </p:nvSpPr>
         <p:spPr>
           <a:xfrm>
-            <a:off x="6364383" y="4993843"/>
-            <a:ext cx="1346030" cy="331622"/>
+            <a:off x="6144921" y="4174540"/>
+            <a:ext cx="1346030" cy="229209"/>
           </a:xfrm>
           <a:prstGeom prst="rect">
             <a:avLst/>
@@ -10213,13 +10213,13 @@
               </a:spcAft>
             </a:pPr>
             <a:r>
-              <a:rPr sz="760" b="0" i="0">
+              <a:rPr sz="720" b="0" i="0">
                 <a:solidFill>
                   <a:srgbClr val="0E1620"/>
                 </a:solidFill>
                 <a:latin typeface="Arial"/>
               </a:rPr>
-              <a:t>1.2×</a:t>
+              <a:t>1.6×</a:t>
             </a:r>
           </a:p>
         </p:txBody>
@@ -10232,8 +10232,8 @@
         </p:nvSpPr>
         <p:spPr>
           <a:xfrm>
-            <a:off x="7754305" y="4993843"/>
-            <a:ext cx="1558176" cy="331622"/>
+            <a:off x="7534844" y="4174540"/>
+            <a:ext cx="1777638" cy="229209"/>
           </a:xfrm>
           <a:prstGeom prst="rect">
             <a:avLst/>
@@ -10276,8 +10276,8 @@
         </p:nvSpPr>
         <p:spPr>
           <a:xfrm>
-            <a:off x="7827459" y="4993843"/>
-            <a:ext cx="1441130" cy="331622"/>
+            <a:off x="7607998" y="4174540"/>
+            <a:ext cx="1660591" cy="229209"/>
           </a:xfrm>
           <a:prstGeom prst="rect">
             <a:avLst/>
@@ -10299,13 +10299,13 @@
               </a:spcAft>
             </a:pPr>
             <a:r>
-              <a:rPr sz="760" b="0" i="0">
+              <a:rPr sz="720" b="0" i="0">
                 <a:solidFill>
                   <a:srgbClr val="0E1620"/>
                 </a:solidFill>
                 <a:latin typeface="Arial"/>
               </a:rPr>
-              <a:t>+2%</a:t>
+              <a:t>+33%</a:t>
             </a:r>
           </a:p>
         </p:txBody>
@@ -10318,8 +10318,8 @@
         </p:nvSpPr>
         <p:spPr>
           <a:xfrm>
-            <a:off x="438922" y="5325465"/>
-            <a:ext cx="2487230" cy="331622"/>
+            <a:off x="438922" y="4403750"/>
+            <a:ext cx="2340922" cy="229209"/>
           </a:xfrm>
           <a:prstGeom prst="rect">
             <a:avLst/>
@@ -10362,8 +10362,8 @@
         </p:nvSpPr>
         <p:spPr>
           <a:xfrm>
-            <a:off x="512076" y="5325465"/>
-            <a:ext cx="2370184" cy="331622"/>
+            <a:off x="512076" y="4403750"/>
+            <a:ext cx="2223876" cy="229209"/>
           </a:xfrm>
           <a:prstGeom prst="rect">
             <a:avLst/>
@@ -10385,13 +10385,13 @@
               </a:spcAft>
             </a:pPr>
             <a:r>
-              <a:rPr sz="760" b="1" i="0">
+              <a:rPr sz="720" b="1" i="0">
                 <a:solidFill>
                   <a:srgbClr val="314359"/>
                 </a:solidFill>
                 <a:latin typeface="Arial"/>
               </a:rPr>
-              <a:t>Actic</a:t>
+              <a:t>Sandvik</a:t>
             </a:r>
           </a:p>
         </p:txBody>
@@ -10404,8 +10404,8 @@
         </p:nvSpPr>
         <p:spPr>
           <a:xfrm>
-            <a:off x="2926153" y="5325465"/>
-            <a:ext cx="1901999" cy="331622"/>
+            <a:off x="2779845" y="4403750"/>
+            <a:ext cx="1755691" cy="229209"/>
           </a:xfrm>
           <a:prstGeom prst="rect">
             <a:avLst/>
@@ -10448,8 +10448,8 @@
         </p:nvSpPr>
         <p:spPr>
           <a:xfrm>
-            <a:off x="2999307" y="5325465"/>
-            <a:ext cx="1784953" cy="331622"/>
+            <a:off x="2852999" y="4403750"/>
+            <a:ext cx="1638645" cy="229209"/>
           </a:xfrm>
           <a:prstGeom prst="rect">
             <a:avLst/>
@@ -10471,13 +10471,13 @@
               </a:spcAft>
             </a:pPr>
             <a:r>
-              <a:rPr sz="760" b="0" i="0">
+              <a:rPr sz="720" b="0" i="0">
                 <a:solidFill>
                   <a:srgbClr val="0E1620"/>
                 </a:solidFill>
                 <a:latin typeface="Arial"/>
               </a:rPr>
-              <a:t>2017-2023</a:t>
+              <a:t>2015-2017</a:t>
             </a:r>
           </a:p>
         </p:txBody>
@@ -10490,8 +10490,8 @@
         </p:nvSpPr>
         <p:spPr>
           <a:xfrm>
-            <a:off x="4828152" y="5325465"/>
-            <a:ext cx="1463076" cy="331622"/>
+            <a:off x="4535537" y="4403750"/>
+            <a:ext cx="1536230" cy="229209"/>
           </a:xfrm>
           <a:prstGeom prst="rect">
             <a:avLst/>
@@ -10534,8 +10534,8 @@
         </p:nvSpPr>
         <p:spPr>
           <a:xfrm>
-            <a:off x="4901306" y="5325465"/>
-            <a:ext cx="1346030" cy="331622"/>
+            <a:off x="4608691" y="4403750"/>
+            <a:ext cx="1419184" cy="229209"/>
           </a:xfrm>
           <a:prstGeom prst="rect">
             <a:avLst/>
@@ -10557,13 +10557,13 @@
               </a:spcAft>
             </a:pPr>
             <a:r>
-              <a:rPr sz="760" b="0" i="1">
-                <a:solidFill>
-                  <a:srgbClr val="556A83"/>
-                </a:solidFill>
-                <a:latin typeface="Arial"/>
-              </a:rPr>
-              <a:t>-27%</a:t>
+              <a:rPr sz="720" b="0" i="0">
+                <a:solidFill>
+                  <a:srgbClr val="0E1620"/>
+                </a:solidFill>
+                <a:latin typeface="Arial"/>
+              </a:rPr>
+              <a:t>49%</a:t>
             </a:r>
           </a:p>
         </p:txBody>
@@ -10576,8 +10576,8 @@
         </p:nvSpPr>
         <p:spPr>
           <a:xfrm>
-            <a:off x="6291229" y="5325465"/>
-            <a:ext cx="1463076" cy="331622"/>
+            <a:off x="6071767" y="4403750"/>
+            <a:ext cx="1463076" cy="229209"/>
           </a:xfrm>
           <a:prstGeom prst="rect">
             <a:avLst/>
@@ -10620,8 +10620,8 @@
         </p:nvSpPr>
         <p:spPr>
           <a:xfrm>
-            <a:off x="6364383" y="5325465"/>
-            <a:ext cx="1346030" cy="331622"/>
+            <a:off x="6144921" y="4403750"/>
+            <a:ext cx="1346030" cy="229209"/>
           </a:xfrm>
           <a:prstGeom prst="rect">
             <a:avLst/>
@@ -10643,13 +10643,13 @@
               </a:spcAft>
             </a:pPr>
             <a:r>
-              <a:rPr sz="760" b="0" i="1">
-                <a:solidFill>
-                  <a:srgbClr val="556A83"/>
-                </a:solidFill>
-                <a:latin typeface="Arial"/>
-              </a:rPr>
-              <a:t>0.4×</a:t>
+              <a:rPr sz="720" b="0" i="0">
+                <a:solidFill>
+                  <a:srgbClr val="0E1620"/>
+                </a:solidFill>
+                <a:latin typeface="Arial"/>
+              </a:rPr>
+              <a:t>1.6×</a:t>
             </a:r>
           </a:p>
         </p:txBody>
@@ -10662,8 +10662,8 @@
         </p:nvSpPr>
         <p:spPr>
           <a:xfrm>
-            <a:off x="7754305" y="5325465"/>
-            <a:ext cx="1558176" cy="331622"/>
+            <a:off x="7534844" y="4403750"/>
+            <a:ext cx="1777638" cy="229209"/>
           </a:xfrm>
           <a:prstGeom prst="rect">
             <a:avLst/>
@@ -10706,8 +10706,8 @@
         </p:nvSpPr>
         <p:spPr>
           <a:xfrm>
-            <a:off x="7827459" y="5325465"/>
-            <a:ext cx="1441130" cy="331622"/>
+            <a:off x="7607998" y="4403750"/>
+            <a:ext cx="1660591" cy="229209"/>
           </a:xfrm>
           <a:prstGeom prst="rect">
             <a:avLst/>
@@ -10729,75 +10729,33 @@
               </a:spcAft>
             </a:pPr>
             <a:r>
-              <a:rPr sz="760" b="0" i="1">
-                <a:solidFill>
-                  <a:srgbClr val="556A83"/>
-                </a:solidFill>
-                <a:latin typeface="Arial"/>
-              </a:rPr>
-              <a:t>-33%</a:t>
-            </a:r>
-          </a:p>
-        </p:txBody>
-      </p:sp>
-      <p:sp>
-        <p:nvSpPr>
-          <p:cNvPr id="109" name="TextBox 108"/>
-          <p:cNvSpPr txBox="1"/>
-          <p:nvPr/>
-        </p:nvSpPr>
-        <p:spPr>
-          <a:xfrm>
-            <a:off x="438922" y="5774131"/>
-            <a:ext cx="8851613" cy="390144"/>
-          </a:xfrm>
-          <a:prstGeom prst="rect">
-            <a:avLst/>
-          </a:prstGeom>
-          <a:noFill/>
-        </p:spPr>
-        <p:txBody>
-          <a:bodyPr wrap="square" anchor="t" lIns="0" rIns="0" tIns="0" bIns="0">
-            <a:spAutoFit/>
-          </a:bodyPr>
-          <a:lstStyle/>
-          <a:p>
-            <a:pPr algn="l">
-              <a:lnSpc>
-                <a:spcPct val="112000"/>
-              </a:lnSpc>
-              <a:spcAft>
-                <a:spcPts val="0"/>
-              </a:spcAft>
-            </a:pPr>
-            <a:r>
-              <a:rPr sz="640" b="0" i="1">
-                <a:solidFill>
-                  <a:srgbClr val="556A83"/>
-                </a:solidFill>
-                <a:latin typeface="Arial"/>
-              </a:rPr>
-              <a:t>Gross deal-level figures, AIP Fund II, to 2025; “n.m.” where holding periods are short. Selected holdings, not the full portfolio. Past performance is not a guide to future returns.</a:t>
-            </a:r>
-          </a:p>
-        </p:txBody>
-      </p:sp>
-      <p:sp>
-        <p:nvSpPr>
-          <p:cNvPr id="110" name="Rectangle 109"/>
+              <a:rPr sz="720" b="0" i="0">
+                <a:solidFill>
+                  <a:srgbClr val="0E1620"/>
+                </a:solidFill>
+                <a:latin typeface="Arial"/>
+              </a:rPr>
+              <a:t>+43%</a:t>
+            </a:r>
+          </a:p>
+        </p:txBody>
+      </p:sp>
+      <p:sp>
+        <p:nvSpPr>
+          <p:cNvPr id="109" name="Rectangle 108"/>
           <p:cNvSpPr/>
           <p:nvPr/>
         </p:nvSpPr>
         <p:spPr>
           <a:xfrm>
-            <a:off x="438922" y="6261811"/>
-            <a:ext cx="8895505" cy="546201"/>
+            <a:off x="438922" y="4632960"/>
+            <a:ext cx="2340922" cy="229209"/>
           </a:xfrm>
           <a:prstGeom prst="rect">
             <a:avLst/>
           </a:prstGeom>
           <a:solidFill>
-            <a:srgbClr val="152130"/>
+            <a:srgbClr val="FFFFFF"/>
           </a:solidFill>
           <a:ln>
             <a:noFill/>
@@ -10828,14 +10786,14 @@
       </p:sp>
       <p:sp>
         <p:nvSpPr>
-          <p:cNvPr id="111" name="TextBox 110"/>
-          <p:cNvSpPr txBox="1"/>
-          <p:nvPr/>
-        </p:nvSpPr>
-        <p:spPr>
-          <a:xfrm>
-            <a:off x="585230" y="6261811"/>
-            <a:ext cx="8632151" cy="546201"/>
+          <p:cNvPr id="110" name="TextBox 109"/>
+          <p:cNvSpPr txBox="1"/>
+          <p:nvPr/>
+        </p:nvSpPr>
+        <p:spPr>
+          <a:xfrm>
+            <a:off x="512076" y="4632960"/>
+            <a:ext cx="2223876" cy="229209"/>
           </a:xfrm>
           <a:prstGeom prst="rect">
             <a:avLst/>
@@ -10857,13 +10815,3409 @@
               </a:spcAft>
             </a:pPr>
             <a:r>
-              <a:rPr sz="960" b="0" i="1">
-                <a:solidFill>
-                  <a:srgbClr val="FFFFFF"/>
-                </a:solidFill>
-                <a:latin typeface="Arial"/>
-              </a:rPr>
-              <a:t>A 92% hit rate over 38 deals — and the few that disappoint are sold with discipline, not hope.</a:t>
+              <a:rPr sz="720" b="1" i="0">
+                <a:solidFill>
+                  <a:srgbClr val="314359"/>
+                </a:solidFill>
+                <a:latin typeface="Arial"/>
+              </a:rPr>
+              <a:t>Renold</a:t>
+            </a:r>
+          </a:p>
+        </p:txBody>
+      </p:sp>
+      <p:sp>
+        <p:nvSpPr>
+          <p:cNvPr id="111" name="Rectangle 110"/>
+          <p:cNvSpPr/>
+          <p:nvPr/>
+        </p:nvSpPr>
+        <p:spPr>
+          <a:xfrm>
+            <a:off x="2779845" y="4632960"/>
+            <a:ext cx="1755691" cy="229209"/>
+          </a:xfrm>
+          <a:prstGeom prst="rect">
+            <a:avLst/>
+          </a:prstGeom>
+          <a:solidFill>
+            <a:srgbClr val="FFFFFF"/>
+          </a:solidFill>
+          <a:ln>
+            <a:noFill/>
+          </a:ln>
+          <a:effectLst/>
+        </p:spPr>
+        <p:style>
+          <a:lnRef idx="1">
+            <a:schemeClr val="accent1"/>
+          </a:lnRef>
+          <a:fillRef idx="3">
+            <a:schemeClr val="accent1"/>
+          </a:fillRef>
+          <a:effectRef idx="2">
+            <a:schemeClr val="accent1"/>
+          </a:effectRef>
+          <a:fontRef idx="minor">
+            <a:schemeClr val="lt1"/>
+          </a:fontRef>
+        </p:style>
+        <p:txBody>
+          <a:bodyPr rtlCol="0" anchor="ctr"/>
+          <a:lstStyle/>
+          <a:p>
+            <a:pPr algn="ctr"/>
+          </a:p>
+        </p:txBody>
+      </p:sp>
+      <p:sp>
+        <p:nvSpPr>
+          <p:cNvPr id="112" name="TextBox 111"/>
+          <p:cNvSpPr txBox="1"/>
+          <p:nvPr/>
+        </p:nvSpPr>
+        <p:spPr>
+          <a:xfrm>
+            <a:off x="2852999" y="4632960"/>
+            <a:ext cx="1638645" cy="229209"/>
+          </a:xfrm>
+          <a:prstGeom prst="rect">
+            <a:avLst/>
+          </a:prstGeom>
+          <a:noFill/>
+        </p:spPr>
+        <p:txBody>
+          <a:bodyPr wrap="square" anchor="ctr" lIns="0" rIns="0" tIns="0" bIns="0">
+            <a:spAutoFit/>
+          </a:bodyPr>
+          <a:lstStyle/>
+          <a:p>
+            <a:pPr algn="r">
+              <a:lnSpc>
+                <a:spcPct val="110000"/>
+              </a:lnSpc>
+              <a:spcAft>
+                <a:spcPts val="0"/>
+              </a:spcAft>
+            </a:pPr>
+            <a:r>
+              <a:rPr sz="720" b="0" i="0">
+                <a:solidFill>
+                  <a:srgbClr val="0E1620"/>
+                </a:solidFill>
+                <a:latin typeface="Arial"/>
+              </a:rPr>
+              <a:t>2024-2025</a:t>
+            </a:r>
+          </a:p>
+        </p:txBody>
+      </p:sp>
+      <p:sp>
+        <p:nvSpPr>
+          <p:cNvPr id="113" name="Rectangle 112"/>
+          <p:cNvSpPr/>
+          <p:nvPr/>
+        </p:nvSpPr>
+        <p:spPr>
+          <a:xfrm>
+            <a:off x="4535537" y="4632960"/>
+            <a:ext cx="1536230" cy="229209"/>
+          </a:xfrm>
+          <a:prstGeom prst="rect">
+            <a:avLst/>
+          </a:prstGeom>
+          <a:solidFill>
+            <a:srgbClr val="FFFFFF"/>
+          </a:solidFill>
+          <a:ln>
+            <a:noFill/>
+          </a:ln>
+          <a:effectLst/>
+        </p:spPr>
+        <p:style>
+          <a:lnRef idx="1">
+            <a:schemeClr val="accent1"/>
+          </a:lnRef>
+          <a:fillRef idx="3">
+            <a:schemeClr val="accent1"/>
+          </a:fillRef>
+          <a:effectRef idx="2">
+            <a:schemeClr val="accent1"/>
+          </a:effectRef>
+          <a:fontRef idx="minor">
+            <a:schemeClr val="lt1"/>
+          </a:fontRef>
+        </p:style>
+        <p:txBody>
+          <a:bodyPr rtlCol="0" anchor="ctr"/>
+          <a:lstStyle/>
+          <a:p>
+            <a:pPr algn="ctr"/>
+          </a:p>
+        </p:txBody>
+      </p:sp>
+      <p:sp>
+        <p:nvSpPr>
+          <p:cNvPr id="114" name="TextBox 113"/>
+          <p:cNvSpPr txBox="1"/>
+          <p:nvPr/>
+        </p:nvSpPr>
+        <p:spPr>
+          <a:xfrm>
+            <a:off x="4608691" y="4632960"/>
+            <a:ext cx="1419184" cy="229209"/>
+          </a:xfrm>
+          <a:prstGeom prst="rect">
+            <a:avLst/>
+          </a:prstGeom>
+          <a:noFill/>
+        </p:spPr>
+        <p:txBody>
+          <a:bodyPr wrap="square" anchor="ctr" lIns="0" rIns="0" tIns="0" bIns="0">
+            <a:spAutoFit/>
+          </a:bodyPr>
+          <a:lstStyle/>
+          <a:p>
+            <a:pPr algn="r">
+              <a:lnSpc>
+                <a:spcPct val="110000"/>
+              </a:lnSpc>
+              <a:spcAft>
+                <a:spcPts val="0"/>
+              </a:spcAft>
+            </a:pPr>
+            <a:r>
+              <a:rPr sz="720" b="0" i="0">
+                <a:solidFill>
+                  <a:srgbClr val="0E1620"/>
+                </a:solidFill>
+                <a:latin typeface="Arial"/>
+              </a:rPr>
+              <a:t>220%</a:t>
+            </a:r>
+          </a:p>
+        </p:txBody>
+      </p:sp>
+      <p:sp>
+        <p:nvSpPr>
+          <p:cNvPr id="115" name="Rectangle 114"/>
+          <p:cNvSpPr/>
+          <p:nvPr/>
+        </p:nvSpPr>
+        <p:spPr>
+          <a:xfrm>
+            <a:off x="6071767" y="4632960"/>
+            <a:ext cx="1463076" cy="229209"/>
+          </a:xfrm>
+          <a:prstGeom prst="rect">
+            <a:avLst/>
+          </a:prstGeom>
+          <a:solidFill>
+            <a:srgbClr val="FFFFFF"/>
+          </a:solidFill>
+          <a:ln>
+            <a:noFill/>
+          </a:ln>
+          <a:effectLst/>
+        </p:spPr>
+        <p:style>
+          <a:lnRef idx="1">
+            <a:schemeClr val="accent1"/>
+          </a:lnRef>
+          <a:fillRef idx="3">
+            <a:schemeClr val="accent1"/>
+          </a:fillRef>
+          <a:effectRef idx="2">
+            <a:schemeClr val="accent1"/>
+          </a:effectRef>
+          <a:fontRef idx="minor">
+            <a:schemeClr val="lt1"/>
+          </a:fontRef>
+        </p:style>
+        <p:txBody>
+          <a:bodyPr rtlCol="0" anchor="ctr"/>
+          <a:lstStyle/>
+          <a:p>
+            <a:pPr algn="ctr"/>
+          </a:p>
+        </p:txBody>
+      </p:sp>
+      <p:sp>
+        <p:nvSpPr>
+          <p:cNvPr id="116" name="TextBox 115"/>
+          <p:cNvSpPr txBox="1"/>
+          <p:nvPr/>
+        </p:nvSpPr>
+        <p:spPr>
+          <a:xfrm>
+            <a:off x="6144921" y="4632960"/>
+            <a:ext cx="1346030" cy="229209"/>
+          </a:xfrm>
+          <a:prstGeom prst="rect">
+            <a:avLst/>
+          </a:prstGeom>
+          <a:noFill/>
+        </p:spPr>
+        <p:txBody>
+          <a:bodyPr wrap="square" anchor="ctr" lIns="0" rIns="0" tIns="0" bIns="0">
+            <a:spAutoFit/>
+          </a:bodyPr>
+          <a:lstStyle/>
+          <a:p>
+            <a:pPr algn="r">
+              <a:lnSpc>
+                <a:spcPct val="110000"/>
+              </a:lnSpc>
+              <a:spcAft>
+                <a:spcPts val="0"/>
+              </a:spcAft>
+            </a:pPr>
+            <a:r>
+              <a:rPr sz="720" b="0" i="0">
+                <a:solidFill>
+                  <a:srgbClr val="0E1620"/>
+                </a:solidFill>
+                <a:latin typeface="Arial"/>
+              </a:rPr>
+              <a:t>1.6×</a:t>
+            </a:r>
+          </a:p>
+        </p:txBody>
+      </p:sp>
+      <p:sp>
+        <p:nvSpPr>
+          <p:cNvPr id="117" name="Rectangle 116"/>
+          <p:cNvSpPr/>
+          <p:nvPr/>
+        </p:nvSpPr>
+        <p:spPr>
+          <a:xfrm>
+            <a:off x="7534844" y="4632960"/>
+            <a:ext cx="1777638" cy="229209"/>
+          </a:xfrm>
+          <a:prstGeom prst="rect">
+            <a:avLst/>
+          </a:prstGeom>
+          <a:solidFill>
+            <a:srgbClr val="FFFFFF"/>
+          </a:solidFill>
+          <a:ln>
+            <a:noFill/>
+          </a:ln>
+          <a:effectLst/>
+        </p:spPr>
+        <p:style>
+          <a:lnRef idx="1">
+            <a:schemeClr val="accent1"/>
+          </a:lnRef>
+          <a:fillRef idx="3">
+            <a:schemeClr val="accent1"/>
+          </a:fillRef>
+          <a:effectRef idx="2">
+            <a:schemeClr val="accent1"/>
+          </a:effectRef>
+          <a:fontRef idx="minor">
+            <a:schemeClr val="lt1"/>
+          </a:fontRef>
+        </p:style>
+        <p:txBody>
+          <a:bodyPr rtlCol="0" anchor="ctr"/>
+          <a:lstStyle/>
+          <a:p>
+            <a:pPr algn="ctr"/>
+          </a:p>
+        </p:txBody>
+      </p:sp>
+      <p:sp>
+        <p:nvSpPr>
+          <p:cNvPr id="118" name="TextBox 117"/>
+          <p:cNvSpPr txBox="1"/>
+          <p:nvPr/>
+        </p:nvSpPr>
+        <p:spPr>
+          <a:xfrm>
+            <a:off x="7607998" y="4632960"/>
+            <a:ext cx="1660591" cy="229209"/>
+          </a:xfrm>
+          <a:prstGeom prst="rect">
+            <a:avLst/>
+          </a:prstGeom>
+          <a:noFill/>
+        </p:spPr>
+        <p:txBody>
+          <a:bodyPr wrap="square" anchor="ctr" lIns="0" rIns="0" tIns="0" bIns="0">
+            <a:spAutoFit/>
+          </a:bodyPr>
+          <a:lstStyle/>
+          <a:p>
+            <a:pPr algn="r">
+              <a:lnSpc>
+                <a:spcPct val="110000"/>
+              </a:lnSpc>
+              <a:spcAft>
+                <a:spcPts val="0"/>
+              </a:spcAft>
+            </a:pPr>
+            <a:r>
+              <a:rPr sz="720" b="0" i="0">
+                <a:solidFill>
+                  <a:srgbClr val="0E1620"/>
+                </a:solidFill>
+                <a:latin typeface="Arial"/>
+              </a:rPr>
+              <a:t>+211%</a:t>
+            </a:r>
+          </a:p>
+        </p:txBody>
+      </p:sp>
+      <p:sp>
+        <p:nvSpPr>
+          <p:cNvPr id="119" name="Rectangle 118"/>
+          <p:cNvSpPr/>
+          <p:nvPr/>
+        </p:nvSpPr>
+        <p:spPr>
+          <a:xfrm>
+            <a:off x="438922" y="4862169"/>
+            <a:ext cx="2340922" cy="229209"/>
+          </a:xfrm>
+          <a:prstGeom prst="rect">
+            <a:avLst/>
+          </a:prstGeom>
+          <a:solidFill>
+            <a:srgbClr val="F6F7F9"/>
+          </a:solidFill>
+          <a:ln>
+            <a:noFill/>
+          </a:ln>
+          <a:effectLst/>
+        </p:spPr>
+        <p:style>
+          <a:lnRef idx="1">
+            <a:schemeClr val="accent1"/>
+          </a:lnRef>
+          <a:fillRef idx="3">
+            <a:schemeClr val="accent1"/>
+          </a:fillRef>
+          <a:effectRef idx="2">
+            <a:schemeClr val="accent1"/>
+          </a:effectRef>
+          <a:fontRef idx="minor">
+            <a:schemeClr val="lt1"/>
+          </a:fontRef>
+        </p:style>
+        <p:txBody>
+          <a:bodyPr rtlCol="0" anchor="ctr"/>
+          <a:lstStyle/>
+          <a:p>
+            <a:pPr algn="ctr"/>
+          </a:p>
+        </p:txBody>
+      </p:sp>
+      <p:sp>
+        <p:nvSpPr>
+          <p:cNvPr id="120" name="TextBox 119"/>
+          <p:cNvSpPr txBox="1"/>
+          <p:nvPr/>
+        </p:nvSpPr>
+        <p:spPr>
+          <a:xfrm>
+            <a:off x="512076" y="4862169"/>
+            <a:ext cx="2223876" cy="229209"/>
+          </a:xfrm>
+          <a:prstGeom prst="rect">
+            <a:avLst/>
+          </a:prstGeom>
+          <a:noFill/>
+        </p:spPr>
+        <p:txBody>
+          <a:bodyPr wrap="square" anchor="ctr" lIns="0" rIns="0" tIns="0" bIns="0">
+            <a:spAutoFit/>
+          </a:bodyPr>
+          <a:lstStyle/>
+          <a:p>
+            <a:pPr algn="l">
+              <a:lnSpc>
+                <a:spcPct val="110000"/>
+              </a:lnSpc>
+              <a:spcAft>
+                <a:spcPts val="0"/>
+              </a:spcAft>
+            </a:pPr>
+            <a:r>
+              <a:rPr sz="720" b="1" i="0">
+                <a:solidFill>
+                  <a:srgbClr val="314359"/>
+                </a:solidFill>
+                <a:latin typeface="Arial"/>
+              </a:rPr>
+              <a:t>Kitron</a:t>
+            </a:r>
+          </a:p>
+        </p:txBody>
+      </p:sp>
+      <p:sp>
+        <p:nvSpPr>
+          <p:cNvPr id="121" name="Rectangle 120"/>
+          <p:cNvSpPr/>
+          <p:nvPr/>
+        </p:nvSpPr>
+        <p:spPr>
+          <a:xfrm>
+            <a:off x="2779845" y="4862169"/>
+            <a:ext cx="1755691" cy="229209"/>
+          </a:xfrm>
+          <a:prstGeom prst="rect">
+            <a:avLst/>
+          </a:prstGeom>
+          <a:solidFill>
+            <a:srgbClr val="F6F7F9"/>
+          </a:solidFill>
+          <a:ln>
+            <a:noFill/>
+          </a:ln>
+          <a:effectLst/>
+        </p:spPr>
+        <p:style>
+          <a:lnRef idx="1">
+            <a:schemeClr val="accent1"/>
+          </a:lnRef>
+          <a:fillRef idx="3">
+            <a:schemeClr val="accent1"/>
+          </a:fillRef>
+          <a:effectRef idx="2">
+            <a:schemeClr val="accent1"/>
+          </a:effectRef>
+          <a:fontRef idx="minor">
+            <a:schemeClr val="lt1"/>
+          </a:fontRef>
+        </p:style>
+        <p:txBody>
+          <a:bodyPr rtlCol="0" anchor="ctr"/>
+          <a:lstStyle/>
+          <a:p>
+            <a:pPr algn="ctr"/>
+          </a:p>
+        </p:txBody>
+      </p:sp>
+      <p:sp>
+        <p:nvSpPr>
+          <p:cNvPr id="122" name="TextBox 121"/>
+          <p:cNvSpPr txBox="1"/>
+          <p:nvPr/>
+        </p:nvSpPr>
+        <p:spPr>
+          <a:xfrm>
+            <a:off x="2852999" y="4862169"/>
+            <a:ext cx="1638645" cy="229209"/>
+          </a:xfrm>
+          <a:prstGeom prst="rect">
+            <a:avLst/>
+          </a:prstGeom>
+          <a:noFill/>
+        </p:spPr>
+        <p:txBody>
+          <a:bodyPr wrap="square" anchor="ctr" lIns="0" rIns="0" tIns="0" bIns="0">
+            <a:spAutoFit/>
+          </a:bodyPr>
+          <a:lstStyle/>
+          <a:p>
+            <a:pPr algn="r">
+              <a:lnSpc>
+                <a:spcPct val="110000"/>
+              </a:lnSpc>
+              <a:spcAft>
+                <a:spcPts val="0"/>
+              </a:spcAft>
+            </a:pPr>
+            <a:r>
+              <a:rPr sz="720" b="0" i="0">
+                <a:solidFill>
+                  <a:srgbClr val="0E1620"/>
+                </a:solidFill>
+                <a:latin typeface="Arial"/>
+              </a:rPr>
+              <a:t>2016-2018</a:t>
+            </a:r>
+          </a:p>
+        </p:txBody>
+      </p:sp>
+      <p:sp>
+        <p:nvSpPr>
+          <p:cNvPr id="123" name="Rectangle 122"/>
+          <p:cNvSpPr/>
+          <p:nvPr/>
+        </p:nvSpPr>
+        <p:spPr>
+          <a:xfrm>
+            <a:off x="4535537" y="4862169"/>
+            <a:ext cx="1536230" cy="229209"/>
+          </a:xfrm>
+          <a:prstGeom prst="rect">
+            <a:avLst/>
+          </a:prstGeom>
+          <a:solidFill>
+            <a:srgbClr val="F6F7F9"/>
+          </a:solidFill>
+          <a:ln>
+            <a:noFill/>
+          </a:ln>
+          <a:effectLst/>
+        </p:spPr>
+        <p:style>
+          <a:lnRef idx="1">
+            <a:schemeClr val="accent1"/>
+          </a:lnRef>
+          <a:fillRef idx="3">
+            <a:schemeClr val="accent1"/>
+          </a:fillRef>
+          <a:effectRef idx="2">
+            <a:schemeClr val="accent1"/>
+          </a:effectRef>
+          <a:fontRef idx="minor">
+            <a:schemeClr val="lt1"/>
+          </a:fontRef>
+        </p:style>
+        <p:txBody>
+          <a:bodyPr rtlCol="0" anchor="ctr"/>
+          <a:lstStyle/>
+          <a:p>
+            <a:pPr algn="ctr"/>
+          </a:p>
+        </p:txBody>
+      </p:sp>
+      <p:sp>
+        <p:nvSpPr>
+          <p:cNvPr id="124" name="TextBox 123"/>
+          <p:cNvSpPr txBox="1"/>
+          <p:nvPr/>
+        </p:nvSpPr>
+        <p:spPr>
+          <a:xfrm>
+            <a:off x="4608691" y="4862169"/>
+            <a:ext cx="1419184" cy="229209"/>
+          </a:xfrm>
+          <a:prstGeom prst="rect">
+            <a:avLst/>
+          </a:prstGeom>
+          <a:noFill/>
+        </p:spPr>
+        <p:txBody>
+          <a:bodyPr wrap="square" anchor="ctr" lIns="0" rIns="0" tIns="0" bIns="0">
+            <a:spAutoFit/>
+          </a:bodyPr>
+          <a:lstStyle/>
+          <a:p>
+            <a:pPr algn="r">
+              <a:lnSpc>
+                <a:spcPct val="110000"/>
+              </a:lnSpc>
+              <a:spcAft>
+                <a:spcPts val="0"/>
+              </a:spcAft>
+            </a:pPr>
+            <a:r>
+              <a:rPr sz="720" b="0" i="0">
+                <a:solidFill>
+                  <a:srgbClr val="0E1620"/>
+                </a:solidFill>
+                <a:latin typeface="Arial"/>
+              </a:rPr>
+              <a:t>40%</a:t>
+            </a:r>
+          </a:p>
+        </p:txBody>
+      </p:sp>
+      <p:sp>
+        <p:nvSpPr>
+          <p:cNvPr id="125" name="Rectangle 124"/>
+          <p:cNvSpPr/>
+          <p:nvPr/>
+        </p:nvSpPr>
+        <p:spPr>
+          <a:xfrm>
+            <a:off x="6071767" y="4862169"/>
+            <a:ext cx="1463076" cy="229209"/>
+          </a:xfrm>
+          <a:prstGeom prst="rect">
+            <a:avLst/>
+          </a:prstGeom>
+          <a:solidFill>
+            <a:srgbClr val="F6F7F9"/>
+          </a:solidFill>
+          <a:ln>
+            <a:noFill/>
+          </a:ln>
+          <a:effectLst/>
+        </p:spPr>
+        <p:style>
+          <a:lnRef idx="1">
+            <a:schemeClr val="accent1"/>
+          </a:lnRef>
+          <a:fillRef idx="3">
+            <a:schemeClr val="accent1"/>
+          </a:fillRef>
+          <a:effectRef idx="2">
+            <a:schemeClr val="accent1"/>
+          </a:effectRef>
+          <a:fontRef idx="minor">
+            <a:schemeClr val="lt1"/>
+          </a:fontRef>
+        </p:style>
+        <p:txBody>
+          <a:bodyPr rtlCol="0" anchor="ctr"/>
+          <a:lstStyle/>
+          <a:p>
+            <a:pPr algn="ctr"/>
+          </a:p>
+        </p:txBody>
+      </p:sp>
+      <p:sp>
+        <p:nvSpPr>
+          <p:cNvPr id="126" name="TextBox 125"/>
+          <p:cNvSpPr txBox="1"/>
+          <p:nvPr/>
+        </p:nvSpPr>
+        <p:spPr>
+          <a:xfrm>
+            <a:off x="6144921" y="4862169"/>
+            <a:ext cx="1346030" cy="229209"/>
+          </a:xfrm>
+          <a:prstGeom prst="rect">
+            <a:avLst/>
+          </a:prstGeom>
+          <a:noFill/>
+        </p:spPr>
+        <p:txBody>
+          <a:bodyPr wrap="square" anchor="ctr" lIns="0" rIns="0" tIns="0" bIns="0">
+            <a:spAutoFit/>
+          </a:bodyPr>
+          <a:lstStyle/>
+          <a:p>
+            <a:pPr algn="r">
+              <a:lnSpc>
+                <a:spcPct val="110000"/>
+              </a:lnSpc>
+              <a:spcAft>
+                <a:spcPts val="0"/>
+              </a:spcAft>
+            </a:pPr>
+            <a:r>
+              <a:rPr sz="720" b="0" i="0">
+                <a:solidFill>
+                  <a:srgbClr val="0E1620"/>
+                </a:solidFill>
+                <a:latin typeface="Arial"/>
+              </a:rPr>
+              <a:t>1.5×</a:t>
+            </a:r>
+          </a:p>
+        </p:txBody>
+      </p:sp>
+      <p:sp>
+        <p:nvSpPr>
+          <p:cNvPr id="127" name="Rectangle 126"/>
+          <p:cNvSpPr/>
+          <p:nvPr/>
+        </p:nvSpPr>
+        <p:spPr>
+          <a:xfrm>
+            <a:off x="7534844" y="4862169"/>
+            <a:ext cx="1777638" cy="229209"/>
+          </a:xfrm>
+          <a:prstGeom prst="rect">
+            <a:avLst/>
+          </a:prstGeom>
+          <a:solidFill>
+            <a:srgbClr val="F6F7F9"/>
+          </a:solidFill>
+          <a:ln>
+            <a:noFill/>
+          </a:ln>
+          <a:effectLst/>
+        </p:spPr>
+        <p:style>
+          <a:lnRef idx="1">
+            <a:schemeClr val="accent1"/>
+          </a:lnRef>
+          <a:fillRef idx="3">
+            <a:schemeClr val="accent1"/>
+          </a:fillRef>
+          <a:effectRef idx="2">
+            <a:schemeClr val="accent1"/>
+          </a:effectRef>
+          <a:fontRef idx="minor">
+            <a:schemeClr val="lt1"/>
+          </a:fontRef>
+        </p:style>
+        <p:txBody>
+          <a:bodyPr rtlCol="0" anchor="ctr"/>
+          <a:lstStyle/>
+          <a:p>
+            <a:pPr algn="ctr"/>
+          </a:p>
+        </p:txBody>
+      </p:sp>
+      <p:sp>
+        <p:nvSpPr>
+          <p:cNvPr id="128" name="TextBox 127"/>
+          <p:cNvSpPr txBox="1"/>
+          <p:nvPr/>
+        </p:nvSpPr>
+        <p:spPr>
+          <a:xfrm>
+            <a:off x="7607998" y="4862169"/>
+            <a:ext cx="1660591" cy="229209"/>
+          </a:xfrm>
+          <a:prstGeom prst="rect">
+            <a:avLst/>
+          </a:prstGeom>
+          <a:noFill/>
+        </p:spPr>
+        <p:txBody>
+          <a:bodyPr wrap="square" anchor="ctr" lIns="0" rIns="0" tIns="0" bIns="0">
+            <a:spAutoFit/>
+          </a:bodyPr>
+          <a:lstStyle/>
+          <a:p>
+            <a:pPr algn="r">
+              <a:lnSpc>
+                <a:spcPct val="110000"/>
+              </a:lnSpc>
+              <a:spcAft>
+                <a:spcPts val="0"/>
+              </a:spcAft>
+            </a:pPr>
+            <a:r>
+              <a:rPr sz="720" b="0" i="0">
+                <a:solidFill>
+                  <a:srgbClr val="0E1620"/>
+                </a:solidFill>
+                <a:latin typeface="Arial"/>
+              </a:rPr>
+              <a:t>+16%</a:t>
+            </a:r>
+          </a:p>
+        </p:txBody>
+      </p:sp>
+      <p:sp>
+        <p:nvSpPr>
+          <p:cNvPr id="129" name="Rectangle 128"/>
+          <p:cNvSpPr/>
+          <p:nvPr/>
+        </p:nvSpPr>
+        <p:spPr>
+          <a:xfrm>
+            <a:off x="438922" y="5091379"/>
+            <a:ext cx="2340922" cy="229209"/>
+          </a:xfrm>
+          <a:prstGeom prst="rect">
+            <a:avLst/>
+          </a:prstGeom>
+          <a:solidFill>
+            <a:srgbClr val="FFFFFF"/>
+          </a:solidFill>
+          <a:ln>
+            <a:noFill/>
+          </a:ln>
+          <a:effectLst/>
+        </p:spPr>
+        <p:style>
+          <a:lnRef idx="1">
+            <a:schemeClr val="accent1"/>
+          </a:lnRef>
+          <a:fillRef idx="3">
+            <a:schemeClr val="accent1"/>
+          </a:fillRef>
+          <a:effectRef idx="2">
+            <a:schemeClr val="accent1"/>
+          </a:effectRef>
+          <a:fontRef idx="minor">
+            <a:schemeClr val="lt1"/>
+          </a:fontRef>
+        </p:style>
+        <p:txBody>
+          <a:bodyPr rtlCol="0" anchor="ctr"/>
+          <a:lstStyle/>
+          <a:p>
+            <a:pPr algn="ctr"/>
+          </a:p>
+        </p:txBody>
+      </p:sp>
+      <p:sp>
+        <p:nvSpPr>
+          <p:cNvPr id="130" name="TextBox 129"/>
+          <p:cNvSpPr txBox="1"/>
+          <p:nvPr/>
+        </p:nvSpPr>
+        <p:spPr>
+          <a:xfrm>
+            <a:off x="512076" y="5091379"/>
+            <a:ext cx="2223876" cy="229209"/>
+          </a:xfrm>
+          <a:prstGeom prst="rect">
+            <a:avLst/>
+          </a:prstGeom>
+          <a:noFill/>
+        </p:spPr>
+        <p:txBody>
+          <a:bodyPr wrap="square" anchor="ctr" lIns="0" rIns="0" tIns="0" bIns="0">
+            <a:spAutoFit/>
+          </a:bodyPr>
+          <a:lstStyle/>
+          <a:p>
+            <a:pPr algn="l">
+              <a:lnSpc>
+                <a:spcPct val="110000"/>
+              </a:lnSpc>
+              <a:spcAft>
+                <a:spcPts val="0"/>
+              </a:spcAft>
+            </a:pPr>
+            <a:r>
+              <a:rPr sz="720" b="1" i="0">
+                <a:solidFill>
+                  <a:srgbClr val="314359"/>
+                </a:solidFill>
+                <a:latin typeface="Arial"/>
+              </a:rPr>
+              <a:t>Zalaris</a:t>
+            </a:r>
+          </a:p>
+        </p:txBody>
+      </p:sp>
+      <p:sp>
+        <p:nvSpPr>
+          <p:cNvPr id="131" name="Rectangle 130"/>
+          <p:cNvSpPr/>
+          <p:nvPr/>
+        </p:nvSpPr>
+        <p:spPr>
+          <a:xfrm>
+            <a:off x="2779845" y="5091379"/>
+            <a:ext cx="1755691" cy="229209"/>
+          </a:xfrm>
+          <a:prstGeom prst="rect">
+            <a:avLst/>
+          </a:prstGeom>
+          <a:solidFill>
+            <a:srgbClr val="FFFFFF"/>
+          </a:solidFill>
+          <a:ln>
+            <a:noFill/>
+          </a:ln>
+          <a:effectLst/>
+        </p:spPr>
+        <p:style>
+          <a:lnRef idx="1">
+            <a:schemeClr val="accent1"/>
+          </a:lnRef>
+          <a:fillRef idx="3">
+            <a:schemeClr val="accent1"/>
+          </a:fillRef>
+          <a:effectRef idx="2">
+            <a:schemeClr val="accent1"/>
+          </a:effectRef>
+          <a:fontRef idx="minor">
+            <a:schemeClr val="lt1"/>
+          </a:fontRef>
+        </p:style>
+        <p:txBody>
+          <a:bodyPr rtlCol="0" anchor="ctr"/>
+          <a:lstStyle/>
+          <a:p>
+            <a:pPr algn="ctr"/>
+          </a:p>
+        </p:txBody>
+      </p:sp>
+      <p:sp>
+        <p:nvSpPr>
+          <p:cNvPr id="132" name="TextBox 131"/>
+          <p:cNvSpPr txBox="1"/>
+          <p:nvPr/>
+        </p:nvSpPr>
+        <p:spPr>
+          <a:xfrm>
+            <a:off x="2852999" y="5091379"/>
+            <a:ext cx="1638645" cy="229209"/>
+          </a:xfrm>
+          <a:prstGeom prst="rect">
+            <a:avLst/>
+          </a:prstGeom>
+          <a:noFill/>
+        </p:spPr>
+        <p:txBody>
+          <a:bodyPr wrap="square" anchor="ctr" lIns="0" rIns="0" tIns="0" bIns="0">
+            <a:spAutoFit/>
+          </a:bodyPr>
+          <a:lstStyle/>
+          <a:p>
+            <a:pPr algn="r">
+              <a:lnSpc>
+                <a:spcPct val="110000"/>
+              </a:lnSpc>
+              <a:spcAft>
+                <a:spcPts val="0"/>
+              </a:spcAft>
+            </a:pPr>
+            <a:r>
+              <a:rPr sz="720" b="0" i="0">
+                <a:solidFill>
+                  <a:srgbClr val="0E1620"/>
+                </a:solidFill>
+                <a:latin typeface="Arial"/>
+              </a:rPr>
+              <a:t>2018-2025</a:t>
+            </a:r>
+          </a:p>
+        </p:txBody>
+      </p:sp>
+      <p:sp>
+        <p:nvSpPr>
+          <p:cNvPr id="133" name="Rectangle 132"/>
+          <p:cNvSpPr/>
+          <p:nvPr/>
+        </p:nvSpPr>
+        <p:spPr>
+          <a:xfrm>
+            <a:off x="4535537" y="5091379"/>
+            <a:ext cx="1536230" cy="229209"/>
+          </a:xfrm>
+          <a:prstGeom prst="rect">
+            <a:avLst/>
+          </a:prstGeom>
+          <a:solidFill>
+            <a:srgbClr val="FFFFFF"/>
+          </a:solidFill>
+          <a:ln>
+            <a:noFill/>
+          </a:ln>
+          <a:effectLst/>
+        </p:spPr>
+        <p:style>
+          <a:lnRef idx="1">
+            <a:schemeClr val="accent1"/>
+          </a:lnRef>
+          <a:fillRef idx="3">
+            <a:schemeClr val="accent1"/>
+          </a:fillRef>
+          <a:effectRef idx="2">
+            <a:schemeClr val="accent1"/>
+          </a:effectRef>
+          <a:fontRef idx="minor">
+            <a:schemeClr val="lt1"/>
+          </a:fontRef>
+        </p:style>
+        <p:txBody>
+          <a:bodyPr rtlCol="0" anchor="ctr"/>
+          <a:lstStyle/>
+          <a:p>
+            <a:pPr algn="ctr"/>
+          </a:p>
+        </p:txBody>
+      </p:sp>
+      <p:sp>
+        <p:nvSpPr>
+          <p:cNvPr id="134" name="TextBox 133"/>
+          <p:cNvSpPr txBox="1"/>
+          <p:nvPr/>
+        </p:nvSpPr>
+        <p:spPr>
+          <a:xfrm>
+            <a:off x="4608691" y="5091379"/>
+            <a:ext cx="1419184" cy="229209"/>
+          </a:xfrm>
+          <a:prstGeom prst="rect">
+            <a:avLst/>
+          </a:prstGeom>
+          <a:noFill/>
+        </p:spPr>
+        <p:txBody>
+          <a:bodyPr wrap="square" anchor="ctr" lIns="0" rIns="0" tIns="0" bIns="0">
+            <a:spAutoFit/>
+          </a:bodyPr>
+          <a:lstStyle/>
+          <a:p>
+            <a:pPr algn="r">
+              <a:lnSpc>
+                <a:spcPct val="110000"/>
+              </a:lnSpc>
+              <a:spcAft>
+                <a:spcPts val="0"/>
+              </a:spcAft>
+            </a:pPr>
+            <a:r>
+              <a:rPr sz="720" b="0" i="0">
+                <a:solidFill>
+                  <a:srgbClr val="0E1620"/>
+                </a:solidFill>
+                <a:latin typeface="Arial"/>
+              </a:rPr>
+              <a:t>26%</a:t>
+            </a:r>
+          </a:p>
+        </p:txBody>
+      </p:sp>
+      <p:sp>
+        <p:nvSpPr>
+          <p:cNvPr id="135" name="Rectangle 134"/>
+          <p:cNvSpPr/>
+          <p:nvPr/>
+        </p:nvSpPr>
+        <p:spPr>
+          <a:xfrm>
+            <a:off x="6071767" y="5091379"/>
+            <a:ext cx="1463076" cy="229209"/>
+          </a:xfrm>
+          <a:prstGeom prst="rect">
+            <a:avLst/>
+          </a:prstGeom>
+          <a:solidFill>
+            <a:srgbClr val="FFFFFF"/>
+          </a:solidFill>
+          <a:ln>
+            <a:noFill/>
+          </a:ln>
+          <a:effectLst/>
+        </p:spPr>
+        <p:style>
+          <a:lnRef idx="1">
+            <a:schemeClr val="accent1"/>
+          </a:lnRef>
+          <a:fillRef idx="3">
+            <a:schemeClr val="accent1"/>
+          </a:fillRef>
+          <a:effectRef idx="2">
+            <a:schemeClr val="accent1"/>
+          </a:effectRef>
+          <a:fontRef idx="minor">
+            <a:schemeClr val="lt1"/>
+          </a:fontRef>
+        </p:style>
+        <p:txBody>
+          <a:bodyPr rtlCol="0" anchor="ctr"/>
+          <a:lstStyle/>
+          <a:p>
+            <a:pPr algn="ctr"/>
+          </a:p>
+        </p:txBody>
+      </p:sp>
+      <p:sp>
+        <p:nvSpPr>
+          <p:cNvPr id="136" name="TextBox 135"/>
+          <p:cNvSpPr txBox="1"/>
+          <p:nvPr/>
+        </p:nvSpPr>
+        <p:spPr>
+          <a:xfrm>
+            <a:off x="6144921" y="5091379"/>
+            <a:ext cx="1346030" cy="229209"/>
+          </a:xfrm>
+          <a:prstGeom prst="rect">
+            <a:avLst/>
+          </a:prstGeom>
+          <a:noFill/>
+        </p:spPr>
+        <p:txBody>
+          <a:bodyPr wrap="square" anchor="ctr" lIns="0" rIns="0" tIns="0" bIns="0">
+            <a:spAutoFit/>
+          </a:bodyPr>
+          <a:lstStyle/>
+          <a:p>
+            <a:pPr algn="r">
+              <a:lnSpc>
+                <a:spcPct val="110000"/>
+              </a:lnSpc>
+              <a:spcAft>
+                <a:spcPts val="0"/>
+              </a:spcAft>
+            </a:pPr>
+            <a:r>
+              <a:rPr sz="720" b="0" i="0">
+                <a:solidFill>
+                  <a:srgbClr val="0E1620"/>
+                </a:solidFill>
+                <a:latin typeface="Arial"/>
+              </a:rPr>
+              <a:t>1.5×</a:t>
+            </a:r>
+          </a:p>
+        </p:txBody>
+      </p:sp>
+      <p:sp>
+        <p:nvSpPr>
+          <p:cNvPr id="137" name="Rectangle 136"/>
+          <p:cNvSpPr/>
+          <p:nvPr/>
+        </p:nvSpPr>
+        <p:spPr>
+          <a:xfrm>
+            <a:off x="7534844" y="5091379"/>
+            <a:ext cx="1777638" cy="229209"/>
+          </a:xfrm>
+          <a:prstGeom prst="rect">
+            <a:avLst/>
+          </a:prstGeom>
+          <a:solidFill>
+            <a:srgbClr val="FFFFFF"/>
+          </a:solidFill>
+          <a:ln>
+            <a:noFill/>
+          </a:ln>
+          <a:effectLst/>
+        </p:spPr>
+        <p:style>
+          <a:lnRef idx="1">
+            <a:schemeClr val="accent1"/>
+          </a:lnRef>
+          <a:fillRef idx="3">
+            <a:schemeClr val="accent1"/>
+          </a:fillRef>
+          <a:effectRef idx="2">
+            <a:schemeClr val="accent1"/>
+          </a:effectRef>
+          <a:fontRef idx="minor">
+            <a:schemeClr val="lt1"/>
+          </a:fontRef>
+        </p:style>
+        <p:txBody>
+          <a:bodyPr rtlCol="0" anchor="ctr"/>
+          <a:lstStyle/>
+          <a:p>
+            <a:pPr algn="ctr"/>
+          </a:p>
+        </p:txBody>
+      </p:sp>
+      <p:sp>
+        <p:nvSpPr>
+          <p:cNvPr id="138" name="TextBox 137"/>
+          <p:cNvSpPr txBox="1"/>
+          <p:nvPr/>
+        </p:nvSpPr>
+        <p:spPr>
+          <a:xfrm>
+            <a:off x="7607998" y="5091379"/>
+            <a:ext cx="1660591" cy="229209"/>
+          </a:xfrm>
+          <a:prstGeom prst="rect">
+            <a:avLst/>
+          </a:prstGeom>
+          <a:noFill/>
+        </p:spPr>
+        <p:txBody>
+          <a:bodyPr wrap="square" anchor="ctr" lIns="0" rIns="0" tIns="0" bIns="0">
+            <a:spAutoFit/>
+          </a:bodyPr>
+          <a:lstStyle/>
+          <a:p>
+            <a:pPr algn="r">
+              <a:lnSpc>
+                <a:spcPct val="110000"/>
+              </a:lnSpc>
+              <a:spcAft>
+                <a:spcPts val="0"/>
+              </a:spcAft>
+            </a:pPr>
+            <a:r>
+              <a:rPr sz="720" b="0" i="0">
+                <a:solidFill>
+                  <a:srgbClr val="0E1620"/>
+                </a:solidFill>
+                <a:latin typeface="Arial"/>
+              </a:rPr>
+              <a:t>+16%</a:t>
+            </a:r>
+          </a:p>
+        </p:txBody>
+      </p:sp>
+      <p:sp>
+        <p:nvSpPr>
+          <p:cNvPr id="139" name="Rectangle 138"/>
+          <p:cNvSpPr/>
+          <p:nvPr/>
+        </p:nvSpPr>
+        <p:spPr>
+          <a:xfrm>
+            <a:off x="438922" y="5320588"/>
+            <a:ext cx="2340922" cy="229209"/>
+          </a:xfrm>
+          <a:prstGeom prst="rect">
+            <a:avLst/>
+          </a:prstGeom>
+          <a:solidFill>
+            <a:srgbClr val="F6F7F9"/>
+          </a:solidFill>
+          <a:ln>
+            <a:noFill/>
+          </a:ln>
+          <a:effectLst/>
+        </p:spPr>
+        <p:style>
+          <a:lnRef idx="1">
+            <a:schemeClr val="accent1"/>
+          </a:lnRef>
+          <a:fillRef idx="3">
+            <a:schemeClr val="accent1"/>
+          </a:fillRef>
+          <a:effectRef idx="2">
+            <a:schemeClr val="accent1"/>
+          </a:effectRef>
+          <a:fontRef idx="minor">
+            <a:schemeClr val="lt1"/>
+          </a:fontRef>
+        </p:style>
+        <p:txBody>
+          <a:bodyPr rtlCol="0" anchor="ctr"/>
+          <a:lstStyle/>
+          <a:p>
+            <a:pPr algn="ctr"/>
+          </a:p>
+        </p:txBody>
+      </p:sp>
+      <p:sp>
+        <p:nvSpPr>
+          <p:cNvPr id="140" name="TextBox 139"/>
+          <p:cNvSpPr txBox="1"/>
+          <p:nvPr/>
+        </p:nvSpPr>
+        <p:spPr>
+          <a:xfrm>
+            <a:off x="512076" y="5320588"/>
+            <a:ext cx="2223876" cy="229209"/>
+          </a:xfrm>
+          <a:prstGeom prst="rect">
+            <a:avLst/>
+          </a:prstGeom>
+          <a:noFill/>
+        </p:spPr>
+        <p:txBody>
+          <a:bodyPr wrap="square" anchor="ctr" lIns="0" rIns="0" tIns="0" bIns="0">
+            <a:spAutoFit/>
+          </a:bodyPr>
+          <a:lstStyle/>
+          <a:p>
+            <a:pPr algn="l">
+              <a:lnSpc>
+                <a:spcPct val="110000"/>
+              </a:lnSpc>
+              <a:spcAft>
+                <a:spcPts val="0"/>
+              </a:spcAft>
+            </a:pPr>
+            <a:r>
+              <a:rPr sz="720" b="1" i="0">
+                <a:solidFill>
+                  <a:srgbClr val="314359"/>
+                </a:solidFill>
+                <a:latin typeface="Arial"/>
+              </a:rPr>
+              <a:t>Robit</a:t>
+            </a:r>
+          </a:p>
+        </p:txBody>
+      </p:sp>
+      <p:sp>
+        <p:nvSpPr>
+          <p:cNvPr id="141" name="Rectangle 140"/>
+          <p:cNvSpPr/>
+          <p:nvPr/>
+        </p:nvSpPr>
+        <p:spPr>
+          <a:xfrm>
+            <a:off x="2779845" y="5320588"/>
+            <a:ext cx="1755691" cy="229209"/>
+          </a:xfrm>
+          <a:prstGeom prst="rect">
+            <a:avLst/>
+          </a:prstGeom>
+          <a:solidFill>
+            <a:srgbClr val="F6F7F9"/>
+          </a:solidFill>
+          <a:ln>
+            <a:noFill/>
+          </a:ln>
+          <a:effectLst/>
+        </p:spPr>
+        <p:style>
+          <a:lnRef idx="1">
+            <a:schemeClr val="accent1"/>
+          </a:lnRef>
+          <a:fillRef idx="3">
+            <a:schemeClr val="accent1"/>
+          </a:fillRef>
+          <a:effectRef idx="2">
+            <a:schemeClr val="accent1"/>
+          </a:effectRef>
+          <a:fontRef idx="minor">
+            <a:schemeClr val="lt1"/>
+          </a:fontRef>
+        </p:style>
+        <p:txBody>
+          <a:bodyPr rtlCol="0" anchor="ctr"/>
+          <a:lstStyle/>
+          <a:p>
+            <a:pPr algn="ctr"/>
+          </a:p>
+        </p:txBody>
+      </p:sp>
+      <p:sp>
+        <p:nvSpPr>
+          <p:cNvPr id="142" name="TextBox 141"/>
+          <p:cNvSpPr txBox="1"/>
+          <p:nvPr/>
+        </p:nvSpPr>
+        <p:spPr>
+          <a:xfrm>
+            <a:off x="2852999" y="5320588"/>
+            <a:ext cx="1638645" cy="229209"/>
+          </a:xfrm>
+          <a:prstGeom prst="rect">
+            <a:avLst/>
+          </a:prstGeom>
+          <a:noFill/>
+        </p:spPr>
+        <p:txBody>
+          <a:bodyPr wrap="square" anchor="ctr" lIns="0" rIns="0" tIns="0" bIns="0">
+            <a:spAutoFit/>
+          </a:bodyPr>
+          <a:lstStyle/>
+          <a:p>
+            <a:pPr algn="r">
+              <a:lnSpc>
+                <a:spcPct val="110000"/>
+              </a:lnSpc>
+              <a:spcAft>
+                <a:spcPts val="0"/>
+              </a:spcAft>
+            </a:pPr>
+            <a:r>
+              <a:rPr sz="720" b="0" i="0">
+                <a:solidFill>
+                  <a:srgbClr val="0E1620"/>
+                </a:solidFill>
+                <a:latin typeface="Arial"/>
+              </a:rPr>
+              <a:t>2015-2020</a:t>
+            </a:r>
+          </a:p>
+        </p:txBody>
+      </p:sp>
+      <p:sp>
+        <p:nvSpPr>
+          <p:cNvPr id="143" name="Rectangle 142"/>
+          <p:cNvSpPr/>
+          <p:nvPr/>
+        </p:nvSpPr>
+        <p:spPr>
+          <a:xfrm>
+            <a:off x="4535537" y="5320588"/>
+            <a:ext cx="1536230" cy="229209"/>
+          </a:xfrm>
+          <a:prstGeom prst="rect">
+            <a:avLst/>
+          </a:prstGeom>
+          <a:solidFill>
+            <a:srgbClr val="F6F7F9"/>
+          </a:solidFill>
+          <a:ln>
+            <a:noFill/>
+          </a:ln>
+          <a:effectLst/>
+        </p:spPr>
+        <p:style>
+          <a:lnRef idx="1">
+            <a:schemeClr val="accent1"/>
+          </a:lnRef>
+          <a:fillRef idx="3">
+            <a:schemeClr val="accent1"/>
+          </a:fillRef>
+          <a:effectRef idx="2">
+            <a:schemeClr val="accent1"/>
+          </a:effectRef>
+          <a:fontRef idx="minor">
+            <a:schemeClr val="lt1"/>
+          </a:fontRef>
+        </p:style>
+        <p:txBody>
+          <a:bodyPr rtlCol="0" anchor="ctr"/>
+          <a:lstStyle/>
+          <a:p>
+            <a:pPr algn="ctr"/>
+          </a:p>
+        </p:txBody>
+      </p:sp>
+      <p:sp>
+        <p:nvSpPr>
+          <p:cNvPr id="144" name="TextBox 143"/>
+          <p:cNvSpPr txBox="1"/>
+          <p:nvPr/>
+        </p:nvSpPr>
+        <p:spPr>
+          <a:xfrm>
+            <a:off x="4608691" y="5320588"/>
+            <a:ext cx="1419184" cy="229209"/>
+          </a:xfrm>
+          <a:prstGeom prst="rect">
+            <a:avLst/>
+          </a:prstGeom>
+          <a:noFill/>
+        </p:spPr>
+        <p:txBody>
+          <a:bodyPr wrap="square" anchor="ctr" lIns="0" rIns="0" tIns="0" bIns="0">
+            <a:spAutoFit/>
+          </a:bodyPr>
+          <a:lstStyle/>
+          <a:p>
+            <a:pPr algn="r">
+              <a:lnSpc>
+                <a:spcPct val="110000"/>
+              </a:lnSpc>
+              <a:spcAft>
+                <a:spcPts val="0"/>
+              </a:spcAft>
+            </a:pPr>
+            <a:r>
+              <a:rPr sz="720" b="0" i="0">
+                <a:solidFill>
+                  <a:srgbClr val="0E1620"/>
+                </a:solidFill>
+                <a:latin typeface="Arial"/>
+              </a:rPr>
+              <a:t>14%</a:t>
+            </a:r>
+          </a:p>
+        </p:txBody>
+      </p:sp>
+      <p:sp>
+        <p:nvSpPr>
+          <p:cNvPr id="145" name="Rectangle 144"/>
+          <p:cNvSpPr/>
+          <p:nvPr/>
+        </p:nvSpPr>
+        <p:spPr>
+          <a:xfrm>
+            <a:off x="6071767" y="5320588"/>
+            <a:ext cx="1463076" cy="229209"/>
+          </a:xfrm>
+          <a:prstGeom prst="rect">
+            <a:avLst/>
+          </a:prstGeom>
+          <a:solidFill>
+            <a:srgbClr val="F6F7F9"/>
+          </a:solidFill>
+          <a:ln>
+            <a:noFill/>
+          </a:ln>
+          <a:effectLst/>
+        </p:spPr>
+        <p:style>
+          <a:lnRef idx="1">
+            <a:schemeClr val="accent1"/>
+          </a:lnRef>
+          <a:fillRef idx="3">
+            <a:schemeClr val="accent1"/>
+          </a:fillRef>
+          <a:effectRef idx="2">
+            <a:schemeClr val="accent1"/>
+          </a:effectRef>
+          <a:fontRef idx="minor">
+            <a:schemeClr val="lt1"/>
+          </a:fontRef>
+        </p:style>
+        <p:txBody>
+          <a:bodyPr rtlCol="0" anchor="ctr"/>
+          <a:lstStyle/>
+          <a:p>
+            <a:pPr algn="ctr"/>
+          </a:p>
+        </p:txBody>
+      </p:sp>
+      <p:sp>
+        <p:nvSpPr>
+          <p:cNvPr id="146" name="TextBox 145"/>
+          <p:cNvSpPr txBox="1"/>
+          <p:nvPr/>
+        </p:nvSpPr>
+        <p:spPr>
+          <a:xfrm>
+            <a:off x="6144921" y="5320588"/>
+            <a:ext cx="1346030" cy="229209"/>
+          </a:xfrm>
+          <a:prstGeom prst="rect">
+            <a:avLst/>
+          </a:prstGeom>
+          <a:noFill/>
+        </p:spPr>
+        <p:txBody>
+          <a:bodyPr wrap="square" anchor="ctr" lIns="0" rIns="0" tIns="0" bIns="0">
+            <a:spAutoFit/>
+          </a:bodyPr>
+          <a:lstStyle/>
+          <a:p>
+            <a:pPr algn="r">
+              <a:lnSpc>
+                <a:spcPct val="110000"/>
+              </a:lnSpc>
+              <a:spcAft>
+                <a:spcPts val="0"/>
+              </a:spcAft>
+            </a:pPr>
+            <a:r>
+              <a:rPr sz="720" b="0" i="0">
+                <a:solidFill>
+                  <a:srgbClr val="0E1620"/>
+                </a:solidFill>
+                <a:latin typeface="Arial"/>
+              </a:rPr>
+              <a:t>1.4×</a:t>
+            </a:r>
+          </a:p>
+        </p:txBody>
+      </p:sp>
+      <p:sp>
+        <p:nvSpPr>
+          <p:cNvPr id="147" name="Rectangle 146"/>
+          <p:cNvSpPr/>
+          <p:nvPr/>
+        </p:nvSpPr>
+        <p:spPr>
+          <a:xfrm>
+            <a:off x="7534844" y="5320588"/>
+            <a:ext cx="1777638" cy="229209"/>
+          </a:xfrm>
+          <a:prstGeom prst="rect">
+            <a:avLst/>
+          </a:prstGeom>
+          <a:solidFill>
+            <a:srgbClr val="F6F7F9"/>
+          </a:solidFill>
+          <a:ln>
+            <a:noFill/>
+          </a:ln>
+          <a:effectLst/>
+        </p:spPr>
+        <p:style>
+          <a:lnRef idx="1">
+            <a:schemeClr val="accent1"/>
+          </a:lnRef>
+          <a:fillRef idx="3">
+            <a:schemeClr val="accent1"/>
+          </a:fillRef>
+          <a:effectRef idx="2">
+            <a:schemeClr val="accent1"/>
+          </a:effectRef>
+          <a:fontRef idx="minor">
+            <a:schemeClr val="lt1"/>
+          </a:fontRef>
+        </p:style>
+        <p:txBody>
+          <a:bodyPr rtlCol="0" anchor="ctr"/>
+          <a:lstStyle/>
+          <a:p>
+            <a:pPr algn="ctr"/>
+          </a:p>
+        </p:txBody>
+      </p:sp>
+      <p:sp>
+        <p:nvSpPr>
+          <p:cNvPr id="148" name="TextBox 147"/>
+          <p:cNvSpPr txBox="1"/>
+          <p:nvPr/>
+        </p:nvSpPr>
+        <p:spPr>
+          <a:xfrm>
+            <a:off x="7607998" y="5320588"/>
+            <a:ext cx="1660591" cy="229209"/>
+          </a:xfrm>
+          <a:prstGeom prst="rect">
+            <a:avLst/>
+          </a:prstGeom>
+          <a:noFill/>
+        </p:spPr>
+        <p:txBody>
+          <a:bodyPr wrap="square" anchor="ctr" lIns="0" rIns="0" tIns="0" bIns="0">
+            <a:spAutoFit/>
+          </a:bodyPr>
+          <a:lstStyle/>
+          <a:p>
+            <a:pPr algn="r">
+              <a:lnSpc>
+                <a:spcPct val="110000"/>
+              </a:lnSpc>
+              <a:spcAft>
+                <a:spcPts val="0"/>
+              </a:spcAft>
+            </a:pPr>
+            <a:r>
+              <a:rPr sz="720" b="0" i="0">
+                <a:solidFill>
+                  <a:srgbClr val="0E1620"/>
+                </a:solidFill>
+                <a:latin typeface="Arial"/>
+              </a:rPr>
+              <a:t>+8%</a:t>
+            </a:r>
+          </a:p>
+        </p:txBody>
+      </p:sp>
+      <p:sp>
+        <p:nvSpPr>
+          <p:cNvPr id="149" name="Rectangle 148"/>
+          <p:cNvSpPr/>
+          <p:nvPr/>
+        </p:nvSpPr>
+        <p:spPr>
+          <a:xfrm>
+            <a:off x="438922" y="5549798"/>
+            <a:ext cx="2340922" cy="229209"/>
+          </a:xfrm>
+          <a:prstGeom prst="rect">
+            <a:avLst/>
+          </a:prstGeom>
+          <a:solidFill>
+            <a:srgbClr val="FFFFFF"/>
+          </a:solidFill>
+          <a:ln>
+            <a:noFill/>
+          </a:ln>
+          <a:effectLst/>
+        </p:spPr>
+        <p:style>
+          <a:lnRef idx="1">
+            <a:schemeClr val="accent1"/>
+          </a:lnRef>
+          <a:fillRef idx="3">
+            <a:schemeClr val="accent1"/>
+          </a:fillRef>
+          <a:effectRef idx="2">
+            <a:schemeClr val="accent1"/>
+          </a:effectRef>
+          <a:fontRef idx="minor">
+            <a:schemeClr val="lt1"/>
+          </a:fontRef>
+        </p:style>
+        <p:txBody>
+          <a:bodyPr rtlCol="0" anchor="ctr"/>
+          <a:lstStyle/>
+          <a:p>
+            <a:pPr algn="ctr"/>
+          </a:p>
+        </p:txBody>
+      </p:sp>
+      <p:sp>
+        <p:nvSpPr>
+          <p:cNvPr id="150" name="TextBox 149"/>
+          <p:cNvSpPr txBox="1"/>
+          <p:nvPr/>
+        </p:nvSpPr>
+        <p:spPr>
+          <a:xfrm>
+            <a:off x="512076" y="5549798"/>
+            <a:ext cx="2223876" cy="229209"/>
+          </a:xfrm>
+          <a:prstGeom prst="rect">
+            <a:avLst/>
+          </a:prstGeom>
+          <a:noFill/>
+        </p:spPr>
+        <p:txBody>
+          <a:bodyPr wrap="square" anchor="ctr" lIns="0" rIns="0" tIns="0" bIns="0">
+            <a:spAutoFit/>
+          </a:bodyPr>
+          <a:lstStyle/>
+          <a:p>
+            <a:pPr algn="l">
+              <a:lnSpc>
+                <a:spcPct val="110000"/>
+              </a:lnSpc>
+              <a:spcAft>
+                <a:spcPts val="0"/>
+              </a:spcAft>
+            </a:pPr>
+            <a:r>
+              <a:rPr sz="720" b="1" i="0">
+                <a:solidFill>
+                  <a:srgbClr val="314359"/>
+                </a:solidFill>
+                <a:latin typeface="Arial"/>
+              </a:rPr>
+              <a:t>DistIt</a:t>
+            </a:r>
+          </a:p>
+        </p:txBody>
+      </p:sp>
+      <p:sp>
+        <p:nvSpPr>
+          <p:cNvPr id="151" name="Rectangle 150"/>
+          <p:cNvSpPr/>
+          <p:nvPr/>
+        </p:nvSpPr>
+        <p:spPr>
+          <a:xfrm>
+            <a:off x="2779845" y="5549798"/>
+            <a:ext cx="1755691" cy="229209"/>
+          </a:xfrm>
+          <a:prstGeom prst="rect">
+            <a:avLst/>
+          </a:prstGeom>
+          <a:solidFill>
+            <a:srgbClr val="FFFFFF"/>
+          </a:solidFill>
+          <a:ln>
+            <a:noFill/>
+          </a:ln>
+          <a:effectLst/>
+        </p:spPr>
+        <p:style>
+          <a:lnRef idx="1">
+            <a:schemeClr val="accent1"/>
+          </a:lnRef>
+          <a:fillRef idx="3">
+            <a:schemeClr val="accent1"/>
+          </a:fillRef>
+          <a:effectRef idx="2">
+            <a:schemeClr val="accent1"/>
+          </a:effectRef>
+          <a:fontRef idx="minor">
+            <a:schemeClr val="lt1"/>
+          </a:fontRef>
+        </p:style>
+        <p:txBody>
+          <a:bodyPr rtlCol="0" anchor="ctr"/>
+          <a:lstStyle/>
+          <a:p>
+            <a:pPr algn="ctr"/>
+          </a:p>
+        </p:txBody>
+      </p:sp>
+      <p:sp>
+        <p:nvSpPr>
+          <p:cNvPr id="152" name="TextBox 151"/>
+          <p:cNvSpPr txBox="1"/>
+          <p:nvPr/>
+        </p:nvSpPr>
+        <p:spPr>
+          <a:xfrm>
+            <a:off x="2852999" y="5549798"/>
+            <a:ext cx="1638645" cy="229209"/>
+          </a:xfrm>
+          <a:prstGeom prst="rect">
+            <a:avLst/>
+          </a:prstGeom>
+          <a:noFill/>
+        </p:spPr>
+        <p:txBody>
+          <a:bodyPr wrap="square" anchor="ctr" lIns="0" rIns="0" tIns="0" bIns="0">
+            <a:spAutoFit/>
+          </a:bodyPr>
+          <a:lstStyle/>
+          <a:p>
+            <a:pPr algn="r">
+              <a:lnSpc>
+                <a:spcPct val="110000"/>
+              </a:lnSpc>
+              <a:spcAft>
+                <a:spcPts val="0"/>
+              </a:spcAft>
+            </a:pPr>
+            <a:r>
+              <a:rPr sz="720" b="0" i="0">
+                <a:solidFill>
+                  <a:srgbClr val="0E1620"/>
+                </a:solidFill>
+                <a:latin typeface="Arial"/>
+              </a:rPr>
+              <a:t>2015-2025</a:t>
+            </a:r>
+          </a:p>
+        </p:txBody>
+      </p:sp>
+      <p:sp>
+        <p:nvSpPr>
+          <p:cNvPr id="153" name="Rectangle 152"/>
+          <p:cNvSpPr/>
+          <p:nvPr/>
+        </p:nvSpPr>
+        <p:spPr>
+          <a:xfrm>
+            <a:off x="4535537" y="5549798"/>
+            <a:ext cx="1536230" cy="229209"/>
+          </a:xfrm>
+          <a:prstGeom prst="rect">
+            <a:avLst/>
+          </a:prstGeom>
+          <a:solidFill>
+            <a:srgbClr val="FFFFFF"/>
+          </a:solidFill>
+          <a:ln>
+            <a:noFill/>
+          </a:ln>
+          <a:effectLst/>
+        </p:spPr>
+        <p:style>
+          <a:lnRef idx="1">
+            <a:schemeClr val="accent1"/>
+          </a:lnRef>
+          <a:fillRef idx="3">
+            <a:schemeClr val="accent1"/>
+          </a:fillRef>
+          <a:effectRef idx="2">
+            <a:schemeClr val="accent1"/>
+          </a:effectRef>
+          <a:fontRef idx="minor">
+            <a:schemeClr val="lt1"/>
+          </a:fontRef>
+        </p:style>
+        <p:txBody>
+          <a:bodyPr rtlCol="0" anchor="ctr"/>
+          <a:lstStyle/>
+          <a:p>
+            <a:pPr algn="ctr"/>
+          </a:p>
+        </p:txBody>
+      </p:sp>
+      <p:sp>
+        <p:nvSpPr>
+          <p:cNvPr id="154" name="TextBox 153"/>
+          <p:cNvSpPr txBox="1"/>
+          <p:nvPr/>
+        </p:nvSpPr>
+        <p:spPr>
+          <a:xfrm>
+            <a:off x="4608691" y="5549798"/>
+            <a:ext cx="1419184" cy="229209"/>
+          </a:xfrm>
+          <a:prstGeom prst="rect">
+            <a:avLst/>
+          </a:prstGeom>
+          <a:noFill/>
+        </p:spPr>
+        <p:txBody>
+          <a:bodyPr wrap="square" anchor="ctr" lIns="0" rIns="0" tIns="0" bIns="0">
+            <a:spAutoFit/>
+          </a:bodyPr>
+          <a:lstStyle/>
+          <a:p>
+            <a:pPr algn="r">
+              <a:lnSpc>
+                <a:spcPct val="110000"/>
+              </a:lnSpc>
+              <a:spcAft>
+                <a:spcPts val="0"/>
+              </a:spcAft>
+            </a:pPr>
+            <a:r>
+              <a:rPr sz="720" b="0" i="0">
+                <a:solidFill>
+                  <a:srgbClr val="0E1620"/>
+                </a:solidFill>
+                <a:latin typeface="Arial"/>
+              </a:rPr>
+              <a:t>7%</a:t>
+            </a:r>
+          </a:p>
+        </p:txBody>
+      </p:sp>
+      <p:sp>
+        <p:nvSpPr>
+          <p:cNvPr id="155" name="Rectangle 154"/>
+          <p:cNvSpPr/>
+          <p:nvPr/>
+        </p:nvSpPr>
+        <p:spPr>
+          <a:xfrm>
+            <a:off x="6071767" y="5549798"/>
+            <a:ext cx="1463076" cy="229209"/>
+          </a:xfrm>
+          <a:prstGeom prst="rect">
+            <a:avLst/>
+          </a:prstGeom>
+          <a:solidFill>
+            <a:srgbClr val="FFFFFF"/>
+          </a:solidFill>
+          <a:ln>
+            <a:noFill/>
+          </a:ln>
+          <a:effectLst/>
+        </p:spPr>
+        <p:style>
+          <a:lnRef idx="1">
+            <a:schemeClr val="accent1"/>
+          </a:lnRef>
+          <a:fillRef idx="3">
+            <a:schemeClr val="accent1"/>
+          </a:fillRef>
+          <a:effectRef idx="2">
+            <a:schemeClr val="accent1"/>
+          </a:effectRef>
+          <a:fontRef idx="minor">
+            <a:schemeClr val="lt1"/>
+          </a:fontRef>
+        </p:style>
+        <p:txBody>
+          <a:bodyPr rtlCol="0" anchor="ctr"/>
+          <a:lstStyle/>
+          <a:p>
+            <a:pPr algn="ctr"/>
+          </a:p>
+        </p:txBody>
+      </p:sp>
+      <p:sp>
+        <p:nvSpPr>
+          <p:cNvPr id="156" name="TextBox 155"/>
+          <p:cNvSpPr txBox="1"/>
+          <p:nvPr/>
+        </p:nvSpPr>
+        <p:spPr>
+          <a:xfrm>
+            <a:off x="6144921" y="5549798"/>
+            <a:ext cx="1346030" cy="229209"/>
+          </a:xfrm>
+          <a:prstGeom prst="rect">
+            <a:avLst/>
+          </a:prstGeom>
+          <a:noFill/>
+        </p:spPr>
+        <p:txBody>
+          <a:bodyPr wrap="square" anchor="ctr" lIns="0" rIns="0" tIns="0" bIns="0">
+            <a:spAutoFit/>
+          </a:bodyPr>
+          <a:lstStyle/>
+          <a:p>
+            <a:pPr algn="r">
+              <a:lnSpc>
+                <a:spcPct val="110000"/>
+              </a:lnSpc>
+              <a:spcAft>
+                <a:spcPts val="0"/>
+              </a:spcAft>
+            </a:pPr>
+            <a:r>
+              <a:rPr sz="720" b="0" i="0">
+                <a:solidFill>
+                  <a:srgbClr val="0E1620"/>
+                </a:solidFill>
+                <a:latin typeface="Arial"/>
+              </a:rPr>
+              <a:t>1.2×</a:t>
+            </a:r>
+          </a:p>
+        </p:txBody>
+      </p:sp>
+      <p:sp>
+        <p:nvSpPr>
+          <p:cNvPr id="157" name="Rectangle 156"/>
+          <p:cNvSpPr/>
+          <p:nvPr/>
+        </p:nvSpPr>
+        <p:spPr>
+          <a:xfrm>
+            <a:off x="7534844" y="5549798"/>
+            <a:ext cx="1777638" cy="229209"/>
+          </a:xfrm>
+          <a:prstGeom prst="rect">
+            <a:avLst/>
+          </a:prstGeom>
+          <a:solidFill>
+            <a:srgbClr val="FFFFFF"/>
+          </a:solidFill>
+          <a:ln>
+            <a:noFill/>
+          </a:ln>
+          <a:effectLst/>
+        </p:spPr>
+        <p:style>
+          <a:lnRef idx="1">
+            <a:schemeClr val="accent1"/>
+          </a:lnRef>
+          <a:fillRef idx="3">
+            <a:schemeClr val="accent1"/>
+          </a:fillRef>
+          <a:effectRef idx="2">
+            <a:schemeClr val="accent1"/>
+          </a:effectRef>
+          <a:fontRef idx="minor">
+            <a:schemeClr val="lt1"/>
+          </a:fontRef>
+        </p:style>
+        <p:txBody>
+          <a:bodyPr rtlCol="0" anchor="ctr"/>
+          <a:lstStyle/>
+          <a:p>
+            <a:pPr algn="ctr"/>
+          </a:p>
+        </p:txBody>
+      </p:sp>
+      <p:sp>
+        <p:nvSpPr>
+          <p:cNvPr id="158" name="TextBox 157"/>
+          <p:cNvSpPr txBox="1"/>
+          <p:nvPr/>
+        </p:nvSpPr>
+        <p:spPr>
+          <a:xfrm>
+            <a:off x="7607998" y="5549798"/>
+            <a:ext cx="1660591" cy="229209"/>
+          </a:xfrm>
+          <a:prstGeom prst="rect">
+            <a:avLst/>
+          </a:prstGeom>
+          <a:noFill/>
+        </p:spPr>
+        <p:txBody>
+          <a:bodyPr wrap="square" anchor="ctr" lIns="0" rIns="0" tIns="0" bIns="0">
+            <a:spAutoFit/>
+          </a:bodyPr>
+          <a:lstStyle/>
+          <a:p>
+            <a:pPr algn="r">
+              <a:lnSpc>
+                <a:spcPct val="110000"/>
+              </a:lnSpc>
+              <a:spcAft>
+                <a:spcPts val="0"/>
+              </a:spcAft>
+            </a:pPr>
+            <a:r>
+              <a:rPr sz="720" b="0" i="0">
+                <a:solidFill>
+                  <a:srgbClr val="0E1620"/>
+                </a:solidFill>
+                <a:latin typeface="Arial"/>
+              </a:rPr>
+              <a:t>-1%</a:t>
+            </a:r>
+          </a:p>
+        </p:txBody>
+      </p:sp>
+      <p:sp>
+        <p:nvSpPr>
+          <p:cNvPr id="159" name="Rectangle 158"/>
+          <p:cNvSpPr/>
+          <p:nvPr/>
+        </p:nvSpPr>
+        <p:spPr>
+          <a:xfrm>
+            <a:off x="438922" y="5779008"/>
+            <a:ext cx="2340922" cy="229209"/>
+          </a:xfrm>
+          <a:prstGeom prst="rect">
+            <a:avLst/>
+          </a:prstGeom>
+          <a:solidFill>
+            <a:srgbClr val="F6F7F9"/>
+          </a:solidFill>
+          <a:ln>
+            <a:noFill/>
+          </a:ln>
+          <a:effectLst/>
+        </p:spPr>
+        <p:style>
+          <a:lnRef idx="1">
+            <a:schemeClr val="accent1"/>
+          </a:lnRef>
+          <a:fillRef idx="3">
+            <a:schemeClr val="accent1"/>
+          </a:fillRef>
+          <a:effectRef idx="2">
+            <a:schemeClr val="accent1"/>
+          </a:effectRef>
+          <a:fontRef idx="minor">
+            <a:schemeClr val="lt1"/>
+          </a:fontRef>
+        </p:style>
+        <p:txBody>
+          <a:bodyPr rtlCol="0" anchor="ctr"/>
+          <a:lstStyle/>
+          <a:p>
+            <a:pPr algn="ctr"/>
+          </a:p>
+        </p:txBody>
+      </p:sp>
+      <p:sp>
+        <p:nvSpPr>
+          <p:cNvPr id="160" name="TextBox 159"/>
+          <p:cNvSpPr txBox="1"/>
+          <p:nvPr/>
+        </p:nvSpPr>
+        <p:spPr>
+          <a:xfrm>
+            <a:off x="512076" y="5779008"/>
+            <a:ext cx="2223876" cy="229209"/>
+          </a:xfrm>
+          <a:prstGeom prst="rect">
+            <a:avLst/>
+          </a:prstGeom>
+          <a:noFill/>
+        </p:spPr>
+        <p:txBody>
+          <a:bodyPr wrap="square" anchor="ctr" lIns="0" rIns="0" tIns="0" bIns="0">
+            <a:spAutoFit/>
+          </a:bodyPr>
+          <a:lstStyle/>
+          <a:p>
+            <a:pPr algn="l">
+              <a:lnSpc>
+                <a:spcPct val="110000"/>
+              </a:lnSpc>
+              <a:spcAft>
+                <a:spcPts val="0"/>
+              </a:spcAft>
+            </a:pPr>
+            <a:r>
+              <a:rPr sz="720" b="1" i="0">
+                <a:solidFill>
+                  <a:srgbClr val="314359"/>
+                </a:solidFill>
+                <a:latin typeface="Arial"/>
+              </a:rPr>
+              <a:t>Catella</a:t>
+            </a:r>
+          </a:p>
+        </p:txBody>
+      </p:sp>
+      <p:sp>
+        <p:nvSpPr>
+          <p:cNvPr id="161" name="Rectangle 160"/>
+          <p:cNvSpPr/>
+          <p:nvPr/>
+        </p:nvSpPr>
+        <p:spPr>
+          <a:xfrm>
+            <a:off x="2779845" y="5779008"/>
+            <a:ext cx="1755691" cy="229209"/>
+          </a:xfrm>
+          <a:prstGeom prst="rect">
+            <a:avLst/>
+          </a:prstGeom>
+          <a:solidFill>
+            <a:srgbClr val="F6F7F9"/>
+          </a:solidFill>
+          <a:ln>
+            <a:noFill/>
+          </a:ln>
+          <a:effectLst/>
+        </p:spPr>
+        <p:style>
+          <a:lnRef idx="1">
+            <a:schemeClr val="accent1"/>
+          </a:lnRef>
+          <a:fillRef idx="3">
+            <a:schemeClr val="accent1"/>
+          </a:fillRef>
+          <a:effectRef idx="2">
+            <a:schemeClr val="accent1"/>
+          </a:effectRef>
+          <a:fontRef idx="minor">
+            <a:schemeClr val="lt1"/>
+          </a:fontRef>
+        </p:style>
+        <p:txBody>
+          <a:bodyPr rtlCol="0" anchor="ctr"/>
+          <a:lstStyle/>
+          <a:p>
+            <a:pPr algn="ctr"/>
+          </a:p>
+        </p:txBody>
+      </p:sp>
+      <p:sp>
+        <p:nvSpPr>
+          <p:cNvPr id="162" name="TextBox 161"/>
+          <p:cNvSpPr txBox="1"/>
+          <p:nvPr/>
+        </p:nvSpPr>
+        <p:spPr>
+          <a:xfrm>
+            <a:off x="2852999" y="5779008"/>
+            <a:ext cx="1638645" cy="229209"/>
+          </a:xfrm>
+          <a:prstGeom prst="rect">
+            <a:avLst/>
+          </a:prstGeom>
+          <a:noFill/>
+        </p:spPr>
+        <p:txBody>
+          <a:bodyPr wrap="square" anchor="ctr" lIns="0" rIns="0" tIns="0" bIns="0">
+            <a:spAutoFit/>
+          </a:bodyPr>
+          <a:lstStyle/>
+          <a:p>
+            <a:pPr algn="r">
+              <a:lnSpc>
+                <a:spcPct val="110000"/>
+              </a:lnSpc>
+              <a:spcAft>
+                <a:spcPts val="0"/>
+              </a:spcAft>
+            </a:pPr>
+            <a:r>
+              <a:rPr sz="720" b="0" i="0">
+                <a:solidFill>
+                  <a:srgbClr val="0E1620"/>
+                </a:solidFill>
+                <a:latin typeface="Arial"/>
+              </a:rPr>
+              <a:t>2020-2025</a:t>
+            </a:r>
+          </a:p>
+        </p:txBody>
+      </p:sp>
+      <p:sp>
+        <p:nvSpPr>
+          <p:cNvPr id="163" name="Rectangle 162"/>
+          <p:cNvSpPr/>
+          <p:nvPr/>
+        </p:nvSpPr>
+        <p:spPr>
+          <a:xfrm>
+            <a:off x="4535537" y="5779008"/>
+            <a:ext cx="1536230" cy="229209"/>
+          </a:xfrm>
+          <a:prstGeom prst="rect">
+            <a:avLst/>
+          </a:prstGeom>
+          <a:solidFill>
+            <a:srgbClr val="F6F7F9"/>
+          </a:solidFill>
+          <a:ln>
+            <a:noFill/>
+          </a:ln>
+          <a:effectLst/>
+        </p:spPr>
+        <p:style>
+          <a:lnRef idx="1">
+            <a:schemeClr val="accent1"/>
+          </a:lnRef>
+          <a:fillRef idx="3">
+            <a:schemeClr val="accent1"/>
+          </a:fillRef>
+          <a:effectRef idx="2">
+            <a:schemeClr val="accent1"/>
+          </a:effectRef>
+          <a:fontRef idx="minor">
+            <a:schemeClr val="lt1"/>
+          </a:fontRef>
+        </p:style>
+        <p:txBody>
+          <a:bodyPr rtlCol="0" anchor="ctr"/>
+          <a:lstStyle/>
+          <a:p>
+            <a:pPr algn="ctr"/>
+          </a:p>
+        </p:txBody>
+      </p:sp>
+      <p:sp>
+        <p:nvSpPr>
+          <p:cNvPr id="164" name="TextBox 163"/>
+          <p:cNvSpPr txBox="1"/>
+          <p:nvPr/>
+        </p:nvSpPr>
+        <p:spPr>
+          <a:xfrm>
+            <a:off x="4608691" y="5779008"/>
+            <a:ext cx="1419184" cy="229209"/>
+          </a:xfrm>
+          <a:prstGeom prst="rect">
+            <a:avLst/>
+          </a:prstGeom>
+          <a:noFill/>
+        </p:spPr>
+        <p:txBody>
+          <a:bodyPr wrap="square" anchor="ctr" lIns="0" rIns="0" tIns="0" bIns="0">
+            <a:spAutoFit/>
+          </a:bodyPr>
+          <a:lstStyle/>
+          <a:p>
+            <a:pPr algn="r">
+              <a:lnSpc>
+                <a:spcPct val="110000"/>
+              </a:lnSpc>
+              <a:spcAft>
+                <a:spcPts val="0"/>
+              </a:spcAft>
+            </a:pPr>
+            <a:r>
+              <a:rPr sz="720" b="0" i="0">
+                <a:solidFill>
+                  <a:srgbClr val="0E1620"/>
+                </a:solidFill>
+                <a:latin typeface="Arial"/>
+              </a:rPr>
+              <a:t>12%</a:t>
+            </a:r>
+          </a:p>
+        </p:txBody>
+      </p:sp>
+      <p:sp>
+        <p:nvSpPr>
+          <p:cNvPr id="165" name="Rectangle 164"/>
+          <p:cNvSpPr/>
+          <p:nvPr/>
+        </p:nvSpPr>
+        <p:spPr>
+          <a:xfrm>
+            <a:off x="6071767" y="5779008"/>
+            <a:ext cx="1463076" cy="229209"/>
+          </a:xfrm>
+          <a:prstGeom prst="rect">
+            <a:avLst/>
+          </a:prstGeom>
+          <a:solidFill>
+            <a:srgbClr val="F6F7F9"/>
+          </a:solidFill>
+          <a:ln>
+            <a:noFill/>
+          </a:ln>
+          <a:effectLst/>
+        </p:spPr>
+        <p:style>
+          <a:lnRef idx="1">
+            <a:schemeClr val="accent1"/>
+          </a:lnRef>
+          <a:fillRef idx="3">
+            <a:schemeClr val="accent1"/>
+          </a:fillRef>
+          <a:effectRef idx="2">
+            <a:schemeClr val="accent1"/>
+          </a:effectRef>
+          <a:fontRef idx="minor">
+            <a:schemeClr val="lt1"/>
+          </a:fontRef>
+        </p:style>
+        <p:txBody>
+          <a:bodyPr rtlCol="0" anchor="ctr"/>
+          <a:lstStyle/>
+          <a:p>
+            <a:pPr algn="ctr"/>
+          </a:p>
+        </p:txBody>
+      </p:sp>
+      <p:sp>
+        <p:nvSpPr>
+          <p:cNvPr id="166" name="TextBox 165"/>
+          <p:cNvSpPr txBox="1"/>
+          <p:nvPr/>
+        </p:nvSpPr>
+        <p:spPr>
+          <a:xfrm>
+            <a:off x="6144921" y="5779008"/>
+            <a:ext cx="1346030" cy="229209"/>
+          </a:xfrm>
+          <a:prstGeom prst="rect">
+            <a:avLst/>
+          </a:prstGeom>
+          <a:noFill/>
+        </p:spPr>
+        <p:txBody>
+          <a:bodyPr wrap="square" anchor="ctr" lIns="0" rIns="0" tIns="0" bIns="0">
+            <a:spAutoFit/>
+          </a:bodyPr>
+          <a:lstStyle/>
+          <a:p>
+            <a:pPr algn="r">
+              <a:lnSpc>
+                <a:spcPct val="110000"/>
+              </a:lnSpc>
+              <a:spcAft>
+                <a:spcPts val="0"/>
+              </a:spcAft>
+            </a:pPr>
+            <a:r>
+              <a:rPr sz="720" b="0" i="0">
+                <a:solidFill>
+                  <a:srgbClr val="0E1620"/>
+                </a:solidFill>
+                <a:latin typeface="Arial"/>
+              </a:rPr>
+              <a:t>1.2×</a:t>
+            </a:r>
+          </a:p>
+        </p:txBody>
+      </p:sp>
+      <p:sp>
+        <p:nvSpPr>
+          <p:cNvPr id="167" name="Rectangle 166"/>
+          <p:cNvSpPr/>
+          <p:nvPr/>
+        </p:nvSpPr>
+        <p:spPr>
+          <a:xfrm>
+            <a:off x="7534844" y="5779008"/>
+            <a:ext cx="1777638" cy="229209"/>
+          </a:xfrm>
+          <a:prstGeom prst="rect">
+            <a:avLst/>
+          </a:prstGeom>
+          <a:solidFill>
+            <a:srgbClr val="F6F7F9"/>
+          </a:solidFill>
+          <a:ln>
+            <a:noFill/>
+          </a:ln>
+          <a:effectLst/>
+        </p:spPr>
+        <p:style>
+          <a:lnRef idx="1">
+            <a:schemeClr val="accent1"/>
+          </a:lnRef>
+          <a:fillRef idx="3">
+            <a:schemeClr val="accent1"/>
+          </a:fillRef>
+          <a:effectRef idx="2">
+            <a:schemeClr val="accent1"/>
+          </a:effectRef>
+          <a:fontRef idx="minor">
+            <a:schemeClr val="lt1"/>
+          </a:fontRef>
+        </p:style>
+        <p:txBody>
+          <a:bodyPr rtlCol="0" anchor="ctr"/>
+          <a:lstStyle/>
+          <a:p>
+            <a:pPr algn="ctr"/>
+          </a:p>
+        </p:txBody>
+      </p:sp>
+      <p:sp>
+        <p:nvSpPr>
+          <p:cNvPr id="168" name="TextBox 167"/>
+          <p:cNvSpPr txBox="1"/>
+          <p:nvPr/>
+        </p:nvSpPr>
+        <p:spPr>
+          <a:xfrm>
+            <a:off x="7607998" y="5779008"/>
+            <a:ext cx="1660591" cy="229209"/>
+          </a:xfrm>
+          <a:prstGeom prst="rect">
+            <a:avLst/>
+          </a:prstGeom>
+          <a:noFill/>
+        </p:spPr>
+        <p:txBody>
+          <a:bodyPr wrap="square" anchor="ctr" lIns="0" rIns="0" tIns="0" bIns="0">
+            <a:spAutoFit/>
+          </a:bodyPr>
+          <a:lstStyle/>
+          <a:p>
+            <a:pPr algn="r">
+              <a:lnSpc>
+                <a:spcPct val="110000"/>
+              </a:lnSpc>
+              <a:spcAft>
+                <a:spcPts val="0"/>
+              </a:spcAft>
+            </a:pPr>
+            <a:r>
+              <a:rPr sz="720" b="0" i="0">
+                <a:solidFill>
+                  <a:srgbClr val="0E1620"/>
+                </a:solidFill>
+                <a:latin typeface="Arial"/>
+              </a:rPr>
+              <a:t>+2%</a:t>
+            </a:r>
+          </a:p>
+        </p:txBody>
+      </p:sp>
+      <p:sp>
+        <p:nvSpPr>
+          <p:cNvPr id="169" name="Rectangle 168"/>
+          <p:cNvSpPr/>
+          <p:nvPr/>
+        </p:nvSpPr>
+        <p:spPr>
+          <a:xfrm>
+            <a:off x="438922" y="6008217"/>
+            <a:ext cx="2340922" cy="229209"/>
+          </a:xfrm>
+          <a:prstGeom prst="rect">
+            <a:avLst/>
+          </a:prstGeom>
+          <a:solidFill>
+            <a:srgbClr val="FFFFFF"/>
+          </a:solidFill>
+          <a:ln>
+            <a:noFill/>
+          </a:ln>
+          <a:effectLst/>
+        </p:spPr>
+        <p:style>
+          <a:lnRef idx="1">
+            <a:schemeClr val="accent1"/>
+          </a:lnRef>
+          <a:fillRef idx="3">
+            <a:schemeClr val="accent1"/>
+          </a:fillRef>
+          <a:effectRef idx="2">
+            <a:schemeClr val="accent1"/>
+          </a:effectRef>
+          <a:fontRef idx="minor">
+            <a:schemeClr val="lt1"/>
+          </a:fontRef>
+        </p:style>
+        <p:txBody>
+          <a:bodyPr rtlCol="0" anchor="ctr"/>
+          <a:lstStyle/>
+          <a:p>
+            <a:pPr algn="ctr"/>
+          </a:p>
+        </p:txBody>
+      </p:sp>
+      <p:sp>
+        <p:nvSpPr>
+          <p:cNvPr id="170" name="TextBox 169"/>
+          <p:cNvSpPr txBox="1"/>
+          <p:nvPr/>
+        </p:nvSpPr>
+        <p:spPr>
+          <a:xfrm>
+            <a:off x="512076" y="6008217"/>
+            <a:ext cx="2223876" cy="229209"/>
+          </a:xfrm>
+          <a:prstGeom prst="rect">
+            <a:avLst/>
+          </a:prstGeom>
+          <a:noFill/>
+        </p:spPr>
+        <p:txBody>
+          <a:bodyPr wrap="square" anchor="ctr" lIns="0" rIns="0" tIns="0" bIns="0">
+            <a:spAutoFit/>
+          </a:bodyPr>
+          <a:lstStyle/>
+          <a:p>
+            <a:pPr algn="l">
+              <a:lnSpc>
+                <a:spcPct val="110000"/>
+              </a:lnSpc>
+              <a:spcAft>
+                <a:spcPts val="0"/>
+              </a:spcAft>
+            </a:pPr>
+            <a:r>
+              <a:rPr sz="720" b="1" i="0">
+                <a:solidFill>
+                  <a:srgbClr val="314359"/>
+                </a:solidFill>
+                <a:latin typeface="Arial"/>
+              </a:rPr>
+              <a:t>Tempest</a:t>
+            </a:r>
+          </a:p>
+        </p:txBody>
+      </p:sp>
+      <p:sp>
+        <p:nvSpPr>
+          <p:cNvPr id="171" name="Rectangle 170"/>
+          <p:cNvSpPr/>
+          <p:nvPr/>
+        </p:nvSpPr>
+        <p:spPr>
+          <a:xfrm>
+            <a:off x="2779845" y="6008217"/>
+            <a:ext cx="1755691" cy="229209"/>
+          </a:xfrm>
+          <a:prstGeom prst="rect">
+            <a:avLst/>
+          </a:prstGeom>
+          <a:solidFill>
+            <a:srgbClr val="FFFFFF"/>
+          </a:solidFill>
+          <a:ln>
+            <a:noFill/>
+          </a:ln>
+          <a:effectLst/>
+        </p:spPr>
+        <p:style>
+          <a:lnRef idx="1">
+            <a:schemeClr val="accent1"/>
+          </a:lnRef>
+          <a:fillRef idx="3">
+            <a:schemeClr val="accent1"/>
+          </a:fillRef>
+          <a:effectRef idx="2">
+            <a:schemeClr val="accent1"/>
+          </a:effectRef>
+          <a:fontRef idx="minor">
+            <a:schemeClr val="lt1"/>
+          </a:fontRef>
+        </p:style>
+        <p:txBody>
+          <a:bodyPr rtlCol="0" anchor="ctr"/>
+          <a:lstStyle/>
+          <a:p>
+            <a:pPr algn="ctr"/>
+          </a:p>
+        </p:txBody>
+      </p:sp>
+      <p:sp>
+        <p:nvSpPr>
+          <p:cNvPr id="172" name="TextBox 171"/>
+          <p:cNvSpPr txBox="1"/>
+          <p:nvPr/>
+        </p:nvSpPr>
+        <p:spPr>
+          <a:xfrm>
+            <a:off x="2852999" y="6008217"/>
+            <a:ext cx="1638645" cy="229209"/>
+          </a:xfrm>
+          <a:prstGeom prst="rect">
+            <a:avLst/>
+          </a:prstGeom>
+          <a:noFill/>
+        </p:spPr>
+        <p:txBody>
+          <a:bodyPr wrap="square" anchor="ctr" lIns="0" rIns="0" tIns="0" bIns="0">
+            <a:spAutoFit/>
+          </a:bodyPr>
+          <a:lstStyle/>
+          <a:p>
+            <a:pPr algn="r">
+              <a:lnSpc>
+                <a:spcPct val="110000"/>
+              </a:lnSpc>
+              <a:spcAft>
+                <a:spcPts val="0"/>
+              </a:spcAft>
+            </a:pPr>
+            <a:r>
+              <a:rPr sz="720" b="0" i="0">
+                <a:solidFill>
+                  <a:srgbClr val="0E1620"/>
+                </a:solidFill>
+                <a:latin typeface="Arial"/>
+              </a:rPr>
+              <a:t>2018-2025</a:t>
+            </a:r>
+          </a:p>
+        </p:txBody>
+      </p:sp>
+      <p:sp>
+        <p:nvSpPr>
+          <p:cNvPr id="173" name="Rectangle 172"/>
+          <p:cNvSpPr/>
+          <p:nvPr/>
+        </p:nvSpPr>
+        <p:spPr>
+          <a:xfrm>
+            <a:off x="4535537" y="6008217"/>
+            <a:ext cx="1536230" cy="229209"/>
+          </a:xfrm>
+          <a:prstGeom prst="rect">
+            <a:avLst/>
+          </a:prstGeom>
+          <a:solidFill>
+            <a:srgbClr val="FFFFFF"/>
+          </a:solidFill>
+          <a:ln>
+            <a:noFill/>
+          </a:ln>
+          <a:effectLst/>
+        </p:spPr>
+        <p:style>
+          <a:lnRef idx="1">
+            <a:schemeClr val="accent1"/>
+          </a:lnRef>
+          <a:fillRef idx="3">
+            <a:schemeClr val="accent1"/>
+          </a:fillRef>
+          <a:effectRef idx="2">
+            <a:schemeClr val="accent1"/>
+          </a:effectRef>
+          <a:fontRef idx="minor">
+            <a:schemeClr val="lt1"/>
+          </a:fontRef>
+        </p:style>
+        <p:txBody>
+          <a:bodyPr rtlCol="0" anchor="ctr"/>
+          <a:lstStyle/>
+          <a:p>
+            <a:pPr algn="ctr"/>
+          </a:p>
+        </p:txBody>
+      </p:sp>
+      <p:sp>
+        <p:nvSpPr>
+          <p:cNvPr id="174" name="TextBox 173"/>
+          <p:cNvSpPr txBox="1"/>
+          <p:nvPr/>
+        </p:nvSpPr>
+        <p:spPr>
+          <a:xfrm>
+            <a:off x="4608691" y="6008217"/>
+            <a:ext cx="1419184" cy="229209"/>
+          </a:xfrm>
+          <a:prstGeom prst="rect">
+            <a:avLst/>
+          </a:prstGeom>
+          <a:noFill/>
+        </p:spPr>
+        <p:txBody>
+          <a:bodyPr wrap="square" anchor="ctr" lIns="0" rIns="0" tIns="0" bIns="0">
+            <a:spAutoFit/>
+          </a:bodyPr>
+          <a:lstStyle/>
+          <a:p>
+            <a:pPr algn="r">
+              <a:lnSpc>
+                <a:spcPct val="110000"/>
+              </a:lnSpc>
+              <a:spcAft>
+                <a:spcPts val="0"/>
+              </a:spcAft>
+            </a:pPr>
+            <a:r>
+              <a:rPr sz="720" b="0" i="0">
+                <a:solidFill>
+                  <a:srgbClr val="0E1620"/>
+                </a:solidFill>
+                <a:latin typeface="Arial"/>
+              </a:rPr>
+              <a:t>12%</a:t>
+            </a:r>
+          </a:p>
+        </p:txBody>
+      </p:sp>
+      <p:sp>
+        <p:nvSpPr>
+          <p:cNvPr id="175" name="Rectangle 174"/>
+          <p:cNvSpPr/>
+          <p:nvPr/>
+        </p:nvSpPr>
+        <p:spPr>
+          <a:xfrm>
+            <a:off x="6071767" y="6008217"/>
+            <a:ext cx="1463076" cy="229209"/>
+          </a:xfrm>
+          <a:prstGeom prst="rect">
+            <a:avLst/>
+          </a:prstGeom>
+          <a:solidFill>
+            <a:srgbClr val="FFFFFF"/>
+          </a:solidFill>
+          <a:ln>
+            <a:noFill/>
+          </a:ln>
+          <a:effectLst/>
+        </p:spPr>
+        <p:style>
+          <a:lnRef idx="1">
+            <a:schemeClr val="accent1"/>
+          </a:lnRef>
+          <a:fillRef idx="3">
+            <a:schemeClr val="accent1"/>
+          </a:fillRef>
+          <a:effectRef idx="2">
+            <a:schemeClr val="accent1"/>
+          </a:effectRef>
+          <a:fontRef idx="minor">
+            <a:schemeClr val="lt1"/>
+          </a:fontRef>
+        </p:style>
+        <p:txBody>
+          <a:bodyPr rtlCol="0" anchor="ctr"/>
+          <a:lstStyle/>
+          <a:p>
+            <a:pPr algn="ctr"/>
+          </a:p>
+        </p:txBody>
+      </p:sp>
+      <p:sp>
+        <p:nvSpPr>
+          <p:cNvPr id="176" name="TextBox 175"/>
+          <p:cNvSpPr txBox="1"/>
+          <p:nvPr/>
+        </p:nvSpPr>
+        <p:spPr>
+          <a:xfrm>
+            <a:off x="6144921" y="6008217"/>
+            <a:ext cx="1346030" cy="229209"/>
+          </a:xfrm>
+          <a:prstGeom prst="rect">
+            <a:avLst/>
+          </a:prstGeom>
+          <a:noFill/>
+        </p:spPr>
+        <p:txBody>
+          <a:bodyPr wrap="square" anchor="ctr" lIns="0" rIns="0" tIns="0" bIns="0">
+            <a:spAutoFit/>
+          </a:bodyPr>
+          <a:lstStyle/>
+          <a:p>
+            <a:pPr algn="r">
+              <a:lnSpc>
+                <a:spcPct val="110000"/>
+              </a:lnSpc>
+              <a:spcAft>
+                <a:spcPts val="0"/>
+              </a:spcAft>
+            </a:pPr>
+            <a:r>
+              <a:rPr sz="720" b="0" i="0">
+                <a:solidFill>
+                  <a:srgbClr val="0E1620"/>
+                </a:solidFill>
+                <a:latin typeface="Arial"/>
+              </a:rPr>
+              <a:t>1.2×</a:t>
+            </a:r>
+          </a:p>
+        </p:txBody>
+      </p:sp>
+      <p:sp>
+        <p:nvSpPr>
+          <p:cNvPr id="177" name="Rectangle 176"/>
+          <p:cNvSpPr/>
+          <p:nvPr/>
+        </p:nvSpPr>
+        <p:spPr>
+          <a:xfrm>
+            <a:off x="7534844" y="6008217"/>
+            <a:ext cx="1777638" cy="229209"/>
+          </a:xfrm>
+          <a:prstGeom prst="rect">
+            <a:avLst/>
+          </a:prstGeom>
+          <a:solidFill>
+            <a:srgbClr val="FFFFFF"/>
+          </a:solidFill>
+          <a:ln>
+            <a:noFill/>
+          </a:ln>
+          <a:effectLst/>
+        </p:spPr>
+        <p:style>
+          <a:lnRef idx="1">
+            <a:schemeClr val="accent1"/>
+          </a:lnRef>
+          <a:fillRef idx="3">
+            <a:schemeClr val="accent1"/>
+          </a:fillRef>
+          <a:effectRef idx="2">
+            <a:schemeClr val="accent1"/>
+          </a:effectRef>
+          <a:fontRef idx="minor">
+            <a:schemeClr val="lt1"/>
+          </a:fontRef>
+        </p:style>
+        <p:txBody>
+          <a:bodyPr rtlCol="0" anchor="ctr"/>
+          <a:lstStyle/>
+          <a:p>
+            <a:pPr algn="ctr"/>
+          </a:p>
+        </p:txBody>
+      </p:sp>
+      <p:sp>
+        <p:nvSpPr>
+          <p:cNvPr id="178" name="TextBox 177"/>
+          <p:cNvSpPr txBox="1"/>
+          <p:nvPr/>
+        </p:nvSpPr>
+        <p:spPr>
+          <a:xfrm>
+            <a:off x="7607998" y="6008217"/>
+            <a:ext cx="1660591" cy="229209"/>
+          </a:xfrm>
+          <a:prstGeom prst="rect">
+            <a:avLst/>
+          </a:prstGeom>
+          <a:noFill/>
+        </p:spPr>
+        <p:txBody>
+          <a:bodyPr wrap="square" anchor="ctr" lIns="0" rIns="0" tIns="0" bIns="0">
+            <a:spAutoFit/>
+          </a:bodyPr>
+          <a:lstStyle/>
+          <a:p>
+            <a:pPr algn="r">
+              <a:lnSpc>
+                <a:spcPct val="110000"/>
+              </a:lnSpc>
+              <a:spcAft>
+                <a:spcPts val="0"/>
+              </a:spcAft>
+            </a:pPr>
+            <a:r>
+              <a:rPr sz="720" b="0" i="0">
+                <a:solidFill>
+                  <a:srgbClr val="0E1620"/>
+                </a:solidFill>
+                <a:latin typeface="Arial"/>
+              </a:rPr>
+              <a:t>+3%</a:t>
+            </a:r>
+          </a:p>
+        </p:txBody>
+      </p:sp>
+      <p:sp>
+        <p:nvSpPr>
+          <p:cNvPr id="179" name="Rectangle 178"/>
+          <p:cNvSpPr/>
+          <p:nvPr/>
+        </p:nvSpPr>
+        <p:spPr>
+          <a:xfrm>
+            <a:off x="438922" y="6237427"/>
+            <a:ext cx="2340922" cy="229209"/>
+          </a:xfrm>
+          <a:prstGeom prst="rect">
+            <a:avLst/>
+          </a:prstGeom>
+          <a:solidFill>
+            <a:srgbClr val="F6F7F9"/>
+          </a:solidFill>
+          <a:ln>
+            <a:noFill/>
+          </a:ln>
+          <a:effectLst/>
+        </p:spPr>
+        <p:style>
+          <a:lnRef idx="1">
+            <a:schemeClr val="accent1"/>
+          </a:lnRef>
+          <a:fillRef idx="3">
+            <a:schemeClr val="accent1"/>
+          </a:fillRef>
+          <a:effectRef idx="2">
+            <a:schemeClr val="accent1"/>
+          </a:effectRef>
+          <a:fontRef idx="minor">
+            <a:schemeClr val="lt1"/>
+          </a:fontRef>
+        </p:style>
+        <p:txBody>
+          <a:bodyPr rtlCol="0" anchor="ctr"/>
+          <a:lstStyle/>
+          <a:p>
+            <a:pPr algn="ctr"/>
+          </a:p>
+        </p:txBody>
+      </p:sp>
+      <p:sp>
+        <p:nvSpPr>
+          <p:cNvPr id="180" name="TextBox 179"/>
+          <p:cNvSpPr txBox="1"/>
+          <p:nvPr/>
+        </p:nvSpPr>
+        <p:spPr>
+          <a:xfrm>
+            <a:off x="512076" y="6237427"/>
+            <a:ext cx="2223876" cy="229209"/>
+          </a:xfrm>
+          <a:prstGeom prst="rect">
+            <a:avLst/>
+          </a:prstGeom>
+          <a:noFill/>
+        </p:spPr>
+        <p:txBody>
+          <a:bodyPr wrap="square" anchor="ctr" lIns="0" rIns="0" tIns="0" bIns="0">
+            <a:spAutoFit/>
+          </a:bodyPr>
+          <a:lstStyle/>
+          <a:p>
+            <a:pPr algn="l">
+              <a:lnSpc>
+                <a:spcPct val="110000"/>
+              </a:lnSpc>
+              <a:spcAft>
+                <a:spcPts val="0"/>
+              </a:spcAft>
+            </a:pPr>
+            <a:r>
+              <a:rPr sz="720" b="1" i="0">
+                <a:solidFill>
+                  <a:srgbClr val="314359"/>
+                </a:solidFill>
+                <a:latin typeface="Arial"/>
+              </a:rPr>
+              <a:t>Actic</a:t>
+            </a:r>
+          </a:p>
+        </p:txBody>
+      </p:sp>
+      <p:sp>
+        <p:nvSpPr>
+          <p:cNvPr id="181" name="Rectangle 180"/>
+          <p:cNvSpPr/>
+          <p:nvPr/>
+        </p:nvSpPr>
+        <p:spPr>
+          <a:xfrm>
+            <a:off x="2779845" y="6237427"/>
+            <a:ext cx="1755691" cy="229209"/>
+          </a:xfrm>
+          <a:prstGeom prst="rect">
+            <a:avLst/>
+          </a:prstGeom>
+          <a:solidFill>
+            <a:srgbClr val="F6F7F9"/>
+          </a:solidFill>
+          <a:ln>
+            <a:noFill/>
+          </a:ln>
+          <a:effectLst/>
+        </p:spPr>
+        <p:style>
+          <a:lnRef idx="1">
+            <a:schemeClr val="accent1"/>
+          </a:lnRef>
+          <a:fillRef idx="3">
+            <a:schemeClr val="accent1"/>
+          </a:fillRef>
+          <a:effectRef idx="2">
+            <a:schemeClr val="accent1"/>
+          </a:effectRef>
+          <a:fontRef idx="minor">
+            <a:schemeClr val="lt1"/>
+          </a:fontRef>
+        </p:style>
+        <p:txBody>
+          <a:bodyPr rtlCol="0" anchor="ctr"/>
+          <a:lstStyle/>
+          <a:p>
+            <a:pPr algn="ctr"/>
+          </a:p>
+        </p:txBody>
+      </p:sp>
+      <p:sp>
+        <p:nvSpPr>
+          <p:cNvPr id="182" name="TextBox 181"/>
+          <p:cNvSpPr txBox="1"/>
+          <p:nvPr/>
+        </p:nvSpPr>
+        <p:spPr>
+          <a:xfrm>
+            <a:off x="2852999" y="6237427"/>
+            <a:ext cx="1638645" cy="229209"/>
+          </a:xfrm>
+          <a:prstGeom prst="rect">
+            <a:avLst/>
+          </a:prstGeom>
+          <a:noFill/>
+        </p:spPr>
+        <p:txBody>
+          <a:bodyPr wrap="square" anchor="ctr" lIns="0" rIns="0" tIns="0" bIns="0">
+            <a:spAutoFit/>
+          </a:bodyPr>
+          <a:lstStyle/>
+          <a:p>
+            <a:pPr algn="r">
+              <a:lnSpc>
+                <a:spcPct val="110000"/>
+              </a:lnSpc>
+              <a:spcAft>
+                <a:spcPts val="0"/>
+              </a:spcAft>
+            </a:pPr>
+            <a:r>
+              <a:rPr sz="720" b="0" i="0">
+                <a:solidFill>
+                  <a:srgbClr val="0E1620"/>
+                </a:solidFill>
+                <a:latin typeface="Arial"/>
+              </a:rPr>
+              <a:t>2017-2023</a:t>
+            </a:r>
+          </a:p>
+        </p:txBody>
+      </p:sp>
+      <p:sp>
+        <p:nvSpPr>
+          <p:cNvPr id="183" name="Rectangle 182"/>
+          <p:cNvSpPr/>
+          <p:nvPr/>
+        </p:nvSpPr>
+        <p:spPr>
+          <a:xfrm>
+            <a:off x="4535537" y="6237427"/>
+            <a:ext cx="1536230" cy="229209"/>
+          </a:xfrm>
+          <a:prstGeom prst="rect">
+            <a:avLst/>
+          </a:prstGeom>
+          <a:solidFill>
+            <a:srgbClr val="F6F7F9"/>
+          </a:solidFill>
+          <a:ln>
+            <a:noFill/>
+          </a:ln>
+          <a:effectLst/>
+        </p:spPr>
+        <p:style>
+          <a:lnRef idx="1">
+            <a:schemeClr val="accent1"/>
+          </a:lnRef>
+          <a:fillRef idx="3">
+            <a:schemeClr val="accent1"/>
+          </a:fillRef>
+          <a:effectRef idx="2">
+            <a:schemeClr val="accent1"/>
+          </a:effectRef>
+          <a:fontRef idx="minor">
+            <a:schemeClr val="lt1"/>
+          </a:fontRef>
+        </p:style>
+        <p:txBody>
+          <a:bodyPr rtlCol="0" anchor="ctr"/>
+          <a:lstStyle/>
+          <a:p>
+            <a:pPr algn="ctr"/>
+          </a:p>
+        </p:txBody>
+      </p:sp>
+      <p:sp>
+        <p:nvSpPr>
+          <p:cNvPr id="184" name="TextBox 183"/>
+          <p:cNvSpPr txBox="1"/>
+          <p:nvPr/>
+        </p:nvSpPr>
+        <p:spPr>
+          <a:xfrm>
+            <a:off x="4608691" y="6237427"/>
+            <a:ext cx="1419184" cy="229209"/>
+          </a:xfrm>
+          <a:prstGeom prst="rect">
+            <a:avLst/>
+          </a:prstGeom>
+          <a:noFill/>
+        </p:spPr>
+        <p:txBody>
+          <a:bodyPr wrap="square" anchor="ctr" lIns="0" rIns="0" tIns="0" bIns="0">
+            <a:spAutoFit/>
+          </a:bodyPr>
+          <a:lstStyle/>
+          <a:p>
+            <a:pPr algn="r">
+              <a:lnSpc>
+                <a:spcPct val="110000"/>
+              </a:lnSpc>
+              <a:spcAft>
+                <a:spcPts val="0"/>
+              </a:spcAft>
+            </a:pPr>
+            <a:r>
+              <a:rPr sz="720" b="0" i="1">
+                <a:solidFill>
+                  <a:srgbClr val="556A83"/>
+                </a:solidFill>
+                <a:latin typeface="Arial"/>
+              </a:rPr>
+              <a:t>-27%</a:t>
+            </a:r>
+          </a:p>
+        </p:txBody>
+      </p:sp>
+      <p:sp>
+        <p:nvSpPr>
+          <p:cNvPr id="185" name="Rectangle 184"/>
+          <p:cNvSpPr/>
+          <p:nvPr/>
+        </p:nvSpPr>
+        <p:spPr>
+          <a:xfrm>
+            <a:off x="6071767" y="6237427"/>
+            <a:ext cx="1463076" cy="229209"/>
+          </a:xfrm>
+          <a:prstGeom prst="rect">
+            <a:avLst/>
+          </a:prstGeom>
+          <a:solidFill>
+            <a:srgbClr val="F6F7F9"/>
+          </a:solidFill>
+          <a:ln>
+            <a:noFill/>
+          </a:ln>
+          <a:effectLst/>
+        </p:spPr>
+        <p:style>
+          <a:lnRef idx="1">
+            <a:schemeClr val="accent1"/>
+          </a:lnRef>
+          <a:fillRef idx="3">
+            <a:schemeClr val="accent1"/>
+          </a:fillRef>
+          <a:effectRef idx="2">
+            <a:schemeClr val="accent1"/>
+          </a:effectRef>
+          <a:fontRef idx="minor">
+            <a:schemeClr val="lt1"/>
+          </a:fontRef>
+        </p:style>
+        <p:txBody>
+          <a:bodyPr rtlCol="0" anchor="ctr"/>
+          <a:lstStyle/>
+          <a:p>
+            <a:pPr algn="ctr"/>
+          </a:p>
+        </p:txBody>
+      </p:sp>
+      <p:sp>
+        <p:nvSpPr>
+          <p:cNvPr id="186" name="TextBox 185"/>
+          <p:cNvSpPr txBox="1"/>
+          <p:nvPr/>
+        </p:nvSpPr>
+        <p:spPr>
+          <a:xfrm>
+            <a:off x="6144921" y="6237427"/>
+            <a:ext cx="1346030" cy="229209"/>
+          </a:xfrm>
+          <a:prstGeom prst="rect">
+            <a:avLst/>
+          </a:prstGeom>
+          <a:noFill/>
+        </p:spPr>
+        <p:txBody>
+          <a:bodyPr wrap="square" anchor="ctr" lIns="0" rIns="0" tIns="0" bIns="0">
+            <a:spAutoFit/>
+          </a:bodyPr>
+          <a:lstStyle/>
+          <a:p>
+            <a:pPr algn="r">
+              <a:lnSpc>
+                <a:spcPct val="110000"/>
+              </a:lnSpc>
+              <a:spcAft>
+                <a:spcPts val="0"/>
+              </a:spcAft>
+            </a:pPr>
+            <a:r>
+              <a:rPr sz="720" b="0" i="1">
+                <a:solidFill>
+                  <a:srgbClr val="556A83"/>
+                </a:solidFill>
+                <a:latin typeface="Arial"/>
+              </a:rPr>
+              <a:t>0.4×</a:t>
+            </a:r>
+          </a:p>
+        </p:txBody>
+      </p:sp>
+      <p:sp>
+        <p:nvSpPr>
+          <p:cNvPr id="187" name="Rectangle 186"/>
+          <p:cNvSpPr/>
+          <p:nvPr/>
+        </p:nvSpPr>
+        <p:spPr>
+          <a:xfrm>
+            <a:off x="7534844" y="6237427"/>
+            <a:ext cx="1777638" cy="229209"/>
+          </a:xfrm>
+          <a:prstGeom prst="rect">
+            <a:avLst/>
+          </a:prstGeom>
+          <a:solidFill>
+            <a:srgbClr val="F6F7F9"/>
+          </a:solidFill>
+          <a:ln>
+            <a:noFill/>
+          </a:ln>
+          <a:effectLst/>
+        </p:spPr>
+        <p:style>
+          <a:lnRef idx="1">
+            <a:schemeClr val="accent1"/>
+          </a:lnRef>
+          <a:fillRef idx="3">
+            <a:schemeClr val="accent1"/>
+          </a:fillRef>
+          <a:effectRef idx="2">
+            <a:schemeClr val="accent1"/>
+          </a:effectRef>
+          <a:fontRef idx="minor">
+            <a:schemeClr val="lt1"/>
+          </a:fontRef>
+        </p:style>
+        <p:txBody>
+          <a:bodyPr rtlCol="0" anchor="ctr"/>
+          <a:lstStyle/>
+          <a:p>
+            <a:pPr algn="ctr"/>
+          </a:p>
+        </p:txBody>
+      </p:sp>
+      <p:sp>
+        <p:nvSpPr>
+          <p:cNvPr id="188" name="TextBox 187"/>
+          <p:cNvSpPr txBox="1"/>
+          <p:nvPr/>
+        </p:nvSpPr>
+        <p:spPr>
+          <a:xfrm>
+            <a:off x="7607998" y="6237427"/>
+            <a:ext cx="1660591" cy="229209"/>
+          </a:xfrm>
+          <a:prstGeom prst="rect">
+            <a:avLst/>
+          </a:prstGeom>
+          <a:noFill/>
+        </p:spPr>
+        <p:txBody>
+          <a:bodyPr wrap="square" anchor="ctr" lIns="0" rIns="0" tIns="0" bIns="0">
+            <a:spAutoFit/>
+          </a:bodyPr>
+          <a:lstStyle/>
+          <a:p>
+            <a:pPr algn="r">
+              <a:lnSpc>
+                <a:spcPct val="110000"/>
+              </a:lnSpc>
+              <a:spcAft>
+                <a:spcPts val="0"/>
+              </a:spcAft>
+            </a:pPr>
+            <a:r>
+              <a:rPr sz="720" b="0" i="1">
+                <a:solidFill>
+                  <a:srgbClr val="556A83"/>
+                </a:solidFill>
+                <a:latin typeface="Arial"/>
+              </a:rPr>
+              <a:t>-33%</a:t>
+            </a:r>
+          </a:p>
+        </p:txBody>
+      </p:sp>
+      <p:sp>
+        <p:nvSpPr>
+          <p:cNvPr id="189" name="TextBox 188"/>
+          <p:cNvSpPr txBox="1"/>
+          <p:nvPr/>
+        </p:nvSpPr>
+        <p:spPr>
+          <a:xfrm>
+            <a:off x="438922" y="6544665"/>
+            <a:ext cx="8851613" cy="390144"/>
+          </a:xfrm>
+          <a:prstGeom prst="rect">
+            <a:avLst/>
+          </a:prstGeom>
+          <a:noFill/>
+        </p:spPr>
+        <p:txBody>
+          <a:bodyPr wrap="square" anchor="t" lIns="0" rIns="0" tIns="0" bIns="0">
+            <a:spAutoFit/>
+          </a:bodyPr>
+          <a:lstStyle/>
+          <a:p>
+            <a:pPr algn="l">
+              <a:lnSpc>
+                <a:spcPct val="110000"/>
+              </a:lnSpc>
+              <a:spcAft>
+                <a:spcPts val="0"/>
+              </a:spcAft>
+            </a:pPr>
+            <a:r>
+              <a:rPr sz="600" b="0" i="1">
+                <a:solidFill>
+                  <a:srgbClr val="556A83"/>
+                </a:solidFill>
+                <a:latin typeface="Arial"/>
+              </a:rPr>
+              <a:t>Gross deal-level figures, AIP Fund II, to 2025, ranked by money multiple; “n.m.” where holding periods are too short to annualise. Past performance is not a guide to future returns.</a:t>
             </a:r>
           </a:p>
         </p:txBody>
@@ -11077,7 +14431,7 @@
                 </a:solidFill>
                 <a:latin typeface="Times New Roman"/>
               </a:rPr>
-              <a:t>Two decades of net returns, independently validated</a:t>
+              <a:t>£1 has become ~£18, net — versus ~£3 for the index</a:t>
             </a:r>
           </a:p>
         </p:txBody>
@@ -11119,7 +14473,7 @@
                 </a:solidFill>
                 <a:latin typeface="Arial"/>
               </a:rPr>
-              <a:t>A 20-year record built on operating improvement — reconciled and audited by tier-one institutions.</a:t>
+              <a:t>Twenty years of compounding from operating improvement — reconciled and audited by tier-one institutions.</a:t>
             </a:r>
           </a:p>
         </p:txBody>
@@ -11166,50 +14520,30 @@
           </a:p>
         </p:txBody>
       </p:sp>
-      <p:sp>
-        <p:nvSpPr>
-          <p:cNvPr id="9" name="Rectangle 8"/>
-          <p:cNvSpPr/>
-          <p:nvPr/>
-        </p:nvSpPr>
-        <p:spPr>
-          <a:xfrm>
-            <a:off x="438922" y="2340864"/>
-            <a:ext cx="2136091" cy="1219200"/>
-          </a:xfrm>
-          <a:prstGeom prst="rect">
-            <a:avLst/>
-          </a:prstGeom>
-          <a:solidFill>
-            <a:srgbClr val="F6F7F9"/>
-          </a:solidFill>
-          <a:ln>
-            <a:noFill/>
-          </a:ln>
-          <a:effectLst/>
-        </p:spPr>
-        <p:style>
-          <a:lnRef idx="1">
-            <a:schemeClr val="accent1"/>
-          </a:lnRef>
-          <a:fillRef idx="3">
-            <a:schemeClr val="accent1"/>
-          </a:fillRef>
-          <a:effectRef idx="2">
-            <a:schemeClr val="accent1"/>
-          </a:effectRef>
-          <a:fontRef idx="minor">
-            <a:schemeClr val="lt1"/>
-          </a:fontRef>
-        </p:style>
-        <p:txBody>
-          <a:bodyPr rtlCol="0" anchor="ctr"/>
-          <a:lstStyle/>
-          <a:p>
-            <a:pPr algn="ctr"/>
-          </a:p>
-        </p:txBody>
-      </p:sp>
+      <p:pic>
+        <p:nvPicPr>
+          <p:cNvPr id="9" name="Picture 8" descr="trust_growth.png"/>
+          <p:cNvPicPr>
+            <a:picLocks noChangeAspect="1"/>
+          </p:cNvPicPr>
+          <p:nvPr/>
+        </p:nvPicPr>
+        <p:blipFill>
+          <a:blip r:embed="rId3"/>
+          <a:stretch>
+            <a:fillRect/>
+          </a:stretch>
+        </p:blipFill>
+        <p:spPr>
+          <a:xfrm>
+            <a:off x="329192" y="2438400"/>
+            <a:ext cx="5047614" cy="2751977"/>
+          </a:xfrm>
+          <a:prstGeom prst="rect">
+            <a:avLst/>
+          </a:prstGeom>
+        </p:spPr>
+      </p:pic>
       <p:sp>
         <p:nvSpPr>
           <p:cNvPr id="10" name="TextBox 9"/>
@@ -11218,21 +14552,21 @@
         </p:nvSpPr>
         <p:spPr>
           <a:xfrm>
-            <a:off x="438922" y="2496921"/>
-            <a:ext cx="2136091" cy="585216"/>
-          </a:xfrm>
-          <a:prstGeom prst="rect">
-            <a:avLst/>
-          </a:prstGeom>
-          <a:noFill/>
-        </p:spPr>
-        <p:txBody>
-          <a:bodyPr wrap="square" anchor="ctr" lIns="0" rIns="0" tIns="0" bIns="0">
-            <a:spAutoFit/>
-          </a:bodyPr>
-          <a:lstStyle/>
-          <a:p>
-            <a:pPr algn="ctr">
+            <a:off x="5559691" y="2487168"/>
+            <a:ext cx="3657691" cy="487680"/>
+          </a:xfrm>
+          <a:prstGeom prst="rect">
+            <a:avLst/>
+          </a:prstGeom>
+          <a:noFill/>
+        </p:spPr>
+        <p:txBody>
+          <a:bodyPr wrap="square" anchor="t" lIns="0" rIns="0" tIns="0" bIns="0">
+            <a:spAutoFit/>
+          </a:bodyPr>
+          <a:lstStyle/>
+          <a:p>
+            <a:pPr algn="l">
               <a:lnSpc>
                 <a:spcPct val="110000"/>
               </a:lnSpc>
@@ -11241,7 +14575,7 @@
               </a:spcAft>
             </a:pPr>
             <a:r>
-              <a:rPr sz="2160" b="0" i="0" spc="-81">
+              <a:rPr sz="2080" b="0" i="0" spc="-78">
                 <a:solidFill>
                   <a:srgbClr val="314359"/>
                 </a:solidFill>
@@ -11260,8 +14594,8 @@
         </p:nvSpPr>
         <p:spPr>
           <a:xfrm>
-            <a:off x="512076" y="3121152"/>
-            <a:ext cx="1989784" cy="390144"/>
+            <a:off x="5559691" y="2945587"/>
+            <a:ext cx="3657691" cy="312115"/>
           </a:xfrm>
           <a:prstGeom prst="rect">
             <a:avLst/>
@@ -11274,16 +14608,16 @@
           </a:bodyPr>
           <a:lstStyle/>
           <a:p>
-            <a:pPr algn="ctr">
-              <a:lnSpc>
-                <a:spcPct val="105000"/>
+            <a:pPr algn="l">
+              <a:lnSpc>
+                <a:spcPct val="110000"/>
               </a:lnSpc>
               <a:spcAft>
                 <a:spcPts val="0"/>
               </a:spcAft>
             </a:pPr>
             <a:r>
-              <a:rPr sz="760" b="0" i="0">
+              <a:rPr sz="880" b="0" i="0">
                 <a:solidFill>
                   <a:srgbClr val="556A83"/>
                 </a:solidFill>
@@ -11296,45 +14630,43 @@
       </p:sp>
       <p:sp>
         <p:nvSpPr>
-          <p:cNvPr id="12" name="Rectangle 11"/>
-          <p:cNvSpPr/>
-          <p:nvPr/>
-        </p:nvSpPr>
-        <p:spPr>
-          <a:xfrm>
-            <a:off x="2684745" y="2340864"/>
-            <a:ext cx="2136091" cy="1219200"/>
-          </a:xfrm>
-          <a:prstGeom prst="rect">
-            <a:avLst/>
-          </a:prstGeom>
-          <a:solidFill>
-            <a:srgbClr val="F6F7F9"/>
-          </a:solidFill>
-          <a:ln>
-            <a:noFill/>
-          </a:ln>
-          <a:effectLst/>
-        </p:spPr>
-        <p:style>
-          <a:lnRef idx="1">
-            <a:schemeClr val="accent1"/>
-          </a:lnRef>
-          <a:fillRef idx="3">
-            <a:schemeClr val="accent1"/>
-          </a:fillRef>
-          <a:effectRef idx="2">
-            <a:schemeClr val="accent1"/>
-          </a:effectRef>
-          <a:fontRef idx="minor">
-            <a:schemeClr val="lt1"/>
-          </a:fontRef>
-        </p:style>
-        <p:txBody>
-          <a:bodyPr rtlCol="0" anchor="ctr"/>
-          <a:lstStyle/>
-          <a:p>
-            <a:pPr algn="ctr"/>
+          <p:cNvPr id="12" name="TextBox 11"/>
+          <p:cNvSpPr txBox="1"/>
+          <p:nvPr/>
+        </p:nvSpPr>
+        <p:spPr>
+          <a:xfrm>
+            <a:off x="5559691" y="3325977"/>
+            <a:ext cx="3657691" cy="487680"/>
+          </a:xfrm>
+          <a:prstGeom prst="rect">
+            <a:avLst/>
+          </a:prstGeom>
+          <a:noFill/>
+        </p:spPr>
+        <p:txBody>
+          <a:bodyPr wrap="square" anchor="t" lIns="0" rIns="0" tIns="0" bIns="0">
+            <a:spAutoFit/>
+          </a:bodyPr>
+          <a:lstStyle/>
+          <a:p>
+            <a:pPr algn="l">
+              <a:lnSpc>
+                <a:spcPct val="110000"/>
+              </a:lnSpc>
+              <a:spcAft>
+                <a:spcPts val="0"/>
+              </a:spcAft>
+            </a:pPr>
+            <a:r>
+              <a:rPr sz="2080" b="0" i="0" spc="-78">
+                <a:solidFill>
+                  <a:srgbClr val="314359"/>
+                </a:solidFill>
+                <a:latin typeface="Times New Roman"/>
+              </a:rPr>
+              <a:t>+10 pts</a:t>
+            </a:r>
           </a:p>
         </p:txBody>
       </p:sp>
@@ -11346,21 +14678,21 @@
         </p:nvSpPr>
         <p:spPr>
           <a:xfrm>
-            <a:off x="2684745" y="2496921"/>
-            <a:ext cx="2136091" cy="585216"/>
-          </a:xfrm>
-          <a:prstGeom prst="rect">
-            <a:avLst/>
-          </a:prstGeom>
-          <a:noFill/>
-        </p:spPr>
-        <p:txBody>
-          <a:bodyPr wrap="square" anchor="ctr" lIns="0" rIns="0" tIns="0" bIns="0">
-            <a:spAutoFit/>
-          </a:bodyPr>
-          <a:lstStyle/>
-          <a:p>
-            <a:pPr algn="ctr">
+            <a:off x="5559691" y="3784396"/>
+            <a:ext cx="3657691" cy="312115"/>
+          </a:xfrm>
+          <a:prstGeom prst="rect">
+            <a:avLst/>
+          </a:prstGeom>
+          <a:noFill/>
+        </p:spPr>
+        <p:txBody>
+          <a:bodyPr wrap="square" anchor="t" lIns="0" rIns="0" tIns="0" bIns="0">
+            <a:spAutoFit/>
+          </a:bodyPr>
+          <a:lstStyle/>
+          <a:p>
+            <a:pPr algn="l">
               <a:lnSpc>
                 <a:spcPct val="110000"/>
               </a:lnSpc>
@@ -11369,27 +14701,69 @@
               </a:spcAft>
             </a:pPr>
             <a:r>
-              <a:rPr sz="2160" b="0" i="0" spc="-81">
+              <a:rPr sz="880" b="0" i="0">
+                <a:solidFill>
+                  <a:srgbClr val="556A83"/>
+                </a:solidFill>
+                <a:latin typeface="Arial"/>
+              </a:rPr>
+              <a:t>a year vs the index, net</a:t>
+            </a:r>
+          </a:p>
+        </p:txBody>
+      </p:sp>
+      <p:sp>
+        <p:nvSpPr>
+          <p:cNvPr id="14" name="TextBox 13"/>
+          <p:cNvSpPr txBox="1"/>
+          <p:nvPr/>
+        </p:nvSpPr>
+        <p:spPr>
+          <a:xfrm>
+            <a:off x="5559691" y="4164787"/>
+            <a:ext cx="3657691" cy="487680"/>
+          </a:xfrm>
+          <a:prstGeom prst="rect">
+            <a:avLst/>
+          </a:prstGeom>
+          <a:noFill/>
+        </p:spPr>
+        <p:txBody>
+          <a:bodyPr wrap="square" anchor="t" lIns="0" rIns="0" tIns="0" bIns="0">
+            <a:spAutoFit/>
+          </a:bodyPr>
+          <a:lstStyle/>
+          <a:p>
+            <a:pPr algn="l">
+              <a:lnSpc>
+                <a:spcPct val="110000"/>
+              </a:lnSpc>
+              <a:spcAft>
+                <a:spcPts val="0"/>
+              </a:spcAft>
+            </a:pPr>
+            <a:r>
+              <a:rPr sz="2080" b="0" i="0" spc="-78">
                 <a:solidFill>
                   <a:srgbClr val="314359"/>
                 </a:solidFill>
                 <a:latin typeface="Times New Roman"/>
               </a:rPr>
-              <a:t>+10 pts</a:t>
-            </a:r>
-          </a:p>
-        </p:txBody>
-      </p:sp>
-      <p:sp>
-        <p:nvSpPr>
-          <p:cNvPr id="14" name="TextBox 13"/>
-          <p:cNvSpPr txBox="1"/>
-          <p:nvPr/>
-        </p:nvSpPr>
-        <p:spPr>
-          <a:xfrm>
-            <a:off x="2757899" y="3121152"/>
-            <a:ext cx="1989784" cy="390144"/>
+              <a:t>0%</a:t>
+            </a:r>
+          </a:p>
+        </p:txBody>
+      </p:sp>
+      <p:sp>
+        <p:nvSpPr>
+          <p:cNvPr id="15" name="TextBox 14"/>
+          <p:cNvSpPr txBox="1"/>
+          <p:nvPr/>
+        </p:nvSpPr>
+        <p:spPr>
+          <a:xfrm>
+            <a:off x="5559691" y="4623206"/>
+            <a:ext cx="3657691" cy="312115"/>
           </a:xfrm>
           <a:prstGeom prst="rect">
             <a:avLst/>
@@ -11402,67 +14776,23 @@
           </a:bodyPr>
           <a:lstStyle/>
           <a:p>
-            <a:pPr algn="ctr">
-              <a:lnSpc>
-                <a:spcPct val="105000"/>
+            <a:pPr algn="l">
+              <a:lnSpc>
+                <a:spcPct val="110000"/>
               </a:lnSpc>
               <a:spcAft>
                 <a:spcPts val="0"/>
               </a:spcAft>
             </a:pPr>
             <a:r>
-              <a:rPr sz="760" b="0" i="0">
+              <a:rPr sz="880" b="0" i="0">
                 <a:solidFill>
                   <a:srgbClr val="556A83"/>
                 </a:solidFill>
                 <a:latin typeface="Arial"/>
               </a:rPr>
-              <a:t>a year vs the index, net</a:t>
-            </a:r>
-          </a:p>
-        </p:txBody>
-      </p:sp>
-      <p:sp>
-        <p:nvSpPr>
-          <p:cNvPr id="15" name="Rectangle 14"/>
-          <p:cNvSpPr/>
-          <p:nvPr/>
-        </p:nvSpPr>
-        <p:spPr>
-          <a:xfrm>
-            <a:off x="4930568" y="2340864"/>
-            <a:ext cx="2136091" cy="1219200"/>
-          </a:xfrm>
-          <a:prstGeom prst="rect">
-            <a:avLst/>
-          </a:prstGeom>
-          <a:solidFill>
-            <a:srgbClr val="F6F7F9"/>
-          </a:solidFill>
-          <a:ln>
-            <a:noFill/>
-          </a:ln>
-          <a:effectLst/>
-        </p:spPr>
-        <p:style>
-          <a:lnRef idx="1">
-            <a:schemeClr val="accent1"/>
-          </a:lnRef>
-          <a:fillRef idx="3">
-            <a:schemeClr val="accent1"/>
-          </a:fillRef>
-          <a:effectRef idx="2">
-            <a:schemeClr val="accent1"/>
-          </a:effectRef>
-          <a:fontRef idx="minor">
-            <a:schemeClr val="lt1"/>
-          </a:fontRef>
-        </p:style>
-        <p:txBody>
-          <a:bodyPr rtlCol="0" anchor="ctr"/>
-          <a:lstStyle/>
-          <a:p>
-            <a:pPr algn="ctr"/>
+              <a:t>investor loss over a holding period</a:t>
+            </a:r>
           </a:p>
         </p:txBody>
       </p:sp>
@@ -11474,21 +14804,21 @@
         </p:nvSpPr>
         <p:spPr>
           <a:xfrm>
-            <a:off x="4930568" y="2496921"/>
-            <a:ext cx="2136091" cy="585216"/>
-          </a:xfrm>
-          <a:prstGeom prst="rect">
-            <a:avLst/>
-          </a:prstGeom>
-          <a:noFill/>
-        </p:spPr>
-        <p:txBody>
-          <a:bodyPr wrap="square" anchor="ctr" lIns="0" rIns="0" tIns="0" bIns="0">
-            <a:spAutoFit/>
-          </a:bodyPr>
-          <a:lstStyle/>
-          <a:p>
-            <a:pPr algn="ctr">
+            <a:off x="5559691" y="5003596"/>
+            <a:ext cx="3657691" cy="487680"/>
+          </a:xfrm>
+          <a:prstGeom prst="rect">
+            <a:avLst/>
+          </a:prstGeom>
+          <a:noFill/>
+        </p:spPr>
+        <p:txBody>
+          <a:bodyPr wrap="square" anchor="t" lIns="0" rIns="0" tIns="0" bIns="0">
+            <a:spAutoFit/>
+          </a:bodyPr>
+          <a:lstStyle/>
+          <a:p>
+            <a:pPr algn="l">
               <a:lnSpc>
                 <a:spcPct val="110000"/>
               </a:lnSpc>
@@ -11497,13 +14827,13 @@
               </a:spcAft>
             </a:pPr>
             <a:r>
-              <a:rPr sz="2160" b="0" i="0" spc="-81">
+              <a:rPr sz="2080" b="0" i="0" spc="-78">
                 <a:solidFill>
                   <a:srgbClr val="314359"/>
                 </a:solidFill>
                 <a:latin typeface="Times New Roman"/>
               </a:rPr>
-              <a:t>18×</a:t>
+              <a:t>2.40</a:t>
             </a:r>
           </a:p>
         </p:txBody>
@@ -11516,8 +14846,8 @@
         </p:nvSpPr>
         <p:spPr>
           <a:xfrm>
-            <a:off x="5003721" y="3121152"/>
-            <a:ext cx="1989784" cy="390144"/>
+            <a:off x="5559691" y="5462016"/>
+            <a:ext cx="3657691" cy="312115"/>
           </a:xfrm>
           <a:prstGeom prst="rect">
             <a:avLst/>
@@ -11530,67 +14860,65 @@
           </a:bodyPr>
           <a:lstStyle/>
           <a:p>
-            <a:pPr algn="ctr">
-              <a:lnSpc>
-                <a:spcPct val="105000"/>
+            <a:pPr algn="l">
+              <a:lnSpc>
+                <a:spcPct val="110000"/>
               </a:lnSpc>
               <a:spcAft>
                 <a:spcPts val="0"/>
               </a:spcAft>
             </a:pPr>
             <a:r>
-              <a:rPr sz="760" b="0" i="0">
+              <a:rPr sz="880" b="0" i="0">
                 <a:solidFill>
                   <a:srgbClr val="556A83"/>
                 </a:solidFill>
                 <a:latin typeface="Arial"/>
               </a:rPr>
-              <a:t>growth of capital since 2006</a:t>
-            </a:r>
-          </a:p>
-        </p:txBody>
-      </p:sp>
-      <p:sp>
-        <p:nvSpPr>
-          <p:cNvPr id="18" name="Rectangle 17"/>
-          <p:cNvSpPr/>
-          <p:nvPr/>
-        </p:nvSpPr>
-        <p:spPr>
-          <a:xfrm>
-            <a:off x="7176390" y="2340864"/>
-            <a:ext cx="2136091" cy="1219200"/>
-          </a:xfrm>
-          <a:prstGeom prst="rect">
-            <a:avLst/>
-          </a:prstGeom>
-          <a:solidFill>
-            <a:srgbClr val="F6F7F9"/>
-          </a:solidFill>
-          <a:ln>
-            <a:noFill/>
-          </a:ln>
-          <a:effectLst/>
-        </p:spPr>
-        <p:style>
-          <a:lnRef idx="1">
-            <a:schemeClr val="accent1"/>
-          </a:lnRef>
-          <a:fillRef idx="3">
-            <a:schemeClr val="accent1"/>
-          </a:fillRef>
-          <a:effectRef idx="2">
-            <a:schemeClr val="accent1"/>
-          </a:effectRef>
-          <a:fontRef idx="minor">
-            <a:schemeClr val="lt1"/>
-          </a:fontRef>
-        </p:style>
-        <p:txBody>
-          <a:bodyPr rtlCol="0" anchor="ctr"/>
-          <a:lstStyle/>
-          <a:p>
-            <a:pPr algn="ctr"/>
+              <a:t>Sortino ratio — downside-aware</a:t>
+            </a:r>
+          </a:p>
+        </p:txBody>
+      </p:sp>
+      <p:sp>
+        <p:nvSpPr>
+          <p:cNvPr id="18" name="TextBox 17"/>
+          <p:cNvSpPr txBox="1"/>
+          <p:nvPr/>
+        </p:nvSpPr>
+        <p:spPr>
+          <a:xfrm>
+            <a:off x="5559691" y="5842406"/>
+            <a:ext cx="3657691" cy="682752"/>
+          </a:xfrm>
+          <a:prstGeom prst="rect">
+            <a:avLst/>
+          </a:prstGeom>
+          <a:noFill/>
+        </p:spPr>
+        <p:txBody>
+          <a:bodyPr wrap="square" anchor="t" lIns="0" rIns="0" tIns="0" bIns="0">
+            <a:spAutoFit/>
+          </a:bodyPr>
+          <a:lstStyle/>
+          <a:p>
+            <a:pPr algn="l">
+              <a:lnSpc>
+                <a:spcPct val="118000"/>
+              </a:lnSpc>
+              <a:spcAft>
+                <a:spcPts val="0"/>
+              </a:spcAft>
+            </a:pPr>
+            <a:r>
+              <a:rPr sz="840" b="0" i="0">
+                <a:solidFill>
+                  <a:srgbClr val="0E1620"/>
+                </a:solidFill>
+                <a:latin typeface="Arial"/>
+              </a:rPr>
+              <a:t>Two market drawdowns (2010, 2020) fully recovered; even the worst entry month still compounded at +7% net.</a:t>
+            </a:r>
           </a:p>
         </p:txBody>
       </p:sp>
@@ -11602,21 +14930,21 @@
         </p:nvSpPr>
         <p:spPr>
           <a:xfrm>
-            <a:off x="7176390" y="2496921"/>
-            <a:ext cx="2136091" cy="585216"/>
-          </a:xfrm>
-          <a:prstGeom prst="rect">
-            <a:avLst/>
-          </a:prstGeom>
-          <a:noFill/>
-        </p:spPr>
-        <p:txBody>
-          <a:bodyPr wrap="square" anchor="ctr" lIns="0" rIns="0" tIns="0" bIns="0">
-            <a:spAutoFit/>
-          </a:bodyPr>
-          <a:lstStyle/>
-          <a:p>
-            <a:pPr algn="ctr">
+            <a:off x="329192" y="6300825"/>
+            <a:ext cx="5084191" cy="390144"/>
+          </a:xfrm>
+          <a:prstGeom prst="rect">
+            <a:avLst/>
+          </a:prstGeom>
+          <a:noFill/>
+        </p:spPr>
+        <p:txBody>
+          <a:bodyPr wrap="square" anchor="t" lIns="0" rIns="0" tIns="0" bIns="0">
+            <a:spAutoFit/>
+          </a:bodyPr>
+          <a:lstStyle/>
+          <a:p>
+            <a:pPr algn="l">
               <a:lnSpc>
                 <a:spcPct val="110000"/>
               </a:lnSpc>
@@ -11625,290 +14953,13 @@
               </a:spcAft>
             </a:pPr>
             <a:r>
-              <a:rPr sz="2160" b="0" i="0" spc="-81">
-                <a:solidFill>
-                  <a:srgbClr val="314359"/>
-                </a:solidFill>
-                <a:latin typeface="Times New Roman"/>
-              </a:rPr>
-              <a:t>0%</a:t>
-            </a:r>
-          </a:p>
-        </p:txBody>
-      </p:sp>
-      <p:sp>
-        <p:nvSpPr>
-          <p:cNvPr id="20" name="TextBox 19"/>
-          <p:cNvSpPr txBox="1"/>
-          <p:nvPr/>
-        </p:nvSpPr>
-        <p:spPr>
-          <a:xfrm>
-            <a:off x="7249544" y="3121152"/>
-            <a:ext cx="1989784" cy="390144"/>
-          </a:xfrm>
-          <a:prstGeom prst="rect">
-            <a:avLst/>
-          </a:prstGeom>
-          <a:noFill/>
-        </p:spPr>
-        <p:txBody>
-          <a:bodyPr wrap="square" anchor="t" lIns="0" rIns="0" tIns="0" bIns="0">
-            <a:spAutoFit/>
-          </a:bodyPr>
-          <a:lstStyle/>
-          <a:p>
-            <a:pPr algn="ctr">
-              <a:lnSpc>
-                <a:spcPct val="105000"/>
-              </a:lnSpc>
-              <a:spcAft>
-                <a:spcPts val="0"/>
-              </a:spcAft>
-            </a:pPr>
-            <a:r>
-              <a:rPr sz="760" b="0" i="0">
+              <a:rPr sz="600" b="0" i="1">
                 <a:solidFill>
                   <a:srgbClr val="556A83"/>
                 </a:solidFill>
                 <a:latin typeface="Arial"/>
               </a:rPr>
-              <a:t>investor loss over a holding period</a:t>
-            </a:r>
-          </a:p>
-        </p:txBody>
-      </p:sp>
-      <p:sp>
-        <p:nvSpPr>
-          <p:cNvPr id="21" name="TextBox 20"/>
-          <p:cNvSpPr txBox="1"/>
-          <p:nvPr/>
-        </p:nvSpPr>
-        <p:spPr>
-          <a:xfrm>
-            <a:off x="548653" y="3803904"/>
-            <a:ext cx="8705305" cy="4096512"/>
-          </a:xfrm>
-          <a:prstGeom prst="rect">
-            <a:avLst/>
-          </a:prstGeom>
-          <a:noFill/>
-        </p:spPr>
-        <p:txBody>
-          <a:bodyPr wrap="square" anchor="t" lIns="0" rIns="0" tIns="0" bIns="0">
-            <a:spAutoFit/>
-          </a:bodyPr>
-          <a:lstStyle/>
-          <a:p>
-            <a:pPr>
-              <a:lnSpc>
-                <a:spcPct val="118000"/>
-              </a:lnSpc>
-              <a:spcAft>
-                <a:spcPts val="1000"/>
-              </a:spcAft>
-            </a:pPr>
-            <a:r>
-              <a:rPr sz="1080" b="1">
-                <a:solidFill>
-                  <a:srgbClr val="314359"/>
-                </a:solidFill>
-                <a:latin typeface="Arial"/>
-              </a:rPr>
-              <a:t>Downside protection.  </a:t>
-            </a:r>
-            <a:r>
-              <a:rPr sz="1080">
-                <a:solidFill>
-                  <a:srgbClr val="0E1620"/>
-                </a:solidFill>
-                <a:latin typeface="Arial"/>
-              </a:rPr>
-              <a:t>two market drawdowns fully recovered (2010, 2020); Sortino ratio 2.40 — return with genuine resilience.</a:t>
-            </a:r>
-          </a:p>
-          <a:p>
-            <a:pPr>
-              <a:lnSpc>
-                <a:spcPct val="118000"/>
-              </a:lnSpc>
-              <a:spcAft>
-                <a:spcPts val="1000"/>
-              </a:spcAft>
-            </a:pPr>
-            <a:r>
-              <a:rPr sz="1080" b="1">
-                <a:solidFill>
-                  <a:srgbClr val="314359"/>
-                </a:solidFill>
-                <a:latin typeface="Arial"/>
-              </a:rPr>
-              <a:t>Entry timing is a non-risk.  </a:t>
-            </a:r>
-            <a:r>
-              <a:rPr sz="1080">
-                <a:solidFill>
-                  <a:srgbClr val="0E1620"/>
-                </a:solidFill>
-                <a:latin typeface="Arial"/>
-              </a:rPr>
-              <a:t>even the worst entry month in 20 years still compounded at +7% net.</a:t>
-            </a:r>
-          </a:p>
-          <a:p>
-            <a:pPr>
-              <a:lnSpc>
-                <a:spcPct val="118000"/>
-              </a:lnSpc>
-              <a:spcAft>
-                <a:spcPts val="1000"/>
-              </a:spcAft>
-            </a:pPr>
-            <a:r>
-              <a:rPr sz="1080" b="1">
-                <a:solidFill>
-                  <a:srgbClr val="314359"/>
-                </a:solidFill>
-                <a:latin typeface="Arial"/>
-              </a:rPr>
-              <a:t>Independently verified.  </a:t>
-            </a:r>
-            <a:r>
-              <a:rPr sz="1080">
-                <a:solidFill>
-                  <a:srgbClr val="0E1620"/>
-                </a:solidFill>
-                <a:latin typeface="Arial"/>
-              </a:rPr>
-              <a:t>custody by SEB, administration by MUFG, audit by KPMG.</a:t>
-            </a:r>
-          </a:p>
-        </p:txBody>
-      </p:sp>
-      <p:sp>
-        <p:nvSpPr>
-          <p:cNvPr id="22" name="TextBox 21"/>
-          <p:cNvSpPr txBox="1"/>
-          <p:nvPr/>
-        </p:nvSpPr>
-        <p:spPr>
-          <a:xfrm>
-            <a:off x="438922" y="5910681"/>
-            <a:ext cx="8851613" cy="292608"/>
-          </a:xfrm>
-          <a:prstGeom prst="rect">
-            <a:avLst/>
-          </a:prstGeom>
-          <a:noFill/>
-        </p:spPr>
-        <p:txBody>
-          <a:bodyPr wrap="square" anchor="t" lIns="0" rIns="0" tIns="0" bIns="0">
-            <a:spAutoFit/>
-          </a:bodyPr>
-          <a:lstStyle/>
-          <a:p>
-            <a:pPr algn="l">
-              <a:lnSpc>
-                <a:spcPct val="110000"/>
-              </a:lnSpc>
-              <a:spcAft>
-                <a:spcPts val="0"/>
-              </a:spcAft>
-            </a:pPr>
-            <a:r>
-              <a:rPr sz="640" b="0" i="1">
-                <a:solidFill>
-                  <a:srgbClr val="556A83"/>
-                </a:solidFill>
-                <a:latin typeface="Arial"/>
-              </a:rPr>
-              <a:t>Net of fees, 2006–2025, independently reconciled. The trust is newly proposed; this is the manager’s existing strategy. Past performance is not a guide to future returns.</a:t>
-            </a:r>
-          </a:p>
-        </p:txBody>
-      </p:sp>
-      <p:sp>
-        <p:nvSpPr>
-          <p:cNvPr id="23" name="Rectangle 22"/>
-          <p:cNvSpPr/>
-          <p:nvPr/>
-        </p:nvSpPr>
-        <p:spPr>
-          <a:xfrm>
-            <a:off x="438922" y="6261811"/>
-            <a:ext cx="8895505" cy="546201"/>
-          </a:xfrm>
-          <a:prstGeom prst="rect">
-            <a:avLst/>
-          </a:prstGeom>
-          <a:solidFill>
-            <a:srgbClr val="152130"/>
-          </a:solidFill>
-          <a:ln>
-            <a:noFill/>
-          </a:ln>
-          <a:effectLst/>
-        </p:spPr>
-        <p:style>
-          <a:lnRef idx="1">
-            <a:schemeClr val="accent1"/>
-          </a:lnRef>
-          <a:fillRef idx="3">
-            <a:schemeClr val="accent1"/>
-          </a:fillRef>
-          <a:effectRef idx="2">
-            <a:schemeClr val="accent1"/>
-          </a:effectRef>
-          <a:fontRef idx="minor">
-            <a:schemeClr val="lt1"/>
-          </a:fontRef>
-        </p:style>
-        <p:txBody>
-          <a:bodyPr rtlCol="0" anchor="ctr"/>
-          <a:lstStyle/>
-          <a:p>
-            <a:pPr algn="ctr"/>
-          </a:p>
-        </p:txBody>
-      </p:sp>
-      <p:sp>
-        <p:nvSpPr>
-          <p:cNvPr id="24" name="TextBox 23"/>
-          <p:cNvSpPr txBox="1"/>
-          <p:nvPr/>
-        </p:nvSpPr>
-        <p:spPr>
-          <a:xfrm>
-            <a:off x="585230" y="6261811"/>
-            <a:ext cx="8632151" cy="546201"/>
-          </a:xfrm>
-          <a:prstGeom prst="rect">
-            <a:avLst/>
-          </a:prstGeom>
-          <a:noFill/>
-        </p:spPr>
-        <p:txBody>
-          <a:bodyPr wrap="square" anchor="ctr" lIns="0" rIns="0" tIns="0" bIns="0">
-            <a:spAutoFit/>
-          </a:bodyPr>
-          <a:lstStyle/>
-          <a:p>
-            <a:pPr algn="l">
-              <a:lnSpc>
-                <a:spcPct val="110000"/>
-              </a:lnSpc>
-              <a:spcAft>
-                <a:spcPts val="0"/>
-              </a:spcAft>
-            </a:pPr>
-            <a:r>
-              <a:rPr sz="960" b="0" i="1">
-                <a:solidFill>
-                  <a:srgbClr val="FFFFFF"/>
-                </a:solidFill>
-                <a:latin typeface="Arial"/>
-              </a:rPr>
-              <a:t>Returns from operating improvement — repeatable, and verified by tier-one institutions.</a:t>
+              <a:t>Cumulative growth of capital, net of fees, 2006–2025 (log scale); SEB · MUFG · KPMG. Newly-proposed trust; manager’s existing strategy. Past performance is not a guide to future returns.</a:t>
             </a:r>
           </a:p>
         </p:txBody>

--- a/Athanase_Investment_Trust_Pitch.pptx
+++ b/Athanase_Investment_Trust_Pitch.pptx
@@ -16360,7 +16360,7 @@
                 </a:solidFill>
                 <a:latin typeface="Arial"/>
               </a:rPr>
-              <a:t>shares trade on the London Stock Exchange — an institutional strategy with daily dealing and no capital calls.</a:t>
+              <a:t>shares trade on the London Stock Exchange — daily dealing and no capital calls, while evergreen PE funds are gating redemptions (Partners Group, June 2026).</a:t>
             </a:r>
           </a:p>
           <a:p>
@@ -22505,7 +22505,7 @@
                 <a:spcPct val="118000"/>
               </a:lnSpc>
               <a:spcAft>
-                <a:spcPts val="1500"/>
+                <a:spcPts val="1400"/>
               </a:spcAft>
             </a:pPr>
             <a:r>
@@ -22533,7 +22533,7 @@
                 <a:spcPct val="118000"/>
               </a:lnSpc>
               <a:spcAft>
-                <a:spcPts val="1500"/>
+                <a:spcPts val="1400"/>
               </a:spcAft>
             </a:pPr>
             <a:r>
@@ -22561,7 +22561,7 @@
                 <a:spcPct val="118000"/>
               </a:lnSpc>
               <a:spcAft>
-                <a:spcPts val="1500"/>
+                <a:spcPts val="1400"/>
               </a:spcAft>
             </a:pPr>
             <a:r>
@@ -22593,8 +22593,52 @@
         </p:nvSpPr>
         <p:spPr>
           <a:xfrm>
-            <a:off x="438922" y="6300825"/>
-            <a:ext cx="8895505" cy="585216"/>
+            <a:off x="438922" y="5188915"/>
+            <a:ext cx="8895505" cy="936345"/>
+          </a:xfrm>
+          <a:prstGeom prst="rect">
+            <a:avLst/>
+          </a:prstGeom>
+          <a:solidFill>
+            <a:srgbClr val="F6F7F9"/>
+          </a:solidFill>
+          <a:ln>
+            <a:noFill/>
+          </a:ln>
+          <a:effectLst/>
+        </p:spPr>
+        <p:style>
+          <a:lnRef idx="1">
+            <a:schemeClr val="accent1"/>
+          </a:lnRef>
+          <a:fillRef idx="3">
+            <a:schemeClr val="accent1"/>
+          </a:fillRef>
+          <a:effectRef idx="2">
+            <a:schemeClr val="accent1"/>
+          </a:effectRef>
+          <a:fontRef idx="minor">
+            <a:schemeClr val="lt1"/>
+          </a:fontRef>
+        </p:style>
+        <p:txBody>
+          <a:bodyPr rtlCol="0" anchor="ctr"/>
+          <a:lstStyle/>
+          <a:p>
+            <a:pPr algn="ctr"/>
+          </a:p>
+        </p:txBody>
+      </p:sp>
+      <p:sp>
+        <p:nvSpPr>
+          <p:cNvPr id="11" name="Rectangle 10"/>
+          <p:cNvSpPr/>
+          <p:nvPr/>
+        </p:nvSpPr>
+        <p:spPr>
+          <a:xfrm>
+            <a:off x="438922" y="5188915"/>
+            <a:ext cx="58523" cy="936345"/>
           </a:xfrm>
           <a:prstGeom prst="rect">
             <a:avLst/>
@@ -22631,7 +22675,135 @@
       </p:sp>
       <p:sp>
         <p:nvSpPr>
-          <p:cNvPr id="11" name="TextBox 10"/>
+          <p:cNvPr id="12" name="TextBox 11"/>
+          <p:cNvSpPr txBox="1"/>
+          <p:nvPr/>
+        </p:nvSpPr>
+        <p:spPr>
+          <a:xfrm>
+            <a:off x="621807" y="5296204"/>
+            <a:ext cx="8485844" cy="292608"/>
+          </a:xfrm>
+          <a:prstGeom prst="rect">
+            <a:avLst/>
+          </a:prstGeom>
+          <a:noFill/>
+        </p:spPr>
+        <p:txBody>
+          <a:bodyPr wrap="square" anchor="t" lIns="0" rIns="0" tIns="0" bIns="0">
+            <a:spAutoFit/>
+          </a:bodyPr>
+          <a:lstStyle/>
+          <a:p>
+            <a:pPr algn="l">
+              <a:lnSpc>
+                <a:spcPct val="110000"/>
+              </a:lnSpc>
+              <a:spcAft>
+                <a:spcPts val="400"/>
+              </a:spcAft>
+            </a:pPr>
+            <a:r>
+              <a:rPr sz="760" b="1" i="0">
+                <a:solidFill>
+                  <a:srgbClr val="314359"/>
+                </a:solidFill>
+                <a:latin typeface="Arial"/>
+              </a:rPr>
+              <a:t>LIVE — JUNE 2026  ·  BLOOMBERG / CNBC</a:t>
+            </a:r>
+          </a:p>
+        </p:txBody>
+      </p:sp>
+      <p:sp>
+        <p:nvSpPr>
+          <p:cNvPr id="13" name="TextBox 12"/>
+          <p:cNvSpPr txBox="1"/>
+          <p:nvPr/>
+        </p:nvSpPr>
+        <p:spPr>
+          <a:xfrm>
+            <a:off x="621807" y="5579059"/>
+            <a:ext cx="8595575" cy="487680"/>
+          </a:xfrm>
+          <a:prstGeom prst="rect">
+            <a:avLst/>
+          </a:prstGeom>
+          <a:noFill/>
+        </p:spPr>
+        <p:txBody>
+          <a:bodyPr wrap="square" anchor="t" lIns="0" rIns="0" tIns="0" bIns="0">
+            <a:spAutoFit/>
+          </a:bodyPr>
+          <a:lstStyle/>
+          <a:p>
+            <a:pPr algn="l">
+              <a:lnSpc>
+                <a:spcPct val="116000"/>
+              </a:lnSpc>
+              <a:spcAft>
+                <a:spcPts val="0"/>
+              </a:spcAft>
+            </a:pPr>
+            <a:r>
+              <a:rPr sz="919" b="0" i="0">
+                <a:solidFill>
+                  <a:srgbClr val="0E1620"/>
+                </a:solidFill>
+                <a:latin typeface="Arial"/>
+              </a:rPr>
+              <a:t>Partners Group capped redemptions in its $8.6bn evergreen private-equity fund at 5% of NAV after withdrawal requests hit 9.8% — KKR, Blackstone and Ares fell on the news. The PE exit is closing, exactly as feared.</a:t>
+            </a:r>
+          </a:p>
+        </p:txBody>
+      </p:sp>
+      <p:sp>
+        <p:nvSpPr>
+          <p:cNvPr id="14" name="Rectangle 13"/>
+          <p:cNvSpPr/>
+          <p:nvPr/>
+        </p:nvSpPr>
+        <p:spPr>
+          <a:xfrm>
+            <a:off x="438922" y="6300825"/>
+            <a:ext cx="8895505" cy="585216"/>
+          </a:xfrm>
+          <a:prstGeom prst="rect">
+            <a:avLst/>
+          </a:prstGeom>
+          <a:solidFill>
+            <a:srgbClr val="152130"/>
+          </a:solidFill>
+          <a:ln>
+            <a:noFill/>
+          </a:ln>
+          <a:effectLst/>
+        </p:spPr>
+        <p:style>
+          <a:lnRef idx="1">
+            <a:schemeClr val="accent1"/>
+          </a:lnRef>
+          <a:fillRef idx="3">
+            <a:schemeClr val="accent1"/>
+          </a:fillRef>
+          <a:effectRef idx="2">
+            <a:schemeClr val="accent1"/>
+          </a:effectRef>
+          <a:fontRef idx="minor">
+            <a:schemeClr val="lt1"/>
+          </a:fontRef>
+        </p:style>
+        <p:txBody>
+          <a:bodyPr rtlCol="0" anchor="ctr"/>
+          <a:lstStyle/>
+          <a:p>
+            <a:pPr algn="ctr"/>
+          </a:p>
+        </p:txBody>
+      </p:sp>
+      <p:sp>
+        <p:nvSpPr>
+          <p:cNvPr id="15" name="TextBox 14"/>
           <p:cNvSpPr txBox="1"/>
           <p:nvPr/>
         </p:nvSpPr>
@@ -22666,7 +22838,7 @@
                 </a:solidFill>
                 <a:latin typeface="Arial"/>
               </a:rPr>
-              <a:t>The time to own a liquid, low-correlation hedge is while markets are still expensive.</a:t>
+              <a:t>While evergreen PE gates redemptions, a listed trust trades every day the market is open — the liquidity your clients keep when it matters.</a:t>
             </a:r>
           </a:p>
         </p:txBody>
